--- a/my_single_cpu/single_cpu_picture/single_cycle_picture.pptx
+++ b/my_single_cpu/single_cpu_picture/single_cycle_picture.pptx
@@ -6,6 +6,7 @@
   </p:sldMasterIdLst>
   <p:sldIdLst>
     <p:sldId id="256" r:id="rId2"/>
+    <p:sldId id="258" r:id="rId3"/>
   </p:sldIdLst>
   <p:sldSz cx="7199313" cy="7199313"/>
   <p:notesSz cx="6858000" cy="9144000"/>
@@ -243,7 +244,7 @@
           <a:p>
             <a:fld id="{4F141DFE-BC64-4CEB-ADFF-45A94111FA6E}" type="datetimeFigureOut">
               <a:rPr lang="zh-CN" altLang="en-US" smtClean="0"/>
-              <a:t>2025/7/7</a:t>
+              <a:t>2025/8/2</a:t>
             </a:fld>
             <a:endParaRPr lang="zh-CN" altLang="en-US"/>
           </a:p>
@@ -413,7 +414,7 @@
           <a:p>
             <a:fld id="{4F141DFE-BC64-4CEB-ADFF-45A94111FA6E}" type="datetimeFigureOut">
               <a:rPr lang="zh-CN" altLang="en-US" smtClean="0"/>
-              <a:t>2025/7/7</a:t>
+              <a:t>2025/8/2</a:t>
             </a:fld>
             <a:endParaRPr lang="zh-CN" altLang="en-US"/>
           </a:p>
@@ -593,7 +594,7 @@
           <a:p>
             <a:fld id="{4F141DFE-BC64-4CEB-ADFF-45A94111FA6E}" type="datetimeFigureOut">
               <a:rPr lang="zh-CN" altLang="en-US" smtClean="0"/>
-              <a:t>2025/7/7</a:t>
+              <a:t>2025/8/2</a:t>
             </a:fld>
             <a:endParaRPr lang="zh-CN" altLang="en-US"/>
           </a:p>
@@ -763,7 +764,7 @@
           <a:p>
             <a:fld id="{4F141DFE-BC64-4CEB-ADFF-45A94111FA6E}" type="datetimeFigureOut">
               <a:rPr lang="zh-CN" altLang="en-US" smtClean="0"/>
-              <a:t>2025/7/7</a:t>
+              <a:t>2025/8/2</a:t>
             </a:fld>
             <a:endParaRPr lang="zh-CN" altLang="en-US"/>
           </a:p>
@@ -1007,7 +1008,7 @@
           <a:p>
             <a:fld id="{4F141DFE-BC64-4CEB-ADFF-45A94111FA6E}" type="datetimeFigureOut">
               <a:rPr lang="zh-CN" altLang="en-US" smtClean="0"/>
-              <a:t>2025/7/7</a:t>
+              <a:t>2025/8/2</a:t>
             </a:fld>
             <a:endParaRPr lang="zh-CN" altLang="en-US"/>
           </a:p>
@@ -1239,7 +1240,7 @@
           <a:p>
             <a:fld id="{4F141DFE-BC64-4CEB-ADFF-45A94111FA6E}" type="datetimeFigureOut">
               <a:rPr lang="zh-CN" altLang="en-US" smtClean="0"/>
-              <a:t>2025/7/7</a:t>
+              <a:t>2025/8/2</a:t>
             </a:fld>
             <a:endParaRPr lang="zh-CN" altLang="en-US"/>
           </a:p>
@@ -1606,7 +1607,7 @@
           <a:p>
             <a:fld id="{4F141DFE-BC64-4CEB-ADFF-45A94111FA6E}" type="datetimeFigureOut">
               <a:rPr lang="zh-CN" altLang="en-US" smtClean="0"/>
-              <a:t>2025/7/7</a:t>
+              <a:t>2025/8/2</a:t>
             </a:fld>
             <a:endParaRPr lang="zh-CN" altLang="en-US"/>
           </a:p>
@@ -1724,7 +1725,7 @@
           <a:p>
             <a:fld id="{4F141DFE-BC64-4CEB-ADFF-45A94111FA6E}" type="datetimeFigureOut">
               <a:rPr lang="zh-CN" altLang="en-US" smtClean="0"/>
-              <a:t>2025/7/7</a:t>
+              <a:t>2025/8/2</a:t>
             </a:fld>
             <a:endParaRPr lang="zh-CN" altLang="en-US"/>
           </a:p>
@@ -1819,7 +1820,7 @@
           <a:p>
             <a:fld id="{4F141DFE-BC64-4CEB-ADFF-45A94111FA6E}" type="datetimeFigureOut">
               <a:rPr lang="zh-CN" altLang="en-US" smtClean="0"/>
-              <a:t>2025/7/7</a:t>
+              <a:t>2025/8/2</a:t>
             </a:fld>
             <a:endParaRPr lang="zh-CN" altLang="en-US"/>
           </a:p>
@@ -2096,7 +2097,7 @@
           <a:p>
             <a:fld id="{4F141DFE-BC64-4CEB-ADFF-45A94111FA6E}" type="datetimeFigureOut">
               <a:rPr lang="zh-CN" altLang="en-US" smtClean="0"/>
-              <a:t>2025/7/7</a:t>
+              <a:t>2025/8/2</a:t>
             </a:fld>
             <a:endParaRPr lang="zh-CN" altLang="en-US"/>
           </a:p>
@@ -2353,7 +2354,7 @@
           <a:p>
             <a:fld id="{4F141DFE-BC64-4CEB-ADFF-45A94111FA6E}" type="datetimeFigureOut">
               <a:rPr lang="zh-CN" altLang="en-US" smtClean="0"/>
-              <a:t>2025/7/7</a:t>
+              <a:t>2025/8/2</a:t>
             </a:fld>
             <a:endParaRPr lang="zh-CN" altLang="en-US"/>
           </a:p>
@@ -2566,7 +2567,7 @@
           <a:p>
             <a:fld id="{4F141DFE-BC64-4CEB-ADFF-45A94111FA6E}" type="datetimeFigureOut">
               <a:rPr lang="zh-CN" altLang="en-US" smtClean="0"/>
-              <a:t>2025/7/7</a:t>
+              <a:t>2025/8/2</a:t>
             </a:fld>
             <a:endParaRPr lang="zh-CN" altLang="en-US"/>
           </a:p>
@@ -10925,6 +10926,8365 @@
     <p:extLst>
       <p:ext uri="{BB962C8B-B14F-4D97-AF65-F5344CB8AC3E}">
         <p14:creationId xmlns:p14="http://schemas.microsoft.com/office/powerpoint/2010/main" val="3905685367"/>
+      </p:ext>
+    </p:extLst>
+  </p:cSld>
+  <p:clrMapOvr>
+    <a:masterClrMapping/>
+  </p:clrMapOvr>
+</p:sld>
+</file>
+
+<file path=ppt/slides/slide2.xml><?xml version="1.0" encoding="utf-8"?>
+<p:sld xmlns:a="http://schemas.openxmlformats.org/drawingml/2006/main" xmlns:r="http://schemas.openxmlformats.org/officeDocument/2006/relationships" xmlns:p="http://schemas.openxmlformats.org/presentationml/2006/main">
+  <p:cSld>
+    <p:spTree>
+      <p:nvGrpSpPr>
+        <p:cNvPr id="1" name="">
+          <a:extLst>
+            <a:ext uri="{FF2B5EF4-FFF2-40B4-BE49-F238E27FC236}">
+              <a16:creationId xmlns:a16="http://schemas.microsoft.com/office/drawing/2014/main" id="{3D047083-5899-1324-86F9-718F8FF0E7A2}"/>
+            </a:ext>
+          </a:extLst>
+        </p:cNvPr>
+        <p:cNvGrpSpPr/>
+        <p:nvPr/>
+      </p:nvGrpSpPr>
+      <p:grpSpPr>
+        <a:xfrm>
+          <a:off x="0" y="0"/>
+          <a:ext cx="0" cy="0"/>
+          <a:chOff x="0" y="0"/>
+          <a:chExt cx="0" cy="0"/>
+        </a:xfrm>
+      </p:grpSpPr>
+      <p:sp>
+        <p:nvSpPr>
+          <p:cNvPr id="4" name="矩形 3">
+            <a:extLst>
+              <a:ext uri="{FF2B5EF4-FFF2-40B4-BE49-F238E27FC236}">
+                <a16:creationId xmlns:a16="http://schemas.microsoft.com/office/drawing/2014/main" id="{ED21E4E3-8D54-C682-3179-AF57CB5B5E81}"/>
+              </a:ext>
+            </a:extLst>
+          </p:cNvPr>
+          <p:cNvSpPr/>
+          <p:nvPr/>
+        </p:nvSpPr>
+        <p:spPr>
+          <a:xfrm>
+            <a:off x="655135" y="1888070"/>
+            <a:ext cx="501113" cy="580441"/>
+          </a:xfrm>
+          <a:prstGeom prst="rect">
+            <a:avLst/>
+          </a:prstGeom>
+        </p:spPr>
+        <p:style>
+          <a:lnRef idx="2">
+            <a:schemeClr val="dk1"/>
+          </a:lnRef>
+          <a:fillRef idx="1">
+            <a:schemeClr val="lt1"/>
+          </a:fillRef>
+          <a:effectRef idx="0">
+            <a:schemeClr val="dk1"/>
+          </a:effectRef>
+          <a:fontRef idx="minor">
+            <a:schemeClr val="dk1"/>
+          </a:fontRef>
+        </p:style>
+        <p:txBody>
+          <a:bodyPr rtlCol="0" anchor="ctr"/>
+          <a:lstStyle/>
+          <a:p>
+            <a:pPr algn="ctr"/>
+            <a:endParaRPr lang="zh-CN" altLang="en-US" sz="1063" dirty="0"/>
+          </a:p>
+        </p:txBody>
+      </p:sp>
+      <p:sp>
+        <p:nvSpPr>
+          <p:cNvPr id="31" name="流程图: 手动操作 30">
+            <a:extLst>
+              <a:ext uri="{FF2B5EF4-FFF2-40B4-BE49-F238E27FC236}">
+                <a16:creationId xmlns:a16="http://schemas.microsoft.com/office/drawing/2014/main" id="{D18B39F1-2060-CAAB-D74F-605773147554}"/>
+              </a:ext>
+            </a:extLst>
+          </p:cNvPr>
+          <p:cNvSpPr/>
+          <p:nvPr/>
+        </p:nvSpPr>
+        <p:spPr>
+          <a:xfrm rot="16200000">
+            <a:off x="5685469" y="1697594"/>
+            <a:ext cx="687563" cy="309982"/>
+          </a:xfrm>
+          <a:prstGeom prst="flowChartManualOperation">
+            <a:avLst/>
+          </a:prstGeom>
+        </p:spPr>
+        <p:style>
+          <a:lnRef idx="2">
+            <a:schemeClr val="dk1"/>
+          </a:lnRef>
+          <a:fillRef idx="1">
+            <a:schemeClr val="lt1"/>
+          </a:fillRef>
+          <a:effectRef idx="0">
+            <a:schemeClr val="dk1"/>
+          </a:effectRef>
+          <a:fontRef idx="minor">
+            <a:schemeClr val="dk1"/>
+          </a:fontRef>
+        </p:style>
+        <p:txBody>
+          <a:bodyPr rtlCol="0" anchor="ctr"/>
+          <a:lstStyle/>
+          <a:p>
+            <a:pPr algn="ctr"/>
+            <a:endParaRPr lang="en-US" altLang="zh-CN" sz="700"/>
+          </a:p>
+        </p:txBody>
+      </p:sp>
+      <p:sp>
+        <p:nvSpPr>
+          <p:cNvPr id="32" name="文本框 31">
+            <a:extLst>
+              <a:ext uri="{FF2B5EF4-FFF2-40B4-BE49-F238E27FC236}">
+                <a16:creationId xmlns:a16="http://schemas.microsoft.com/office/drawing/2014/main" id="{EDF8EC2E-2EED-91BC-B787-B7B793848BEC}"/>
+              </a:ext>
+            </a:extLst>
+          </p:cNvPr>
+          <p:cNvSpPr txBox="1"/>
+          <p:nvPr/>
+        </p:nvSpPr>
+        <p:spPr>
+          <a:xfrm>
+            <a:off x="5837959" y="1673161"/>
+            <a:ext cx="462320" cy="307777"/>
+          </a:xfrm>
+          <a:prstGeom prst="rect">
+            <a:avLst/>
+          </a:prstGeom>
+          <a:noFill/>
+        </p:spPr>
+        <p:txBody>
+          <a:bodyPr wrap="square" rtlCol="0">
+            <a:spAutoFit/>
+          </a:bodyPr>
+          <a:lstStyle/>
+          <a:p>
+            <a:r>
+              <a:rPr lang="en-US" altLang="zh-CN" sz="700" dirty="0"/>
+              <a:t>MUX</a:t>
+            </a:r>
+          </a:p>
+          <a:p>
+            <a:r>
+              <a:rPr lang="en-US" altLang="zh-CN" sz="700" dirty="0"/>
+              <a:t> 2_1</a:t>
+            </a:r>
+            <a:endParaRPr lang="zh-CN" altLang="en-US" sz="700" dirty="0"/>
+          </a:p>
+        </p:txBody>
+      </p:sp>
+      <p:sp>
+        <p:nvSpPr>
+          <p:cNvPr id="33" name="文本框 32">
+            <a:extLst>
+              <a:ext uri="{FF2B5EF4-FFF2-40B4-BE49-F238E27FC236}">
+                <a16:creationId xmlns:a16="http://schemas.microsoft.com/office/drawing/2014/main" id="{8303BBF0-2D6B-2B55-BD8A-E3A7FA0A522D}"/>
+              </a:ext>
+            </a:extLst>
+          </p:cNvPr>
+          <p:cNvSpPr txBox="1"/>
+          <p:nvPr/>
+        </p:nvSpPr>
+        <p:spPr>
+          <a:xfrm>
+            <a:off x="5874258" y="1947059"/>
+            <a:ext cx="353389" cy="200055"/>
+          </a:xfrm>
+          <a:prstGeom prst="rect">
+            <a:avLst/>
+          </a:prstGeom>
+          <a:noFill/>
+        </p:spPr>
+        <p:txBody>
+          <a:bodyPr wrap="square" rtlCol="0">
+            <a:spAutoFit/>
+          </a:bodyPr>
+          <a:lstStyle/>
+          <a:p>
+            <a:r>
+              <a:rPr lang="en-US" altLang="zh-CN" sz="700" dirty="0" err="1"/>
+              <a:t>sel</a:t>
+            </a:r>
+            <a:endParaRPr lang="en-US" altLang="zh-CN" sz="700" dirty="0"/>
+          </a:p>
+        </p:txBody>
+      </p:sp>
+      <p:cxnSp>
+        <p:nvCxnSpPr>
+          <p:cNvPr id="34" name="直接箭头连接符 33">
+            <a:extLst>
+              <a:ext uri="{FF2B5EF4-FFF2-40B4-BE49-F238E27FC236}">
+                <a16:creationId xmlns:a16="http://schemas.microsoft.com/office/drawing/2014/main" id="{622C4DC8-BE1A-4576-B35F-F888AC3F0A48}"/>
+              </a:ext>
+            </a:extLst>
+          </p:cNvPr>
+          <p:cNvCxnSpPr>
+            <a:endCxn id="31" idx="1"/>
+          </p:cNvCxnSpPr>
+          <p:nvPr/>
+        </p:nvCxnSpPr>
+        <p:spPr>
+          <a:xfrm flipH="1" flipV="1">
+            <a:off x="6029251" y="2127612"/>
+            <a:ext cx="1745" cy="301569"/>
+          </a:xfrm>
+          <a:prstGeom prst="straightConnector1">
+            <a:avLst/>
+          </a:prstGeom>
+          <a:ln>
+            <a:solidFill>
+              <a:srgbClr val="FF0000"/>
+            </a:solidFill>
+            <a:tailEnd type="triangle"/>
+          </a:ln>
+        </p:spPr>
+        <p:style>
+          <a:lnRef idx="1">
+            <a:schemeClr val="dk1"/>
+          </a:lnRef>
+          <a:fillRef idx="0">
+            <a:schemeClr val="dk1"/>
+          </a:fillRef>
+          <a:effectRef idx="0">
+            <a:schemeClr val="dk1"/>
+          </a:effectRef>
+          <a:fontRef idx="minor">
+            <a:schemeClr val="tx1"/>
+          </a:fontRef>
+        </p:style>
+      </p:cxnSp>
+      <p:cxnSp>
+        <p:nvCxnSpPr>
+          <p:cNvPr id="35" name="直接箭头连接符 34">
+            <a:extLst>
+              <a:ext uri="{FF2B5EF4-FFF2-40B4-BE49-F238E27FC236}">
+                <a16:creationId xmlns:a16="http://schemas.microsoft.com/office/drawing/2014/main" id="{C9CC8C69-FBD7-41B7-71CE-4CA537B2BA90}"/>
+              </a:ext>
+            </a:extLst>
+          </p:cNvPr>
+          <p:cNvCxnSpPr/>
+          <p:nvPr/>
+        </p:nvCxnSpPr>
+        <p:spPr>
+          <a:xfrm>
+            <a:off x="5428765" y="1972733"/>
+            <a:ext cx="445494" cy="0"/>
+          </a:xfrm>
+          <a:prstGeom prst="straightConnector1">
+            <a:avLst/>
+          </a:prstGeom>
+          <a:ln>
+            <a:tailEnd type="triangle"/>
+          </a:ln>
+        </p:spPr>
+        <p:style>
+          <a:lnRef idx="1">
+            <a:schemeClr val="dk1"/>
+          </a:lnRef>
+          <a:fillRef idx="0">
+            <a:schemeClr val="dk1"/>
+          </a:fillRef>
+          <a:effectRef idx="0">
+            <a:schemeClr val="dk1"/>
+          </a:effectRef>
+          <a:fontRef idx="minor">
+            <a:schemeClr val="tx1"/>
+          </a:fontRef>
+        </p:style>
+      </p:cxnSp>
+      <p:cxnSp>
+        <p:nvCxnSpPr>
+          <p:cNvPr id="36" name="直接箭头连接符 35">
+            <a:extLst>
+              <a:ext uri="{FF2B5EF4-FFF2-40B4-BE49-F238E27FC236}">
+                <a16:creationId xmlns:a16="http://schemas.microsoft.com/office/drawing/2014/main" id="{6A29F9B1-93D3-34D1-6184-4B25C0E84433}"/>
+              </a:ext>
+            </a:extLst>
+          </p:cNvPr>
+          <p:cNvCxnSpPr/>
+          <p:nvPr/>
+        </p:nvCxnSpPr>
+        <p:spPr>
+          <a:xfrm>
+            <a:off x="5424611" y="1724449"/>
+            <a:ext cx="449648" cy="0"/>
+          </a:xfrm>
+          <a:prstGeom prst="straightConnector1">
+            <a:avLst/>
+          </a:prstGeom>
+          <a:ln>
+            <a:tailEnd type="triangle"/>
+          </a:ln>
+        </p:spPr>
+        <p:style>
+          <a:lnRef idx="1">
+            <a:schemeClr val="dk1"/>
+          </a:lnRef>
+          <a:fillRef idx="0">
+            <a:schemeClr val="dk1"/>
+          </a:fillRef>
+          <a:effectRef idx="0">
+            <a:schemeClr val="dk1"/>
+          </a:effectRef>
+          <a:fontRef idx="minor">
+            <a:schemeClr val="tx1"/>
+          </a:fontRef>
+        </p:style>
+      </p:cxnSp>
+      <p:sp>
+        <p:nvSpPr>
+          <p:cNvPr id="37" name="文本框 36">
+            <a:extLst>
+              <a:ext uri="{FF2B5EF4-FFF2-40B4-BE49-F238E27FC236}">
+                <a16:creationId xmlns:a16="http://schemas.microsoft.com/office/drawing/2014/main" id="{3CD497BE-22A5-8F48-A6AA-D771317C2731}"/>
+              </a:ext>
+            </a:extLst>
+          </p:cNvPr>
+          <p:cNvSpPr txBox="1"/>
+          <p:nvPr/>
+        </p:nvSpPr>
+        <p:spPr>
+          <a:xfrm>
+            <a:off x="5360339" y="1601511"/>
+            <a:ext cx="564850" cy="153888"/>
+          </a:xfrm>
+          <a:prstGeom prst="rect">
+            <a:avLst/>
+          </a:prstGeom>
+          <a:noFill/>
+        </p:spPr>
+        <p:txBody>
+          <a:bodyPr wrap="square" rtlCol="0">
+            <a:spAutoFit/>
+          </a:bodyPr>
+          <a:lstStyle/>
+          <a:p>
+            <a:r>
+              <a:rPr lang="en-US" altLang="zh-CN" sz="400" dirty="0"/>
+              <a:t>RF_rD2 32bits</a:t>
+            </a:r>
+            <a:endParaRPr lang="zh-CN" altLang="en-US" sz="400" dirty="0"/>
+          </a:p>
+        </p:txBody>
+      </p:sp>
+      <p:sp>
+        <p:nvSpPr>
+          <p:cNvPr id="38" name="文本框 37">
+            <a:extLst>
+              <a:ext uri="{FF2B5EF4-FFF2-40B4-BE49-F238E27FC236}">
+                <a16:creationId xmlns:a16="http://schemas.microsoft.com/office/drawing/2014/main" id="{6151CC51-F3B4-81CF-4AEF-ADFB023505A9}"/>
+              </a:ext>
+            </a:extLst>
+          </p:cNvPr>
+          <p:cNvSpPr txBox="1"/>
+          <p:nvPr/>
+        </p:nvSpPr>
+        <p:spPr>
+          <a:xfrm>
+            <a:off x="5357052" y="1848599"/>
+            <a:ext cx="564850" cy="153888"/>
+          </a:xfrm>
+          <a:prstGeom prst="rect">
+            <a:avLst/>
+          </a:prstGeom>
+          <a:noFill/>
+        </p:spPr>
+        <p:txBody>
+          <a:bodyPr wrap="square" rtlCol="0">
+            <a:spAutoFit/>
+          </a:bodyPr>
+          <a:lstStyle/>
+          <a:p>
+            <a:r>
+              <a:rPr lang="en-US" altLang="zh-CN" sz="400" dirty="0" err="1"/>
+              <a:t>SEXT_ext</a:t>
+            </a:r>
+            <a:r>
+              <a:rPr lang="en-US" altLang="zh-CN" sz="400" dirty="0"/>
+              <a:t> 32bits</a:t>
+            </a:r>
+            <a:endParaRPr lang="zh-CN" altLang="en-US" sz="400" dirty="0"/>
+          </a:p>
+        </p:txBody>
+      </p:sp>
+      <p:cxnSp>
+        <p:nvCxnSpPr>
+          <p:cNvPr id="39" name="直接连接符 38">
+            <a:extLst>
+              <a:ext uri="{FF2B5EF4-FFF2-40B4-BE49-F238E27FC236}">
+                <a16:creationId xmlns:a16="http://schemas.microsoft.com/office/drawing/2014/main" id="{0FC01865-2B6C-0E40-B01B-60AC511D2EB0}"/>
+              </a:ext>
+            </a:extLst>
+          </p:cNvPr>
+          <p:cNvCxnSpPr/>
+          <p:nvPr/>
+        </p:nvCxnSpPr>
+        <p:spPr>
+          <a:xfrm>
+            <a:off x="6504731" y="1201156"/>
+            <a:ext cx="0" cy="275836"/>
+          </a:xfrm>
+          <a:prstGeom prst="line">
+            <a:avLst/>
+          </a:prstGeom>
+        </p:spPr>
+        <p:style>
+          <a:lnRef idx="1">
+            <a:schemeClr val="dk1"/>
+          </a:lnRef>
+          <a:fillRef idx="0">
+            <a:schemeClr val="dk1"/>
+          </a:fillRef>
+          <a:effectRef idx="0">
+            <a:schemeClr val="dk1"/>
+          </a:effectRef>
+          <a:fontRef idx="minor">
+            <a:schemeClr val="tx1"/>
+          </a:fontRef>
+        </p:style>
+      </p:cxnSp>
+      <p:cxnSp>
+        <p:nvCxnSpPr>
+          <p:cNvPr id="40" name="直接连接符 39">
+            <a:extLst>
+              <a:ext uri="{FF2B5EF4-FFF2-40B4-BE49-F238E27FC236}">
+                <a16:creationId xmlns:a16="http://schemas.microsoft.com/office/drawing/2014/main" id="{067B0DDC-869C-ABB5-D4A4-AC08560D3E1B}"/>
+              </a:ext>
+            </a:extLst>
+          </p:cNvPr>
+          <p:cNvCxnSpPr/>
+          <p:nvPr/>
+        </p:nvCxnSpPr>
+        <p:spPr>
+          <a:xfrm>
+            <a:off x="6504731" y="1594211"/>
+            <a:ext cx="0" cy="278963"/>
+          </a:xfrm>
+          <a:prstGeom prst="line">
+            <a:avLst/>
+          </a:prstGeom>
+        </p:spPr>
+        <p:style>
+          <a:lnRef idx="1">
+            <a:schemeClr val="dk1"/>
+          </a:lnRef>
+          <a:fillRef idx="0">
+            <a:schemeClr val="dk1"/>
+          </a:fillRef>
+          <a:effectRef idx="0">
+            <a:schemeClr val="dk1"/>
+          </a:effectRef>
+          <a:fontRef idx="minor">
+            <a:schemeClr val="tx1"/>
+          </a:fontRef>
+        </p:style>
+      </p:cxnSp>
+      <p:cxnSp>
+        <p:nvCxnSpPr>
+          <p:cNvPr id="41" name="直接连接符 40">
+            <a:extLst>
+              <a:ext uri="{FF2B5EF4-FFF2-40B4-BE49-F238E27FC236}">
+                <a16:creationId xmlns:a16="http://schemas.microsoft.com/office/drawing/2014/main" id="{B81272A8-BA79-36B5-4CC3-E3DD111A4EAE}"/>
+              </a:ext>
+            </a:extLst>
+          </p:cNvPr>
+          <p:cNvCxnSpPr/>
+          <p:nvPr/>
+        </p:nvCxnSpPr>
+        <p:spPr>
+          <a:xfrm>
+            <a:off x="6821162" y="1314872"/>
+            <a:ext cx="0" cy="449411"/>
+          </a:xfrm>
+          <a:prstGeom prst="line">
+            <a:avLst/>
+          </a:prstGeom>
+        </p:spPr>
+        <p:style>
+          <a:lnRef idx="1">
+            <a:schemeClr val="dk1"/>
+          </a:lnRef>
+          <a:fillRef idx="0">
+            <a:schemeClr val="dk1"/>
+          </a:fillRef>
+          <a:effectRef idx="0">
+            <a:schemeClr val="dk1"/>
+          </a:effectRef>
+          <a:fontRef idx="minor">
+            <a:schemeClr val="tx1"/>
+          </a:fontRef>
+        </p:style>
+      </p:cxnSp>
+      <p:cxnSp>
+        <p:nvCxnSpPr>
+          <p:cNvPr id="42" name="直接连接符 41">
+            <a:extLst>
+              <a:ext uri="{FF2B5EF4-FFF2-40B4-BE49-F238E27FC236}">
+                <a16:creationId xmlns:a16="http://schemas.microsoft.com/office/drawing/2014/main" id="{BD393E95-35E9-ACB2-A08D-B14C53F19031}"/>
+              </a:ext>
+            </a:extLst>
+          </p:cNvPr>
+          <p:cNvCxnSpPr/>
+          <p:nvPr/>
+        </p:nvCxnSpPr>
+        <p:spPr>
+          <a:xfrm>
+            <a:off x="6504732" y="1201157"/>
+            <a:ext cx="316431" cy="113715"/>
+          </a:xfrm>
+          <a:prstGeom prst="line">
+            <a:avLst/>
+          </a:prstGeom>
+        </p:spPr>
+        <p:style>
+          <a:lnRef idx="1">
+            <a:schemeClr val="dk1"/>
+          </a:lnRef>
+          <a:fillRef idx="0">
+            <a:schemeClr val="dk1"/>
+          </a:fillRef>
+          <a:effectRef idx="0">
+            <a:schemeClr val="dk1"/>
+          </a:effectRef>
+          <a:fontRef idx="minor">
+            <a:schemeClr val="tx1"/>
+          </a:fontRef>
+        </p:style>
+      </p:cxnSp>
+      <p:cxnSp>
+        <p:nvCxnSpPr>
+          <p:cNvPr id="43" name="直接连接符 42">
+            <a:extLst>
+              <a:ext uri="{FF2B5EF4-FFF2-40B4-BE49-F238E27FC236}">
+                <a16:creationId xmlns:a16="http://schemas.microsoft.com/office/drawing/2014/main" id="{76F1269E-04EE-EBB6-384E-C500E23AD8D2}"/>
+              </a:ext>
+            </a:extLst>
+          </p:cNvPr>
+          <p:cNvCxnSpPr>
+            <a:cxnSpLocks/>
+          </p:cNvCxnSpPr>
+          <p:nvPr/>
+        </p:nvCxnSpPr>
+        <p:spPr>
+          <a:xfrm flipV="1">
+            <a:off x="6504732" y="1764280"/>
+            <a:ext cx="316431" cy="108891"/>
+          </a:xfrm>
+          <a:prstGeom prst="line">
+            <a:avLst/>
+          </a:prstGeom>
+        </p:spPr>
+        <p:style>
+          <a:lnRef idx="1">
+            <a:schemeClr val="dk1"/>
+          </a:lnRef>
+          <a:fillRef idx="0">
+            <a:schemeClr val="dk1"/>
+          </a:fillRef>
+          <a:effectRef idx="0">
+            <a:schemeClr val="dk1"/>
+          </a:effectRef>
+          <a:fontRef idx="minor">
+            <a:schemeClr val="tx1"/>
+          </a:fontRef>
+        </p:style>
+      </p:cxnSp>
+      <p:cxnSp>
+        <p:nvCxnSpPr>
+          <p:cNvPr id="44" name="直接连接符 43">
+            <a:extLst>
+              <a:ext uri="{FF2B5EF4-FFF2-40B4-BE49-F238E27FC236}">
+                <a16:creationId xmlns:a16="http://schemas.microsoft.com/office/drawing/2014/main" id="{353D7E6E-D8B3-E88D-E26A-8932FF0C8A68}"/>
+              </a:ext>
+            </a:extLst>
+          </p:cNvPr>
+          <p:cNvCxnSpPr/>
+          <p:nvPr/>
+        </p:nvCxnSpPr>
+        <p:spPr>
+          <a:xfrm>
+            <a:off x="6504731" y="1476990"/>
+            <a:ext cx="89556" cy="47662"/>
+          </a:xfrm>
+          <a:prstGeom prst="line">
+            <a:avLst/>
+          </a:prstGeom>
+        </p:spPr>
+        <p:style>
+          <a:lnRef idx="1">
+            <a:schemeClr val="dk1"/>
+          </a:lnRef>
+          <a:fillRef idx="0">
+            <a:schemeClr val="dk1"/>
+          </a:fillRef>
+          <a:effectRef idx="0">
+            <a:schemeClr val="dk1"/>
+          </a:effectRef>
+          <a:fontRef idx="minor">
+            <a:schemeClr val="tx1"/>
+          </a:fontRef>
+        </p:style>
+      </p:cxnSp>
+      <p:cxnSp>
+        <p:nvCxnSpPr>
+          <p:cNvPr id="45" name="直接连接符 44">
+            <a:extLst>
+              <a:ext uri="{FF2B5EF4-FFF2-40B4-BE49-F238E27FC236}">
+                <a16:creationId xmlns:a16="http://schemas.microsoft.com/office/drawing/2014/main" id="{B8706A61-C580-3C4C-8520-BE992FA462CA}"/>
+              </a:ext>
+            </a:extLst>
+          </p:cNvPr>
+          <p:cNvCxnSpPr>
+            <a:cxnSpLocks/>
+          </p:cNvCxnSpPr>
+          <p:nvPr/>
+        </p:nvCxnSpPr>
+        <p:spPr>
+          <a:xfrm flipV="1">
+            <a:off x="6504731" y="1524652"/>
+            <a:ext cx="89556" cy="69557"/>
+          </a:xfrm>
+          <a:prstGeom prst="line">
+            <a:avLst/>
+          </a:prstGeom>
+        </p:spPr>
+        <p:style>
+          <a:lnRef idx="1">
+            <a:schemeClr val="dk1"/>
+          </a:lnRef>
+          <a:fillRef idx="0">
+            <a:schemeClr val="dk1"/>
+          </a:fillRef>
+          <a:effectRef idx="0">
+            <a:schemeClr val="dk1"/>
+          </a:effectRef>
+          <a:fontRef idx="minor">
+            <a:schemeClr val="tx1"/>
+          </a:fontRef>
+        </p:style>
+      </p:cxnSp>
+      <p:sp>
+        <p:nvSpPr>
+          <p:cNvPr id="46" name="文本框 45">
+            <a:extLst>
+              <a:ext uri="{FF2B5EF4-FFF2-40B4-BE49-F238E27FC236}">
+                <a16:creationId xmlns:a16="http://schemas.microsoft.com/office/drawing/2014/main" id="{F7629892-1D86-3047-3D9B-133057EFF0A4}"/>
+              </a:ext>
+            </a:extLst>
+          </p:cNvPr>
+          <p:cNvSpPr txBox="1"/>
+          <p:nvPr/>
+        </p:nvSpPr>
+        <p:spPr>
+          <a:xfrm>
+            <a:off x="6517498" y="1206660"/>
+            <a:ext cx="45719" cy="630942"/>
+          </a:xfrm>
+          <a:prstGeom prst="rect">
+            <a:avLst/>
+          </a:prstGeom>
+          <a:noFill/>
+        </p:spPr>
+        <p:txBody>
+          <a:bodyPr wrap="square" rtlCol="0">
+            <a:spAutoFit/>
+          </a:bodyPr>
+          <a:lstStyle/>
+          <a:p>
+            <a:r>
+              <a:rPr lang="en-US" altLang="zh-CN" sz="700" dirty="0"/>
+              <a:t>A</a:t>
+            </a:r>
+          </a:p>
+          <a:p>
+            <a:endParaRPr lang="en-US" altLang="zh-CN" sz="700" dirty="0"/>
+          </a:p>
+          <a:p>
+            <a:endParaRPr lang="en-US" altLang="zh-CN" sz="700" dirty="0"/>
+          </a:p>
+          <a:p>
+            <a:endParaRPr lang="en-US" altLang="zh-CN" sz="700" dirty="0"/>
+          </a:p>
+          <a:p>
+            <a:r>
+              <a:rPr lang="en-US" altLang="zh-CN" sz="700" dirty="0"/>
+              <a:t>B</a:t>
+            </a:r>
+            <a:endParaRPr lang="zh-CN" altLang="en-US" sz="700" dirty="0"/>
+          </a:p>
+        </p:txBody>
+      </p:sp>
+      <p:sp>
+        <p:nvSpPr>
+          <p:cNvPr id="47" name="文本框 46">
+            <a:extLst>
+              <a:ext uri="{FF2B5EF4-FFF2-40B4-BE49-F238E27FC236}">
+                <a16:creationId xmlns:a16="http://schemas.microsoft.com/office/drawing/2014/main" id="{E7CD20B7-A8E1-0ECB-DD8F-8C7EF04D4B35}"/>
+              </a:ext>
+            </a:extLst>
+          </p:cNvPr>
+          <p:cNvSpPr txBox="1"/>
+          <p:nvPr/>
+        </p:nvSpPr>
+        <p:spPr>
+          <a:xfrm>
+            <a:off x="6704457" y="1364201"/>
+            <a:ext cx="108541" cy="415498"/>
+          </a:xfrm>
+          <a:prstGeom prst="rect">
+            <a:avLst/>
+          </a:prstGeom>
+          <a:noFill/>
+        </p:spPr>
+        <p:txBody>
+          <a:bodyPr wrap="square" rtlCol="0">
+            <a:spAutoFit/>
+          </a:bodyPr>
+          <a:lstStyle/>
+          <a:p>
+            <a:r>
+              <a:rPr lang="en-US" altLang="zh-CN" sz="700" dirty="0"/>
+              <a:t>f</a:t>
+            </a:r>
+          </a:p>
+          <a:p>
+            <a:endParaRPr lang="en-US" altLang="zh-CN" sz="700" dirty="0"/>
+          </a:p>
+          <a:p>
+            <a:r>
+              <a:rPr lang="en-US" altLang="zh-CN" sz="700" dirty="0"/>
+              <a:t>C</a:t>
+            </a:r>
+          </a:p>
+        </p:txBody>
+      </p:sp>
+      <p:cxnSp>
+        <p:nvCxnSpPr>
+          <p:cNvPr id="48" name="直接箭头连接符 47">
+            <a:extLst>
+              <a:ext uri="{FF2B5EF4-FFF2-40B4-BE49-F238E27FC236}">
+                <a16:creationId xmlns:a16="http://schemas.microsoft.com/office/drawing/2014/main" id="{CDA6AEA7-EAD6-7144-7B88-A0E054B6FFE7}"/>
+              </a:ext>
+            </a:extLst>
+          </p:cNvPr>
+          <p:cNvCxnSpPr/>
+          <p:nvPr/>
+        </p:nvCxnSpPr>
+        <p:spPr>
+          <a:xfrm>
+            <a:off x="6184242" y="1722300"/>
+            <a:ext cx="314520" cy="0"/>
+          </a:xfrm>
+          <a:prstGeom prst="straightConnector1">
+            <a:avLst/>
+          </a:prstGeom>
+          <a:ln>
+            <a:tailEnd type="triangle"/>
+          </a:ln>
+        </p:spPr>
+        <p:style>
+          <a:lnRef idx="1">
+            <a:schemeClr val="dk1"/>
+          </a:lnRef>
+          <a:fillRef idx="0">
+            <a:schemeClr val="dk1"/>
+          </a:fillRef>
+          <a:effectRef idx="0">
+            <a:schemeClr val="dk1"/>
+          </a:effectRef>
+          <a:fontRef idx="minor">
+            <a:schemeClr val="tx1"/>
+          </a:fontRef>
+        </p:style>
+      </p:cxnSp>
+      <p:cxnSp>
+        <p:nvCxnSpPr>
+          <p:cNvPr id="49" name="直接箭头连接符 48">
+            <a:extLst>
+              <a:ext uri="{FF2B5EF4-FFF2-40B4-BE49-F238E27FC236}">
+                <a16:creationId xmlns:a16="http://schemas.microsoft.com/office/drawing/2014/main" id="{86EE4C99-7F35-C173-A374-DC49554AF7F9}"/>
+              </a:ext>
+            </a:extLst>
+          </p:cNvPr>
+          <p:cNvCxnSpPr/>
+          <p:nvPr/>
+        </p:nvCxnSpPr>
+        <p:spPr>
+          <a:xfrm>
+            <a:off x="5439808" y="1320621"/>
+            <a:ext cx="1061940" cy="0"/>
+          </a:xfrm>
+          <a:prstGeom prst="straightConnector1">
+            <a:avLst/>
+          </a:prstGeom>
+          <a:ln>
+            <a:tailEnd type="triangle"/>
+          </a:ln>
+        </p:spPr>
+        <p:style>
+          <a:lnRef idx="1">
+            <a:schemeClr val="dk1"/>
+          </a:lnRef>
+          <a:fillRef idx="0">
+            <a:schemeClr val="dk1"/>
+          </a:fillRef>
+          <a:effectRef idx="0">
+            <a:schemeClr val="dk1"/>
+          </a:effectRef>
+          <a:fontRef idx="minor">
+            <a:schemeClr val="tx1"/>
+          </a:fontRef>
+        </p:style>
+      </p:cxnSp>
+      <p:sp>
+        <p:nvSpPr>
+          <p:cNvPr id="50" name="文本框 49">
+            <a:extLst>
+              <a:ext uri="{FF2B5EF4-FFF2-40B4-BE49-F238E27FC236}">
+                <a16:creationId xmlns:a16="http://schemas.microsoft.com/office/drawing/2014/main" id="{90CAC4C6-CF73-3B57-54FC-8E8D84FF468E}"/>
+              </a:ext>
+            </a:extLst>
+          </p:cNvPr>
+          <p:cNvSpPr txBox="1"/>
+          <p:nvPr/>
+        </p:nvSpPr>
+        <p:spPr>
+          <a:xfrm>
+            <a:off x="5436823" y="1206319"/>
+            <a:ext cx="564850" cy="153888"/>
+          </a:xfrm>
+          <a:prstGeom prst="rect">
+            <a:avLst/>
+          </a:prstGeom>
+          <a:noFill/>
+        </p:spPr>
+        <p:txBody>
+          <a:bodyPr wrap="square" rtlCol="0">
+            <a:spAutoFit/>
+          </a:bodyPr>
+          <a:lstStyle/>
+          <a:p>
+            <a:r>
+              <a:rPr lang="en-US" altLang="zh-CN" sz="400" dirty="0"/>
+              <a:t>RF_Rd1 32bits</a:t>
+            </a:r>
+            <a:endParaRPr lang="zh-CN" altLang="en-US" sz="400" dirty="0"/>
+          </a:p>
+        </p:txBody>
+      </p:sp>
+      <p:sp>
+        <p:nvSpPr>
+          <p:cNvPr id="51" name="文本框 50">
+            <a:extLst>
+              <a:ext uri="{FF2B5EF4-FFF2-40B4-BE49-F238E27FC236}">
+                <a16:creationId xmlns:a16="http://schemas.microsoft.com/office/drawing/2014/main" id="{E92846D3-4A2D-A630-2946-ECBB07266731}"/>
+              </a:ext>
+            </a:extLst>
+          </p:cNvPr>
+          <p:cNvSpPr txBox="1"/>
+          <p:nvPr/>
+        </p:nvSpPr>
+        <p:spPr>
+          <a:xfrm>
+            <a:off x="6498762" y="1100549"/>
+            <a:ext cx="453093" cy="200055"/>
+          </a:xfrm>
+          <a:prstGeom prst="rect">
+            <a:avLst/>
+          </a:prstGeom>
+          <a:noFill/>
+        </p:spPr>
+        <p:txBody>
+          <a:bodyPr wrap="square" rtlCol="0">
+            <a:spAutoFit/>
+          </a:bodyPr>
+          <a:lstStyle/>
+          <a:p>
+            <a:r>
+              <a:rPr lang="en-US" altLang="zh-CN" sz="700" dirty="0"/>
+              <a:t>ALU</a:t>
+            </a:r>
+            <a:endParaRPr lang="zh-CN" altLang="en-US" sz="700" dirty="0"/>
+          </a:p>
+        </p:txBody>
+      </p:sp>
+      <p:sp>
+        <p:nvSpPr>
+          <p:cNvPr id="54" name="文本框 53">
+            <a:extLst>
+              <a:ext uri="{FF2B5EF4-FFF2-40B4-BE49-F238E27FC236}">
+                <a16:creationId xmlns:a16="http://schemas.microsoft.com/office/drawing/2014/main" id="{2AF19D02-E528-B86A-A5CF-041116E4C1EF}"/>
+              </a:ext>
+            </a:extLst>
+          </p:cNvPr>
+          <p:cNvSpPr txBox="1"/>
+          <p:nvPr/>
+        </p:nvSpPr>
+        <p:spPr>
+          <a:xfrm>
+            <a:off x="6749631" y="1342600"/>
+            <a:ext cx="453093" cy="215444"/>
+          </a:xfrm>
+          <a:prstGeom prst="rect">
+            <a:avLst/>
+          </a:prstGeom>
+          <a:noFill/>
+        </p:spPr>
+        <p:txBody>
+          <a:bodyPr wrap="square" rtlCol="0">
+            <a:spAutoFit/>
+          </a:bodyPr>
+          <a:lstStyle/>
+          <a:p>
+            <a:r>
+              <a:rPr lang="en-US" altLang="zh-CN" sz="400" dirty="0" err="1"/>
+              <a:t>NPC_br</a:t>
+            </a:r>
+            <a:r>
+              <a:rPr lang="en-US" altLang="zh-CN" sz="400" dirty="0"/>
+              <a:t> 2bits</a:t>
+            </a:r>
+          </a:p>
+          <a:p>
+            <a:endParaRPr lang="zh-CN" altLang="en-US" sz="400" dirty="0"/>
+          </a:p>
+        </p:txBody>
+      </p:sp>
+      <p:sp>
+        <p:nvSpPr>
+          <p:cNvPr id="55" name="文本框 54">
+            <a:extLst>
+              <a:ext uri="{FF2B5EF4-FFF2-40B4-BE49-F238E27FC236}">
+                <a16:creationId xmlns:a16="http://schemas.microsoft.com/office/drawing/2014/main" id="{B621DC88-678E-CE82-BEE9-B21C7FB6BE43}"/>
+              </a:ext>
+            </a:extLst>
+          </p:cNvPr>
+          <p:cNvSpPr txBox="1"/>
+          <p:nvPr/>
+        </p:nvSpPr>
+        <p:spPr>
+          <a:xfrm>
+            <a:off x="6814200" y="1546787"/>
+            <a:ext cx="2210612" cy="153888"/>
+          </a:xfrm>
+          <a:prstGeom prst="rect">
+            <a:avLst/>
+          </a:prstGeom>
+          <a:noFill/>
+        </p:spPr>
+        <p:txBody>
+          <a:bodyPr wrap="square" rtlCol="0">
+            <a:spAutoFit/>
+          </a:bodyPr>
+          <a:lstStyle/>
+          <a:p>
+            <a:r>
+              <a:rPr lang="en-US" altLang="zh-CN" sz="400" dirty="0"/>
+              <a:t>32bits</a:t>
+            </a:r>
+            <a:endParaRPr lang="zh-CN" altLang="en-US" sz="400" dirty="0"/>
+          </a:p>
+        </p:txBody>
+      </p:sp>
+      <p:sp>
+        <p:nvSpPr>
+          <p:cNvPr id="58" name="矩形 57">
+            <a:extLst>
+              <a:ext uri="{FF2B5EF4-FFF2-40B4-BE49-F238E27FC236}">
+                <a16:creationId xmlns:a16="http://schemas.microsoft.com/office/drawing/2014/main" id="{E7E7AEFD-BD7F-801B-FE76-8340BBD7894F}"/>
+              </a:ext>
+            </a:extLst>
+          </p:cNvPr>
+          <p:cNvSpPr/>
+          <p:nvPr/>
+        </p:nvSpPr>
+        <p:spPr>
+          <a:xfrm>
+            <a:off x="3302144" y="2142455"/>
+            <a:ext cx="762374" cy="286729"/>
+          </a:xfrm>
+          <a:prstGeom prst="rect">
+            <a:avLst/>
+          </a:prstGeom>
+        </p:spPr>
+        <p:style>
+          <a:lnRef idx="2">
+            <a:schemeClr val="dk1"/>
+          </a:lnRef>
+          <a:fillRef idx="1">
+            <a:schemeClr val="lt1"/>
+          </a:fillRef>
+          <a:effectRef idx="0">
+            <a:schemeClr val="dk1"/>
+          </a:effectRef>
+          <a:fontRef idx="minor">
+            <a:schemeClr val="dk1"/>
+          </a:fontRef>
+        </p:style>
+        <p:txBody>
+          <a:bodyPr rtlCol="0" anchor="ctr"/>
+          <a:lstStyle/>
+          <a:p>
+            <a:pPr algn="ctr"/>
+            <a:r>
+              <a:rPr lang="en-US" altLang="zh-CN" sz="700" dirty="0"/>
+              <a:t>SEXT</a:t>
+            </a:r>
+            <a:endParaRPr lang="zh-CN" altLang="en-US" sz="700" dirty="0"/>
+          </a:p>
+        </p:txBody>
+      </p:sp>
+      <p:sp>
+        <p:nvSpPr>
+          <p:cNvPr id="59" name="文本框 58">
+            <a:extLst>
+              <a:ext uri="{FF2B5EF4-FFF2-40B4-BE49-F238E27FC236}">
+                <a16:creationId xmlns:a16="http://schemas.microsoft.com/office/drawing/2014/main" id="{0F0DAE04-BEAC-476F-2EB3-3DB2150CB4A9}"/>
+              </a:ext>
+            </a:extLst>
+          </p:cNvPr>
+          <p:cNvSpPr txBox="1"/>
+          <p:nvPr/>
+        </p:nvSpPr>
+        <p:spPr>
+          <a:xfrm>
+            <a:off x="3245341" y="2225692"/>
+            <a:ext cx="344319" cy="153888"/>
+          </a:xfrm>
+          <a:prstGeom prst="rect">
+            <a:avLst/>
+          </a:prstGeom>
+          <a:noFill/>
+        </p:spPr>
+        <p:txBody>
+          <a:bodyPr wrap="square" rtlCol="0">
+            <a:spAutoFit/>
+          </a:bodyPr>
+          <a:lstStyle/>
+          <a:p>
+            <a:r>
+              <a:rPr lang="en-US" altLang="zh-CN" sz="400" dirty="0"/>
+              <a:t>din</a:t>
+            </a:r>
+            <a:endParaRPr lang="zh-CN" altLang="en-US" sz="400" dirty="0"/>
+          </a:p>
+        </p:txBody>
+      </p:sp>
+      <p:sp>
+        <p:nvSpPr>
+          <p:cNvPr id="60" name="文本框 59">
+            <a:extLst>
+              <a:ext uri="{FF2B5EF4-FFF2-40B4-BE49-F238E27FC236}">
+                <a16:creationId xmlns:a16="http://schemas.microsoft.com/office/drawing/2014/main" id="{832E39E4-B989-D42D-FBC7-221E3D59A78B}"/>
+              </a:ext>
+            </a:extLst>
+          </p:cNvPr>
+          <p:cNvSpPr txBox="1"/>
+          <p:nvPr/>
+        </p:nvSpPr>
+        <p:spPr>
+          <a:xfrm>
+            <a:off x="3867402" y="2214659"/>
+            <a:ext cx="304209" cy="153888"/>
+          </a:xfrm>
+          <a:prstGeom prst="rect">
+            <a:avLst/>
+          </a:prstGeom>
+          <a:noFill/>
+        </p:spPr>
+        <p:txBody>
+          <a:bodyPr wrap="square" rtlCol="0">
+            <a:spAutoFit/>
+          </a:bodyPr>
+          <a:lstStyle/>
+          <a:p>
+            <a:r>
+              <a:rPr lang="en-US" altLang="zh-CN" sz="400" dirty="0" err="1"/>
+              <a:t>ext</a:t>
+            </a:r>
+            <a:endParaRPr lang="zh-CN" altLang="en-US" sz="400" dirty="0"/>
+          </a:p>
+        </p:txBody>
+      </p:sp>
+      <p:sp>
+        <p:nvSpPr>
+          <p:cNvPr id="61" name="文本框 60">
+            <a:extLst>
+              <a:ext uri="{FF2B5EF4-FFF2-40B4-BE49-F238E27FC236}">
+                <a16:creationId xmlns:a16="http://schemas.microsoft.com/office/drawing/2014/main" id="{AD49BA0B-B1E2-9177-45A6-E989C642C7AB}"/>
+              </a:ext>
+            </a:extLst>
+          </p:cNvPr>
+          <p:cNvSpPr txBox="1"/>
+          <p:nvPr/>
+        </p:nvSpPr>
+        <p:spPr>
+          <a:xfrm>
+            <a:off x="3569716" y="2301719"/>
+            <a:ext cx="304209" cy="153888"/>
+          </a:xfrm>
+          <a:prstGeom prst="rect">
+            <a:avLst/>
+          </a:prstGeom>
+          <a:noFill/>
+        </p:spPr>
+        <p:txBody>
+          <a:bodyPr wrap="square" rtlCol="0">
+            <a:spAutoFit/>
+          </a:bodyPr>
+          <a:lstStyle/>
+          <a:p>
+            <a:r>
+              <a:rPr lang="en-US" altLang="zh-CN" sz="400" dirty="0"/>
+              <a:t>op</a:t>
+            </a:r>
+            <a:endParaRPr lang="zh-CN" altLang="en-US" sz="400" dirty="0"/>
+          </a:p>
+        </p:txBody>
+      </p:sp>
+      <p:sp>
+        <p:nvSpPr>
+          <p:cNvPr id="62" name="流程图: 手动操作 61">
+            <a:extLst>
+              <a:ext uri="{FF2B5EF4-FFF2-40B4-BE49-F238E27FC236}">
+                <a16:creationId xmlns:a16="http://schemas.microsoft.com/office/drawing/2014/main" id="{C1258AE1-A704-3A96-080D-1EE385DA6A76}"/>
+              </a:ext>
+            </a:extLst>
+          </p:cNvPr>
+          <p:cNvSpPr/>
+          <p:nvPr/>
+        </p:nvSpPr>
+        <p:spPr>
+          <a:xfrm rot="16200000">
+            <a:off x="3360391" y="1484689"/>
+            <a:ext cx="645879" cy="368141"/>
+          </a:xfrm>
+          <a:prstGeom prst="flowChartManualOperation">
+            <a:avLst/>
+          </a:prstGeom>
+        </p:spPr>
+        <p:style>
+          <a:lnRef idx="2">
+            <a:schemeClr val="dk1"/>
+          </a:lnRef>
+          <a:fillRef idx="1">
+            <a:schemeClr val="lt1"/>
+          </a:fillRef>
+          <a:effectRef idx="0">
+            <a:schemeClr val="dk1"/>
+          </a:effectRef>
+          <a:fontRef idx="minor">
+            <a:schemeClr val="dk1"/>
+          </a:fontRef>
+        </p:style>
+        <p:txBody>
+          <a:bodyPr rtlCol="0" anchor="ctr"/>
+          <a:lstStyle/>
+          <a:p>
+            <a:pPr algn="ctr"/>
+            <a:endParaRPr lang="en-US" altLang="zh-CN" sz="700" dirty="0"/>
+          </a:p>
+        </p:txBody>
+      </p:sp>
+      <p:sp>
+        <p:nvSpPr>
+          <p:cNvPr id="63" name="矩形 62">
+            <a:extLst>
+              <a:ext uri="{FF2B5EF4-FFF2-40B4-BE49-F238E27FC236}">
+                <a16:creationId xmlns:a16="http://schemas.microsoft.com/office/drawing/2014/main" id="{B1128639-CC53-E23D-67E3-8DBF71246483}"/>
+              </a:ext>
+            </a:extLst>
+          </p:cNvPr>
+          <p:cNvSpPr/>
+          <p:nvPr/>
+        </p:nvSpPr>
+        <p:spPr>
+          <a:xfrm>
+            <a:off x="4565796" y="1348448"/>
+            <a:ext cx="653464" cy="671004"/>
+          </a:xfrm>
+          <a:prstGeom prst="rect">
+            <a:avLst/>
+          </a:prstGeom>
+        </p:spPr>
+        <p:style>
+          <a:lnRef idx="2">
+            <a:schemeClr val="dk1"/>
+          </a:lnRef>
+          <a:fillRef idx="1">
+            <a:schemeClr val="lt1"/>
+          </a:fillRef>
+          <a:effectRef idx="0">
+            <a:schemeClr val="dk1"/>
+          </a:effectRef>
+          <a:fontRef idx="minor">
+            <a:schemeClr val="dk1"/>
+          </a:fontRef>
+        </p:style>
+        <p:txBody>
+          <a:bodyPr rtlCol="0" anchor="ctr"/>
+          <a:lstStyle/>
+          <a:p>
+            <a:pPr algn="ctr"/>
+            <a:r>
+              <a:rPr lang="en-US" altLang="zh-CN" sz="700" dirty="0"/>
+              <a:t>RF</a:t>
+            </a:r>
+            <a:endParaRPr lang="zh-CN" altLang="en-US" sz="700" dirty="0"/>
+          </a:p>
+        </p:txBody>
+      </p:sp>
+      <p:sp>
+        <p:nvSpPr>
+          <p:cNvPr id="64" name="等腰三角形 63">
+            <a:extLst>
+              <a:ext uri="{FF2B5EF4-FFF2-40B4-BE49-F238E27FC236}">
+                <a16:creationId xmlns:a16="http://schemas.microsoft.com/office/drawing/2014/main" id="{5D4D586D-E01A-2B67-C8A4-98320755AE1F}"/>
+              </a:ext>
+            </a:extLst>
+          </p:cNvPr>
+          <p:cNvSpPr/>
+          <p:nvPr/>
+        </p:nvSpPr>
+        <p:spPr>
+          <a:xfrm>
+            <a:off x="4821656" y="1917106"/>
+            <a:ext cx="149752" cy="100503"/>
+          </a:xfrm>
+          <a:prstGeom prst="triangle">
+            <a:avLst/>
+          </a:prstGeom>
+        </p:spPr>
+        <p:style>
+          <a:lnRef idx="2">
+            <a:schemeClr val="dk1"/>
+          </a:lnRef>
+          <a:fillRef idx="1">
+            <a:schemeClr val="lt1"/>
+          </a:fillRef>
+          <a:effectRef idx="0">
+            <a:schemeClr val="dk1"/>
+          </a:effectRef>
+          <a:fontRef idx="minor">
+            <a:schemeClr val="dk1"/>
+          </a:fontRef>
+        </p:style>
+        <p:txBody>
+          <a:bodyPr rtlCol="0" anchor="ctr"/>
+          <a:lstStyle/>
+          <a:p>
+            <a:pPr algn="ctr"/>
+            <a:endParaRPr lang="zh-CN" altLang="en-US" sz="700"/>
+          </a:p>
+        </p:txBody>
+      </p:sp>
+      <p:sp>
+        <p:nvSpPr>
+          <p:cNvPr id="65" name="文本框 64">
+            <a:extLst>
+              <a:ext uri="{FF2B5EF4-FFF2-40B4-BE49-F238E27FC236}">
+                <a16:creationId xmlns:a16="http://schemas.microsoft.com/office/drawing/2014/main" id="{3653CD68-E704-CC30-D6FC-FDD394EE00CB}"/>
+              </a:ext>
+            </a:extLst>
+          </p:cNvPr>
+          <p:cNvSpPr txBox="1"/>
+          <p:nvPr/>
+        </p:nvSpPr>
+        <p:spPr>
+          <a:xfrm>
+            <a:off x="4783420" y="1790453"/>
+            <a:ext cx="298048" cy="153888"/>
+          </a:xfrm>
+          <a:prstGeom prst="rect">
+            <a:avLst/>
+          </a:prstGeom>
+          <a:noFill/>
+        </p:spPr>
+        <p:txBody>
+          <a:bodyPr wrap="square" rtlCol="0">
+            <a:spAutoFit/>
+          </a:bodyPr>
+          <a:lstStyle/>
+          <a:p>
+            <a:r>
+              <a:rPr lang="en-US" altLang="zh-CN" sz="400" dirty="0" err="1"/>
+              <a:t>clk</a:t>
+            </a:r>
+            <a:endParaRPr lang="zh-CN" altLang="en-US" sz="400" dirty="0"/>
+          </a:p>
+        </p:txBody>
+      </p:sp>
+      <p:sp>
+        <p:nvSpPr>
+          <p:cNvPr id="66" name="文本框 65">
+            <a:extLst>
+              <a:ext uri="{FF2B5EF4-FFF2-40B4-BE49-F238E27FC236}">
+                <a16:creationId xmlns:a16="http://schemas.microsoft.com/office/drawing/2014/main" id="{1D89AAA4-9AF4-63F0-66DD-DE96126EC44F}"/>
+              </a:ext>
+            </a:extLst>
+          </p:cNvPr>
+          <p:cNvSpPr txBox="1"/>
+          <p:nvPr/>
+        </p:nvSpPr>
+        <p:spPr>
+          <a:xfrm>
+            <a:off x="4561607" y="1866304"/>
+            <a:ext cx="300414" cy="153888"/>
+          </a:xfrm>
+          <a:prstGeom prst="rect">
+            <a:avLst/>
+          </a:prstGeom>
+          <a:noFill/>
+        </p:spPr>
+        <p:txBody>
+          <a:bodyPr wrap="square" rtlCol="0">
+            <a:spAutoFit/>
+          </a:bodyPr>
+          <a:lstStyle/>
+          <a:p>
+            <a:r>
+              <a:rPr lang="en-US" altLang="zh-CN" sz="400" dirty="0"/>
+              <a:t>we</a:t>
+            </a:r>
+            <a:endParaRPr lang="zh-CN" altLang="en-US" sz="400" dirty="0"/>
+          </a:p>
+        </p:txBody>
+      </p:sp>
+      <p:sp>
+        <p:nvSpPr>
+          <p:cNvPr id="67" name="文本框 66">
+            <a:extLst>
+              <a:ext uri="{FF2B5EF4-FFF2-40B4-BE49-F238E27FC236}">
+                <a16:creationId xmlns:a16="http://schemas.microsoft.com/office/drawing/2014/main" id="{0711A9EC-166B-84B9-8A18-25509500C00C}"/>
+              </a:ext>
+            </a:extLst>
+          </p:cNvPr>
+          <p:cNvSpPr txBox="1"/>
+          <p:nvPr/>
+        </p:nvSpPr>
+        <p:spPr>
+          <a:xfrm>
+            <a:off x="4557764" y="1723165"/>
+            <a:ext cx="285111" cy="153888"/>
+          </a:xfrm>
+          <a:prstGeom prst="rect">
+            <a:avLst/>
+          </a:prstGeom>
+          <a:noFill/>
+        </p:spPr>
+        <p:txBody>
+          <a:bodyPr wrap="square" rtlCol="0">
+            <a:spAutoFit/>
+          </a:bodyPr>
+          <a:lstStyle/>
+          <a:p>
+            <a:r>
+              <a:rPr lang="en-US" altLang="zh-CN" sz="400" dirty="0" err="1"/>
+              <a:t>wR</a:t>
+            </a:r>
+            <a:endParaRPr lang="zh-CN" altLang="en-US" sz="400" dirty="0"/>
+          </a:p>
+        </p:txBody>
+      </p:sp>
+      <p:sp>
+        <p:nvSpPr>
+          <p:cNvPr id="68" name="文本框 67">
+            <a:extLst>
+              <a:ext uri="{FF2B5EF4-FFF2-40B4-BE49-F238E27FC236}">
+                <a16:creationId xmlns:a16="http://schemas.microsoft.com/office/drawing/2014/main" id="{99F08F3A-54A9-2068-C297-5AF066277311}"/>
+              </a:ext>
+            </a:extLst>
+          </p:cNvPr>
+          <p:cNvSpPr txBox="1"/>
+          <p:nvPr/>
+        </p:nvSpPr>
+        <p:spPr>
+          <a:xfrm>
+            <a:off x="4550945" y="1558561"/>
+            <a:ext cx="300414" cy="153888"/>
+          </a:xfrm>
+          <a:prstGeom prst="rect">
+            <a:avLst/>
+          </a:prstGeom>
+          <a:noFill/>
+        </p:spPr>
+        <p:txBody>
+          <a:bodyPr wrap="square" rtlCol="0">
+            <a:spAutoFit/>
+          </a:bodyPr>
+          <a:lstStyle/>
+          <a:p>
+            <a:r>
+              <a:rPr lang="en-US" altLang="zh-CN" sz="400" dirty="0"/>
+              <a:t>rR2</a:t>
+            </a:r>
+            <a:endParaRPr lang="zh-CN" altLang="en-US" sz="400" dirty="0"/>
+          </a:p>
+        </p:txBody>
+      </p:sp>
+      <p:sp>
+        <p:nvSpPr>
+          <p:cNvPr id="69" name="文本框 68">
+            <a:extLst>
+              <a:ext uri="{FF2B5EF4-FFF2-40B4-BE49-F238E27FC236}">
+                <a16:creationId xmlns:a16="http://schemas.microsoft.com/office/drawing/2014/main" id="{C1622F8B-2D9E-C559-54B4-B9B12DDDF189}"/>
+              </a:ext>
+            </a:extLst>
+          </p:cNvPr>
+          <p:cNvSpPr txBox="1"/>
+          <p:nvPr/>
+        </p:nvSpPr>
+        <p:spPr>
+          <a:xfrm>
+            <a:off x="4555496" y="1387115"/>
+            <a:ext cx="300414" cy="153888"/>
+          </a:xfrm>
+          <a:prstGeom prst="rect">
+            <a:avLst/>
+          </a:prstGeom>
+          <a:noFill/>
+        </p:spPr>
+        <p:txBody>
+          <a:bodyPr wrap="square" rtlCol="0">
+            <a:spAutoFit/>
+          </a:bodyPr>
+          <a:lstStyle/>
+          <a:p>
+            <a:r>
+              <a:rPr lang="en-US" altLang="zh-CN" sz="400" dirty="0"/>
+              <a:t>rR1</a:t>
+            </a:r>
+            <a:endParaRPr lang="zh-CN" altLang="en-US" sz="400" dirty="0"/>
+          </a:p>
+        </p:txBody>
+      </p:sp>
+      <p:sp>
+        <p:nvSpPr>
+          <p:cNvPr id="70" name="文本框 69">
+            <a:extLst>
+              <a:ext uri="{FF2B5EF4-FFF2-40B4-BE49-F238E27FC236}">
+                <a16:creationId xmlns:a16="http://schemas.microsoft.com/office/drawing/2014/main" id="{075B3C02-6F25-0F79-6148-C70B239CA1DF}"/>
+              </a:ext>
+            </a:extLst>
+          </p:cNvPr>
+          <p:cNvSpPr txBox="1"/>
+          <p:nvPr/>
+        </p:nvSpPr>
+        <p:spPr>
+          <a:xfrm>
+            <a:off x="4772053" y="1348270"/>
+            <a:ext cx="325373" cy="153888"/>
+          </a:xfrm>
+          <a:prstGeom prst="rect">
+            <a:avLst/>
+          </a:prstGeom>
+          <a:noFill/>
+        </p:spPr>
+        <p:txBody>
+          <a:bodyPr wrap="square" rtlCol="0">
+            <a:spAutoFit/>
+          </a:bodyPr>
+          <a:lstStyle/>
+          <a:p>
+            <a:r>
+              <a:rPr lang="en-US" altLang="zh-CN" sz="400" dirty="0"/>
+              <a:t>wd</a:t>
+            </a:r>
+            <a:endParaRPr lang="zh-CN" altLang="en-US" sz="400" dirty="0"/>
+          </a:p>
+        </p:txBody>
+      </p:sp>
+      <p:sp>
+        <p:nvSpPr>
+          <p:cNvPr id="71" name="文本框 70">
+            <a:extLst>
+              <a:ext uri="{FF2B5EF4-FFF2-40B4-BE49-F238E27FC236}">
+                <a16:creationId xmlns:a16="http://schemas.microsoft.com/office/drawing/2014/main" id="{9D7CC4D9-5F4A-DF6F-C002-CB02934F5537}"/>
+              </a:ext>
+            </a:extLst>
+          </p:cNvPr>
+          <p:cNvSpPr txBox="1"/>
+          <p:nvPr/>
+        </p:nvSpPr>
+        <p:spPr>
+          <a:xfrm>
+            <a:off x="5032071" y="1500323"/>
+            <a:ext cx="285109" cy="153888"/>
+          </a:xfrm>
+          <a:prstGeom prst="rect">
+            <a:avLst/>
+          </a:prstGeom>
+          <a:noFill/>
+        </p:spPr>
+        <p:txBody>
+          <a:bodyPr wrap="square" rtlCol="0">
+            <a:spAutoFit/>
+          </a:bodyPr>
+          <a:lstStyle/>
+          <a:p>
+            <a:r>
+              <a:rPr lang="en-US" altLang="zh-CN" sz="400" dirty="0"/>
+              <a:t>rD1</a:t>
+            </a:r>
+            <a:endParaRPr lang="zh-CN" altLang="en-US" sz="400" dirty="0"/>
+          </a:p>
+        </p:txBody>
+      </p:sp>
+      <p:sp>
+        <p:nvSpPr>
+          <p:cNvPr id="72" name="文本框 71">
+            <a:extLst>
+              <a:ext uri="{FF2B5EF4-FFF2-40B4-BE49-F238E27FC236}">
+                <a16:creationId xmlns:a16="http://schemas.microsoft.com/office/drawing/2014/main" id="{9C9F6517-3F7D-A82E-A6B2-3C0D321B98A0}"/>
+              </a:ext>
+            </a:extLst>
+          </p:cNvPr>
+          <p:cNvSpPr txBox="1"/>
+          <p:nvPr/>
+        </p:nvSpPr>
+        <p:spPr>
+          <a:xfrm>
+            <a:off x="5035472" y="1678777"/>
+            <a:ext cx="270583" cy="153888"/>
+          </a:xfrm>
+          <a:prstGeom prst="rect">
+            <a:avLst/>
+          </a:prstGeom>
+          <a:noFill/>
+        </p:spPr>
+        <p:txBody>
+          <a:bodyPr wrap="square" rtlCol="0">
+            <a:spAutoFit/>
+          </a:bodyPr>
+          <a:lstStyle/>
+          <a:p>
+            <a:r>
+              <a:rPr lang="en-US" altLang="zh-CN" sz="400" dirty="0"/>
+              <a:t>rD2</a:t>
+            </a:r>
+            <a:endParaRPr lang="zh-CN" altLang="en-US" sz="400" dirty="0"/>
+          </a:p>
+        </p:txBody>
+      </p:sp>
+      <p:sp>
+        <p:nvSpPr>
+          <p:cNvPr id="73" name="文本框 72">
+            <a:extLst>
+              <a:ext uri="{FF2B5EF4-FFF2-40B4-BE49-F238E27FC236}">
+                <a16:creationId xmlns:a16="http://schemas.microsoft.com/office/drawing/2014/main" id="{C9FE9BCE-A261-E291-F78C-CB57389C1AAE}"/>
+              </a:ext>
+            </a:extLst>
+          </p:cNvPr>
+          <p:cNvSpPr txBox="1"/>
+          <p:nvPr/>
+        </p:nvSpPr>
+        <p:spPr>
+          <a:xfrm>
+            <a:off x="3505103" y="1522410"/>
+            <a:ext cx="452933" cy="307777"/>
+          </a:xfrm>
+          <a:prstGeom prst="rect">
+            <a:avLst/>
+          </a:prstGeom>
+          <a:noFill/>
+        </p:spPr>
+        <p:txBody>
+          <a:bodyPr wrap="square" rtlCol="0">
+            <a:spAutoFit/>
+          </a:bodyPr>
+          <a:lstStyle/>
+          <a:p>
+            <a:r>
+              <a:rPr lang="en-US" altLang="zh-CN" sz="700" dirty="0"/>
+              <a:t>MUX</a:t>
+            </a:r>
+          </a:p>
+          <a:p>
+            <a:r>
+              <a:rPr lang="en-US" altLang="zh-CN" sz="700" dirty="0"/>
+              <a:t> 4_1</a:t>
+            </a:r>
+            <a:endParaRPr lang="zh-CN" altLang="en-US" sz="700" dirty="0"/>
+          </a:p>
+        </p:txBody>
+      </p:sp>
+      <p:sp>
+        <p:nvSpPr>
+          <p:cNvPr id="74" name="文本框 73">
+            <a:extLst>
+              <a:ext uri="{FF2B5EF4-FFF2-40B4-BE49-F238E27FC236}">
+                <a16:creationId xmlns:a16="http://schemas.microsoft.com/office/drawing/2014/main" id="{ADB18A0C-4BB6-5C09-6CCC-F7E662068FE4}"/>
+              </a:ext>
+            </a:extLst>
+          </p:cNvPr>
+          <p:cNvSpPr txBox="1"/>
+          <p:nvPr/>
+        </p:nvSpPr>
+        <p:spPr>
+          <a:xfrm>
+            <a:off x="3484936" y="1401588"/>
+            <a:ext cx="122029" cy="523220"/>
+          </a:xfrm>
+          <a:prstGeom prst="rect">
+            <a:avLst/>
+          </a:prstGeom>
+          <a:noFill/>
+        </p:spPr>
+        <p:txBody>
+          <a:bodyPr wrap="square" rtlCol="0">
+            <a:spAutoFit/>
+          </a:bodyPr>
+          <a:lstStyle/>
+          <a:p>
+            <a:r>
+              <a:rPr lang="en-US" altLang="zh-CN" sz="400" dirty="0"/>
+              <a:t>0</a:t>
+            </a:r>
+          </a:p>
+          <a:p>
+            <a:endParaRPr lang="en-US" altLang="zh-CN" sz="400" dirty="0"/>
+          </a:p>
+          <a:p>
+            <a:r>
+              <a:rPr lang="en-US" altLang="zh-CN" sz="400" dirty="0"/>
+              <a:t>1</a:t>
+            </a:r>
+          </a:p>
+          <a:p>
+            <a:endParaRPr lang="en-US" altLang="zh-CN" sz="400" dirty="0"/>
+          </a:p>
+          <a:p>
+            <a:r>
+              <a:rPr lang="en-US" altLang="zh-CN" sz="400" dirty="0"/>
+              <a:t>2</a:t>
+            </a:r>
+          </a:p>
+          <a:p>
+            <a:endParaRPr lang="en-US" altLang="zh-CN" sz="400" dirty="0"/>
+          </a:p>
+          <a:p>
+            <a:r>
+              <a:rPr lang="en-US" altLang="zh-CN" sz="400" dirty="0"/>
+              <a:t>3</a:t>
+            </a:r>
+            <a:endParaRPr lang="zh-CN" altLang="en-US" sz="400" dirty="0"/>
+          </a:p>
+        </p:txBody>
+      </p:sp>
+      <p:cxnSp>
+        <p:nvCxnSpPr>
+          <p:cNvPr id="75" name="直接箭头连接符 74">
+            <a:extLst>
+              <a:ext uri="{FF2B5EF4-FFF2-40B4-BE49-F238E27FC236}">
+                <a16:creationId xmlns:a16="http://schemas.microsoft.com/office/drawing/2014/main" id="{55F66129-DE81-7AFD-616E-313EB269D097}"/>
+              </a:ext>
+            </a:extLst>
+          </p:cNvPr>
+          <p:cNvCxnSpPr>
+            <a:cxnSpLocks/>
+          </p:cNvCxnSpPr>
+          <p:nvPr/>
+        </p:nvCxnSpPr>
+        <p:spPr>
+          <a:xfrm>
+            <a:off x="3286684" y="1493550"/>
+            <a:ext cx="206052" cy="0"/>
+          </a:xfrm>
+          <a:prstGeom prst="straightConnector1">
+            <a:avLst/>
+          </a:prstGeom>
+          <a:ln>
+            <a:tailEnd type="triangle"/>
+          </a:ln>
+        </p:spPr>
+        <p:style>
+          <a:lnRef idx="1">
+            <a:schemeClr val="dk1"/>
+          </a:lnRef>
+          <a:fillRef idx="0">
+            <a:schemeClr val="dk1"/>
+          </a:fillRef>
+          <a:effectRef idx="0">
+            <a:schemeClr val="dk1"/>
+          </a:effectRef>
+          <a:fontRef idx="minor">
+            <a:schemeClr val="tx1"/>
+          </a:fontRef>
+        </p:style>
+      </p:cxnSp>
+      <p:cxnSp>
+        <p:nvCxnSpPr>
+          <p:cNvPr id="76" name="直接连接符 75">
+            <a:extLst>
+              <a:ext uri="{FF2B5EF4-FFF2-40B4-BE49-F238E27FC236}">
+                <a16:creationId xmlns:a16="http://schemas.microsoft.com/office/drawing/2014/main" id="{7B32B462-97F9-965F-336D-6E8B17B6B4BD}"/>
+              </a:ext>
+            </a:extLst>
+          </p:cNvPr>
+          <p:cNvCxnSpPr/>
+          <p:nvPr/>
+        </p:nvCxnSpPr>
+        <p:spPr>
+          <a:xfrm flipV="1">
+            <a:off x="3286684" y="1290969"/>
+            <a:ext cx="0" cy="204304"/>
+          </a:xfrm>
+          <a:prstGeom prst="line">
+            <a:avLst/>
+          </a:prstGeom>
+        </p:spPr>
+        <p:style>
+          <a:lnRef idx="1">
+            <a:schemeClr val="dk1"/>
+          </a:lnRef>
+          <a:fillRef idx="0">
+            <a:schemeClr val="dk1"/>
+          </a:fillRef>
+          <a:effectRef idx="0">
+            <a:schemeClr val="dk1"/>
+          </a:effectRef>
+          <a:fontRef idx="minor">
+            <a:schemeClr val="tx1"/>
+          </a:fontRef>
+        </p:style>
+      </p:cxnSp>
+      <p:cxnSp>
+        <p:nvCxnSpPr>
+          <p:cNvPr id="79" name="直接箭头连接符 78">
+            <a:extLst>
+              <a:ext uri="{FF2B5EF4-FFF2-40B4-BE49-F238E27FC236}">
+                <a16:creationId xmlns:a16="http://schemas.microsoft.com/office/drawing/2014/main" id="{96D36DF2-CDDE-86E0-7561-CC6497185AD2}"/>
+              </a:ext>
+            </a:extLst>
+          </p:cNvPr>
+          <p:cNvCxnSpPr/>
+          <p:nvPr/>
+        </p:nvCxnSpPr>
+        <p:spPr>
+          <a:xfrm>
+            <a:off x="3237003" y="1600815"/>
+            <a:ext cx="255732" cy="0"/>
+          </a:xfrm>
+          <a:prstGeom prst="straightConnector1">
+            <a:avLst/>
+          </a:prstGeom>
+          <a:ln>
+            <a:tailEnd type="triangle"/>
+          </a:ln>
+        </p:spPr>
+        <p:style>
+          <a:lnRef idx="1">
+            <a:schemeClr val="dk1"/>
+          </a:lnRef>
+          <a:fillRef idx="0">
+            <a:schemeClr val="dk1"/>
+          </a:fillRef>
+          <a:effectRef idx="0">
+            <a:schemeClr val="dk1"/>
+          </a:effectRef>
+          <a:fontRef idx="minor">
+            <a:schemeClr val="tx1"/>
+          </a:fontRef>
+        </p:style>
+      </p:cxnSp>
+      <p:cxnSp>
+        <p:nvCxnSpPr>
+          <p:cNvPr id="80" name="直接箭头连接符 79">
+            <a:extLst>
+              <a:ext uri="{FF2B5EF4-FFF2-40B4-BE49-F238E27FC236}">
+                <a16:creationId xmlns:a16="http://schemas.microsoft.com/office/drawing/2014/main" id="{BAE0EB09-5951-619B-3E5E-E8B0242AAC27}"/>
+              </a:ext>
+            </a:extLst>
+          </p:cNvPr>
+          <p:cNvCxnSpPr/>
+          <p:nvPr/>
+        </p:nvCxnSpPr>
+        <p:spPr>
+          <a:xfrm>
+            <a:off x="3180326" y="1720922"/>
+            <a:ext cx="312411" cy="0"/>
+          </a:xfrm>
+          <a:prstGeom prst="straightConnector1">
+            <a:avLst/>
+          </a:prstGeom>
+          <a:ln>
+            <a:tailEnd type="triangle"/>
+          </a:ln>
+        </p:spPr>
+        <p:style>
+          <a:lnRef idx="1">
+            <a:schemeClr val="dk1"/>
+          </a:lnRef>
+          <a:fillRef idx="0">
+            <a:schemeClr val="dk1"/>
+          </a:fillRef>
+          <a:effectRef idx="0">
+            <a:schemeClr val="dk1"/>
+          </a:effectRef>
+          <a:fontRef idx="minor">
+            <a:schemeClr val="tx1"/>
+          </a:fontRef>
+        </p:style>
+      </p:cxnSp>
+      <p:cxnSp>
+        <p:nvCxnSpPr>
+          <p:cNvPr id="81" name="直接箭头连接符 80">
+            <a:extLst>
+              <a:ext uri="{FF2B5EF4-FFF2-40B4-BE49-F238E27FC236}">
+                <a16:creationId xmlns:a16="http://schemas.microsoft.com/office/drawing/2014/main" id="{A9224FE2-BF74-795F-36B8-0BFCAEA3AF76}"/>
+              </a:ext>
+            </a:extLst>
+          </p:cNvPr>
+          <p:cNvCxnSpPr>
+            <a:cxnSpLocks/>
+          </p:cNvCxnSpPr>
+          <p:nvPr/>
+        </p:nvCxnSpPr>
+        <p:spPr>
+          <a:xfrm>
+            <a:off x="3344998" y="1834501"/>
+            <a:ext cx="148728" cy="0"/>
+          </a:xfrm>
+          <a:prstGeom prst="straightConnector1">
+            <a:avLst/>
+          </a:prstGeom>
+          <a:ln>
+            <a:tailEnd type="triangle"/>
+          </a:ln>
+        </p:spPr>
+        <p:style>
+          <a:lnRef idx="1">
+            <a:schemeClr val="dk1"/>
+          </a:lnRef>
+          <a:fillRef idx="0">
+            <a:schemeClr val="dk1"/>
+          </a:fillRef>
+          <a:effectRef idx="0">
+            <a:schemeClr val="dk1"/>
+          </a:effectRef>
+          <a:fontRef idx="minor">
+            <a:schemeClr val="tx1"/>
+          </a:fontRef>
+        </p:style>
+      </p:cxnSp>
+      <p:sp>
+        <p:nvSpPr>
+          <p:cNvPr id="82" name="文本框 81">
+            <a:extLst>
+              <a:ext uri="{FF2B5EF4-FFF2-40B4-BE49-F238E27FC236}">
+                <a16:creationId xmlns:a16="http://schemas.microsoft.com/office/drawing/2014/main" id="{98C43C90-075B-02DB-530D-01F30FCD8508}"/>
+              </a:ext>
+            </a:extLst>
+          </p:cNvPr>
+          <p:cNvSpPr txBox="1"/>
+          <p:nvPr/>
+        </p:nvSpPr>
+        <p:spPr>
+          <a:xfrm>
+            <a:off x="3213436" y="1363199"/>
+            <a:ext cx="513922" cy="153888"/>
+          </a:xfrm>
+          <a:prstGeom prst="rect">
+            <a:avLst/>
+          </a:prstGeom>
+          <a:noFill/>
+        </p:spPr>
+        <p:txBody>
+          <a:bodyPr wrap="square" rtlCol="0">
+            <a:spAutoFit/>
+          </a:bodyPr>
+          <a:lstStyle/>
+          <a:p>
+            <a:r>
+              <a:rPr lang="en-US" altLang="zh-CN" sz="400" dirty="0"/>
+              <a:t>ALU.C</a:t>
+            </a:r>
+            <a:endParaRPr lang="zh-CN" altLang="en-US" sz="400" dirty="0"/>
+          </a:p>
+        </p:txBody>
+      </p:sp>
+      <p:sp>
+        <p:nvSpPr>
+          <p:cNvPr id="83" name="文本框 82">
+            <a:extLst>
+              <a:ext uri="{FF2B5EF4-FFF2-40B4-BE49-F238E27FC236}">
+                <a16:creationId xmlns:a16="http://schemas.microsoft.com/office/drawing/2014/main" id="{96BB1400-F599-91EF-0601-2F7B2CEF9521}"/>
+              </a:ext>
+            </a:extLst>
+          </p:cNvPr>
+          <p:cNvSpPr txBox="1"/>
+          <p:nvPr/>
+        </p:nvSpPr>
+        <p:spPr>
+          <a:xfrm>
+            <a:off x="2834071" y="1491716"/>
+            <a:ext cx="470103" cy="215444"/>
+          </a:xfrm>
+          <a:prstGeom prst="rect">
+            <a:avLst/>
+          </a:prstGeom>
+          <a:noFill/>
+        </p:spPr>
+        <p:txBody>
+          <a:bodyPr wrap="square" rtlCol="0">
+            <a:spAutoFit/>
+          </a:bodyPr>
+          <a:lstStyle/>
+          <a:p>
+            <a:r>
+              <a:rPr lang="en-US" altLang="zh-CN" sz="400" dirty="0" err="1"/>
+              <a:t>DRAM.rd</a:t>
+            </a:r>
+            <a:endParaRPr lang="en-US" altLang="zh-CN" sz="400" dirty="0"/>
+          </a:p>
+          <a:p>
+            <a:endParaRPr lang="zh-CN" altLang="en-US" sz="400" dirty="0"/>
+          </a:p>
+        </p:txBody>
+      </p:sp>
+      <p:sp>
+        <p:nvSpPr>
+          <p:cNvPr id="84" name="文本框 83">
+            <a:extLst>
+              <a:ext uri="{FF2B5EF4-FFF2-40B4-BE49-F238E27FC236}">
+                <a16:creationId xmlns:a16="http://schemas.microsoft.com/office/drawing/2014/main" id="{0A30F931-973E-1D45-36BA-461A35B64AB0}"/>
+              </a:ext>
+            </a:extLst>
+          </p:cNvPr>
+          <p:cNvSpPr txBox="1"/>
+          <p:nvPr/>
+        </p:nvSpPr>
+        <p:spPr>
+          <a:xfrm>
+            <a:off x="3114572" y="1599331"/>
+            <a:ext cx="375139" cy="215444"/>
+          </a:xfrm>
+          <a:prstGeom prst="rect">
+            <a:avLst/>
+          </a:prstGeom>
+          <a:noFill/>
+        </p:spPr>
+        <p:txBody>
+          <a:bodyPr wrap="square" rtlCol="0">
+            <a:spAutoFit/>
+          </a:bodyPr>
+          <a:lstStyle/>
+          <a:p>
+            <a:r>
+              <a:rPr lang="en-US" altLang="zh-CN" sz="400" dirty="0"/>
+              <a:t>NPC.pc4</a:t>
+            </a:r>
+          </a:p>
+          <a:p>
+            <a:endParaRPr lang="zh-CN" altLang="en-US" sz="400" dirty="0"/>
+          </a:p>
+        </p:txBody>
+      </p:sp>
+      <p:sp>
+        <p:nvSpPr>
+          <p:cNvPr id="87" name="文本框 86">
+            <a:extLst>
+              <a:ext uri="{FF2B5EF4-FFF2-40B4-BE49-F238E27FC236}">
+                <a16:creationId xmlns:a16="http://schemas.microsoft.com/office/drawing/2014/main" id="{FD55DD13-9B4A-94E9-A0D5-CB0566E969AB}"/>
+              </a:ext>
+            </a:extLst>
+          </p:cNvPr>
+          <p:cNvSpPr txBox="1"/>
+          <p:nvPr/>
+        </p:nvSpPr>
+        <p:spPr>
+          <a:xfrm>
+            <a:off x="2962219" y="2144910"/>
+            <a:ext cx="583126" cy="153888"/>
+          </a:xfrm>
+          <a:prstGeom prst="rect">
+            <a:avLst/>
+          </a:prstGeom>
+          <a:noFill/>
+        </p:spPr>
+        <p:txBody>
+          <a:bodyPr wrap="square" rtlCol="0">
+            <a:spAutoFit/>
+          </a:bodyPr>
+          <a:lstStyle/>
+          <a:p>
+            <a:r>
+              <a:rPr lang="en-US" altLang="zh-CN" sz="400" dirty="0" err="1"/>
+              <a:t>inst</a:t>
+            </a:r>
+            <a:r>
+              <a:rPr lang="en-US" altLang="zh-CN" sz="400" dirty="0"/>
+              <a:t>[31:7]</a:t>
+            </a:r>
+            <a:endParaRPr lang="zh-CN" altLang="en-US" sz="400" dirty="0"/>
+          </a:p>
+        </p:txBody>
+      </p:sp>
+      <p:cxnSp>
+        <p:nvCxnSpPr>
+          <p:cNvPr id="88" name="直接连接符 87">
+            <a:extLst>
+              <a:ext uri="{FF2B5EF4-FFF2-40B4-BE49-F238E27FC236}">
+                <a16:creationId xmlns:a16="http://schemas.microsoft.com/office/drawing/2014/main" id="{91158468-0FA8-3F07-347E-248562BD1F92}"/>
+              </a:ext>
+            </a:extLst>
+          </p:cNvPr>
+          <p:cNvCxnSpPr/>
+          <p:nvPr/>
+        </p:nvCxnSpPr>
+        <p:spPr>
+          <a:xfrm>
+            <a:off x="3346458" y="1837378"/>
+            <a:ext cx="0" cy="211389"/>
+          </a:xfrm>
+          <a:prstGeom prst="line">
+            <a:avLst/>
+          </a:prstGeom>
+        </p:spPr>
+        <p:style>
+          <a:lnRef idx="1">
+            <a:schemeClr val="dk1"/>
+          </a:lnRef>
+          <a:fillRef idx="0">
+            <a:schemeClr val="dk1"/>
+          </a:fillRef>
+          <a:effectRef idx="0">
+            <a:schemeClr val="dk1"/>
+          </a:effectRef>
+          <a:fontRef idx="minor">
+            <a:schemeClr val="tx1"/>
+          </a:fontRef>
+        </p:style>
+      </p:cxnSp>
+      <p:cxnSp>
+        <p:nvCxnSpPr>
+          <p:cNvPr id="89" name="直接连接符 88">
+            <a:extLst>
+              <a:ext uri="{FF2B5EF4-FFF2-40B4-BE49-F238E27FC236}">
+                <a16:creationId xmlns:a16="http://schemas.microsoft.com/office/drawing/2014/main" id="{F2CAC429-6D9A-43EF-3211-B233F2865650}"/>
+              </a:ext>
+            </a:extLst>
+          </p:cNvPr>
+          <p:cNvCxnSpPr>
+            <a:cxnSpLocks/>
+          </p:cNvCxnSpPr>
+          <p:nvPr/>
+        </p:nvCxnSpPr>
+        <p:spPr>
+          <a:xfrm>
+            <a:off x="4143950" y="2048764"/>
+            <a:ext cx="0" cy="237052"/>
+          </a:xfrm>
+          <a:prstGeom prst="line">
+            <a:avLst/>
+          </a:prstGeom>
+        </p:spPr>
+        <p:style>
+          <a:lnRef idx="1">
+            <a:schemeClr val="dk1"/>
+          </a:lnRef>
+          <a:fillRef idx="0">
+            <a:schemeClr val="dk1"/>
+          </a:fillRef>
+          <a:effectRef idx="0">
+            <a:schemeClr val="dk1"/>
+          </a:effectRef>
+          <a:fontRef idx="minor">
+            <a:schemeClr val="tx1"/>
+          </a:fontRef>
+        </p:style>
+      </p:cxnSp>
+      <p:cxnSp>
+        <p:nvCxnSpPr>
+          <p:cNvPr id="90" name="直接连接符 89">
+            <a:extLst>
+              <a:ext uri="{FF2B5EF4-FFF2-40B4-BE49-F238E27FC236}">
+                <a16:creationId xmlns:a16="http://schemas.microsoft.com/office/drawing/2014/main" id="{4DB4EC76-69FA-FB6B-9916-CD3000170815}"/>
+              </a:ext>
+            </a:extLst>
+          </p:cNvPr>
+          <p:cNvCxnSpPr>
+            <a:cxnSpLocks/>
+          </p:cNvCxnSpPr>
+          <p:nvPr/>
+        </p:nvCxnSpPr>
+        <p:spPr>
+          <a:xfrm>
+            <a:off x="3346456" y="2048765"/>
+            <a:ext cx="800335" cy="0"/>
+          </a:xfrm>
+          <a:prstGeom prst="line">
+            <a:avLst/>
+          </a:prstGeom>
+        </p:spPr>
+        <p:style>
+          <a:lnRef idx="1">
+            <a:schemeClr val="dk1"/>
+          </a:lnRef>
+          <a:fillRef idx="0">
+            <a:schemeClr val="dk1"/>
+          </a:fillRef>
+          <a:effectRef idx="0">
+            <a:schemeClr val="dk1"/>
+          </a:effectRef>
+          <a:fontRef idx="minor">
+            <a:schemeClr val="tx1"/>
+          </a:fontRef>
+        </p:style>
+      </p:cxnSp>
+      <p:cxnSp>
+        <p:nvCxnSpPr>
+          <p:cNvPr id="92" name="直接箭头连接符 91">
+            <a:extLst>
+              <a:ext uri="{FF2B5EF4-FFF2-40B4-BE49-F238E27FC236}">
+                <a16:creationId xmlns:a16="http://schemas.microsoft.com/office/drawing/2014/main" id="{FAB9AA16-ED21-03B7-F50E-13B64BEFA29A}"/>
+              </a:ext>
+            </a:extLst>
+          </p:cNvPr>
+          <p:cNvCxnSpPr>
+            <a:cxnSpLocks/>
+          </p:cNvCxnSpPr>
+          <p:nvPr/>
+        </p:nvCxnSpPr>
+        <p:spPr>
+          <a:xfrm>
+            <a:off x="4243152" y="1460788"/>
+            <a:ext cx="315835" cy="0"/>
+          </a:xfrm>
+          <a:prstGeom prst="straightConnector1">
+            <a:avLst/>
+          </a:prstGeom>
+          <a:ln>
+            <a:tailEnd type="triangle"/>
+          </a:ln>
+        </p:spPr>
+        <p:style>
+          <a:lnRef idx="1">
+            <a:schemeClr val="dk1"/>
+          </a:lnRef>
+          <a:fillRef idx="0">
+            <a:schemeClr val="dk1"/>
+          </a:fillRef>
+          <a:effectRef idx="0">
+            <a:schemeClr val="dk1"/>
+          </a:effectRef>
+          <a:fontRef idx="minor">
+            <a:schemeClr val="tx1"/>
+          </a:fontRef>
+        </p:style>
+      </p:cxnSp>
+      <p:cxnSp>
+        <p:nvCxnSpPr>
+          <p:cNvPr id="93" name="直接箭头连接符 92">
+            <a:extLst>
+              <a:ext uri="{FF2B5EF4-FFF2-40B4-BE49-F238E27FC236}">
+                <a16:creationId xmlns:a16="http://schemas.microsoft.com/office/drawing/2014/main" id="{3DC14892-2228-439E-49F3-EEC9056885B9}"/>
+              </a:ext>
+            </a:extLst>
+          </p:cNvPr>
+          <p:cNvCxnSpPr>
+            <a:cxnSpLocks/>
+          </p:cNvCxnSpPr>
+          <p:nvPr/>
+        </p:nvCxnSpPr>
+        <p:spPr>
+          <a:xfrm flipV="1">
+            <a:off x="4245515" y="1635176"/>
+            <a:ext cx="313474" cy="632"/>
+          </a:xfrm>
+          <a:prstGeom prst="straightConnector1">
+            <a:avLst/>
+          </a:prstGeom>
+          <a:ln>
+            <a:tailEnd type="triangle"/>
+          </a:ln>
+        </p:spPr>
+        <p:style>
+          <a:lnRef idx="1">
+            <a:schemeClr val="dk1"/>
+          </a:lnRef>
+          <a:fillRef idx="0">
+            <a:schemeClr val="dk1"/>
+          </a:fillRef>
+          <a:effectRef idx="0">
+            <a:schemeClr val="dk1"/>
+          </a:effectRef>
+          <a:fontRef idx="minor">
+            <a:schemeClr val="tx1"/>
+          </a:fontRef>
+        </p:style>
+      </p:cxnSp>
+      <p:cxnSp>
+        <p:nvCxnSpPr>
+          <p:cNvPr id="94" name="直接箭头连接符 93">
+            <a:extLst>
+              <a:ext uri="{FF2B5EF4-FFF2-40B4-BE49-F238E27FC236}">
+                <a16:creationId xmlns:a16="http://schemas.microsoft.com/office/drawing/2014/main" id="{53349E41-74D2-CA1F-3309-D37EC26B5116}"/>
+              </a:ext>
+            </a:extLst>
+          </p:cNvPr>
+          <p:cNvCxnSpPr>
+            <a:cxnSpLocks/>
+          </p:cNvCxnSpPr>
+          <p:nvPr/>
+        </p:nvCxnSpPr>
+        <p:spPr>
+          <a:xfrm>
+            <a:off x="4245515" y="1795656"/>
+            <a:ext cx="313474" cy="0"/>
+          </a:xfrm>
+          <a:prstGeom prst="straightConnector1">
+            <a:avLst/>
+          </a:prstGeom>
+          <a:ln>
+            <a:tailEnd type="triangle"/>
+          </a:ln>
+        </p:spPr>
+        <p:style>
+          <a:lnRef idx="1">
+            <a:schemeClr val="dk1"/>
+          </a:lnRef>
+          <a:fillRef idx="0">
+            <a:schemeClr val="dk1"/>
+          </a:fillRef>
+          <a:effectRef idx="0">
+            <a:schemeClr val="dk1"/>
+          </a:effectRef>
+          <a:fontRef idx="minor">
+            <a:schemeClr val="tx1"/>
+          </a:fontRef>
+        </p:style>
+      </p:cxnSp>
+      <p:cxnSp>
+        <p:nvCxnSpPr>
+          <p:cNvPr id="95" name="直接连接符 94">
+            <a:extLst>
+              <a:ext uri="{FF2B5EF4-FFF2-40B4-BE49-F238E27FC236}">
+                <a16:creationId xmlns:a16="http://schemas.microsoft.com/office/drawing/2014/main" id="{DB89E34E-4222-2518-FEF7-05721617E4CB}"/>
+              </a:ext>
+            </a:extLst>
+          </p:cNvPr>
+          <p:cNvCxnSpPr>
+            <a:cxnSpLocks/>
+          </p:cNvCxnSpPr>
+          <p:nvPr/>
+        </p:nvCxnSpPr>
+        <p:spPr>
+          <a:xfrm>
+            <a:off x="4243152" y="1460788"/>
+            <a:ext cx="2365" cy="1070374"/>
+          </a:xfrm>
+          <a:prstGeom prst="line">
+            <a:avLst/>
+          </a:prstGeom>
+        </p:spPr>
+        <p:style>
+          <a:lnRef idx="1">
+            <a:schemeClr val="dk1"/>
+          </a:lnRef>
+          <a:fillRef idx="0">
+            <a:schemeClr val="dk1"/>
+          </a:fillRef>
+          <a:effectRef idx="0">
+            <a:schemeClr val="dk1"/>
+          </a:effectRef>
+          <a:fontRef idx="minor">
+            <a:schemeClr val="tx1"/>
+          </a:fontRef>
+        </p:style>
+      </p:cxnSp>
+      <p:cxnSp>
+        <p:nvCxnSpPr>
+          <p:cNvPr id="96" name="直接连接符 95">
+            <a:extLst>
+              <a:ext uri="{FF2B5EF4-FFF2-40B4-BE49-F238E27FC236}">
+                <a16:creationId xmlns:a16="http://schemas.microsoft.com/office/drawing/2014/main" id="{2BA8E89A-FA63-82DC-EA5A-6CB67C2AC06B}"/>
+              </a:ext>
+            </a:extLst>
+          </p:cNvPr>
+          <p:cNvCxnSpPr>
+            <a:cxnSpLocks/>
+          </p:cNvCxnSpPr>
+          <p:nvPr/>
+        </p:nvCxnSpPr>
+        <p:spPr>
+          <a:xfrm flipH="1">
+            <a:off x="2766096" y="2531162"/>
+            <a:ext cx="1479419" cy="0"/>
+          </a:xfrm>
+          <a:prstGeom prst="line">
+            <a:avLst/>
+          </a:prstGeom>
+        </p:spPr>
+        <p:style>
+          <a:lnRef idx="1">
+            <a:schemeClr val="dk1"/>
+          </a:lnRef>
+          <a:fillRef idx="0">
+            <a:schemeClr val="dk1"/>
+          </a:fillRef>
+          <a:effectRef idx="0">
+            <a:schemeClr val="dk1"/>
+          </a:effectRef>
+          <a:fontRef idx="minor">
+            <a:schemeClr val="tx1"/>
+          </a:fontRef>
+        </p:style>
+      </p:cxnSp>
+      <p:sp>
+        <p:nvSpPr>
+          <p:cNvPr id="97" name="文本框 96">
+            <a:extLst>
+              <a:ext uri="{FF2B5EF4-FFF2-40B4-BE49-F238E27FC236}">
+                <a16:creationId xmlns:a16="http://schemas.microsoft.com/office/drawing/2014/main" id="{5EDAA3C7-A6F4-237D-C252-A48AE54ABF5F}"/>
+              </a:ext>
+            </a:extLst>
+          </p:cNvPr>
+          <p:cNvSpPr txBox="1"/>
+          <p:nvPr/>
+        </p:nvSpPr>
+        <p:spPr>
+          <a:xfrm>
+            <a:off x="4188229" y="1353299"/>
+            <a:ext cx="405248" cy="153888"/>
+          </a:xfrm>
+          <a:prstGeom prst="rect">
+            <a:avLst/>
+          </a:prstGeom>
+          <a:noFill/>
+        </p:spPr>
+        <p:txBody>
+          <a:bodyPr wrap="square" rtlCol="0">
+            <a:spAutoFit/>
+          </a:bodyPr>
+          <a:lstStyle/>
+          <a:p>
+            <a:r>
+              <a:rPr lang="en-US" altLang="zh-CN" sz="400" dirty="0" err="1"/>
+              <a:t>inst</a:t>
+            </a:r>
+            <a:r>
+              <a:rPr lang="en-US" altLang="zh-CN" sz="400" dirty="0"/>
+              <a:t>[19:15]</a:t>
+            </a:r>
+            <a:endParaRPr lang="zh-CN" altLang="en-US" sz="400" dirty="0"/>
+          </a:p>
+        </p:txBody>
+      </p:sp>
+      <p:sp>
+        <p:nvSpPr>
+          <p:cNvPr id="98" name="文本框 97">
+            <a:extLst>
+              <a:ext uri="{FF2B5EF4-FFF2-40B4-BE49-F238E27FC236}">
+                <a16:creationId xmlns:a16="http://schemas.microsoft.com/office/drawing/2014/main" id="{653B887F-15D2-8CDF-BF4D-22CCBCBACEFC}"/>
+              </a:ext>
+            </a:extLst>
+          </p:cNvPr>
+          <p:cNvSpPr txBox="1"/>
+          <p:nvPr/>
+        </p:nvSpPr>
+        <p:spPr>
+          <a:xfrm>
+            <a:off x="4183983" y="1513115"/>
+            <a:ext cx="405248" cy="153888"/>
+          </a:xfrm>
+          <a:prstGeom prst="rect">
+            <a:avLst/>
+          </a:prstGeom>
+          <a:noFill/>
+        </p:spPr>
+        <p:txBody>
+          <a:bodyPr wrap="square" rtlCol="0">
+            <a:spAutoFit/>
+          </a:bodyPr>
+          <a:lstStyle/>
+          <a:p>
+            <a:r>
+              <a:rPr lang="en-US" altLang="zh-CN" sz="400" dirty="0" err="1"/>
+              <a:t>inst</a:t>
+            </a:r>
+            <a:r>
+              <a:rPr lang="en-US" altLang="zh-CN" sz="400" dirty="0"/>
+              <a:t>[24:20]</a:t>
+            </a:r>
+            <a:endParaRPr lang="zh-CN" altLang="en-US" sz="400" dirty="0"/>
+          </a:p>
+        </p:txBody>
+      </p:sp>
+      <p:sp>
+        <p:nvSpPr>
+          <p:cNvPr id="99" name="文本框 98">
+            <a:extLst>
+              <a:ext uri="{FF2B5EF4-FFF2-40B4-BE49-F238E27FC236}">
+                <a16:creationId xmlns:a16="http://schemas.microsoft.com/office/drawing/2014/main" id="{679E7D50-9BA2-CB1D-CE41-2A4BCB873861}"/>
+              </a:ext>
+            </a:extLst>
+          </p:cNvPr>
+          <p:cNvSpPr txBox="1"/>
+          <p:nvPr/>
+        </p:nvSpPr>
+        <p:spPr>
+          <a:xfrm>
+            <a:off x="4202750" y="1689223"/>
+            <a:ext cx="405248" cy="153888"/>
+          </a:xfrm>
+          <a:prstGeom prst="rect">
+            <a:avLst/>
+          </a:prstGeom>
+          <a:noFill/>
+        </p:spPr>
+        <p:txBody>
+          <a:bodyPr wrap="square" rtlCol="0">
+            <a:spAutoFit/>
+          </a:bodyPr>
+          <a:lstStyle/>
+          <a:p>
+            <a:r>
+              <a:rPr lang="en-US" altLang="zh-CN" sz="400" dirty="0" err="1"/>
+              <a:t>inst</a:t>
+            </a:r>
+            <a:r>
+              <a:rPr lang="en-US" altLang="zh-CN" sz="400" dirty="0"/>
+              <a:t>[11:7]</a:t>
+            </a:r>
+            <a:endParaRPr lang="zh-CN" altLang="en-US" sz="400" dirty="0"/>
+          </a:p>
+        </p:txBody>
+      </p:sp>
+      <p:sp>
+        <p:nvSpPr>
+          <p:cNvPr id="100" name="文本框 99">
+            <a:extLst>
+              <a:ext uri="{FF2B5EF4-FFF2-40B4-BE49-F238E27FC236}">
+                <a16:creationId xmlns:a16="http://schemas.microsoft.com/office/drawing/2014/main" id="{DDDFCAF3-30F4-A360-6074-4B180D13E3BF}"/>
+              </a:ext>
+            </a:extLst>
+          </p:cNvPr>
+          <p:cNvSpPr txBox="1"/>
+          <p:nvPr/>
+        </p:nvSpPr>
+        <p:spPr>
+          <a:xfrm>
+            <a:off x="2712115" y="2410924"/>
+            <a:ext cx="399434" cy="153888"/>
+          </a:xfrm>
+          <a:prstGeom prst="rect">
+            <a:avLst/>
+          </a:prstGeom>
+          <a:noFill/>
+        </p:spPr>
+        <p:txBody>
+          <a:bodyPr wrap="square" rtlCol="0">
+            <a:spAutoFit/>
+          </a:bodyPr>
+          <a:lstStyle/>
+          <a:p>
+            <a:r>
+              <a:rPr lang="en-US" altLang="zh-CN" sz="400" dirty="0" err="1"/>
+              <a:t>IROM.inst</a:t>
+            </a:r>
+            <a:endParaRPr lang="zh-CN" altLang="en-US" sz="400" dirty="0"/>
+          </a:p>
+        </p:txBody>
+      </p:sp>
+      <p:cxnSp>
+        <p:nvCxnSpPr>
+          <p:cNvPr id="101" name="直接连接符 100">
+            <a:extLst>
+              <a:ext uri="{FF2B5EF4-FFF2-40B4-BE49-F238E27FC236}">
+                <a16:creationId xmlns:a16="http://schemas.microsoft.com/office/drawing/2014/main" id="{15C8A657-9571-6C0A-EF9C-94F5F2C7F5D0}"/>
+              </a:ext>
+            </a:extLst>
+          </p:cNvPr>
+          <p:cNvCxnSpPr>
+            <a:stCxn id="62" idx="2"/>
+          </p:cNvCxnSpPr>
+          <p:nvPr/>
+        </p:nvCxnSpPr>
+        <p:spPr>
+          <a:xfrm flipV="1">
+            <a:off x="3867401" y="1668759"/>
+            <a:ext cx="197117" cy="1"/>
+          </a:xfrm>
+          <a:prstGeom prst="line">
+            <a:avLst/>
+          </a:prstGeom>
+        </p:spPr>
+        <p:style>
+          <a:lnRef idx="1">
+            <a:schemeClr val="dk1"/>
+          </a:lnRef>
+          <a:fillRef idx="0">
+            <a:schemeClr val="dk1"/>
+          </a:fillRef>
+          <a:effectRef idx="0">
+            <a:schemeClr val="dk1"/>
+          </a:effectRef>
+          <a:fontRef idx="minor">
+            <a:schemeClr val="tx1"/>
+          </a:fontRef>
+        </p:style>
+      </p:cxnSp>
+      <p:cxnSp>
+        <p:nvCxnSpPr>
+          <p:cNvPr id="102" name="直接连接符 101">
+            <a:extLst>
+              <a:ext uri="{FF2B5EF4-FFF2-40B4-BE49-F238E27FC236}">
+                <a16:creationId xmlns:a16="http://schemas.microsoft.com/office/drawing/2014/main" id="{852E9744-04C7-5FF6-B66F-3259A45530F6}"/>
+              </a:ext>
+            </a:extLst>
+          </p:cNvPr>
+          <p:cNvCxnSpPr/>
+          <p:nvPr/>
+        </p:nvCxnSpPr>
+        <p:spPr>
+          <a:xfrm>
+            <a:off x="4064518" y="1140389"/>
+            <a:ext cx="820069" cy="0"/>
+          </a:xfrm>
+          <a:prstGeom prst="line">
+            <a:avLst/>
+          </a:prstGeom>
+        </p:spPr>
+        <p:style>
+          <a:lnRef idx="1">
+            <a:schemeClr val="dk1"/>
+          </a:lnRef>
+          <a:fillRef idx="0">
+            <a:schemeClr val="dk1"/>
+          </a:fillRef>
+          <a:effectRef idx="0">
+            <a:schemeClr val="dk1"/>
+          </a:effectRef>
+          <a:fontRef idx="minor">
+            <a:schemeClr val="tx1"/>
+          </a:fontRef>
+        </p:style>
+      </p:cxnSp>
+      <p:cxnSp>
+        <p:nvCxnSpPr>
+          <p:cNvPr id="103" name="直接连接符 102">
+            <a:extLst>
+              <a:ext uri="{FF2B5EF4-FFF2-40B4-BE49-F238E27FC236}">
+                <a16:creationId xmlns:a16="http://schemas.microsoft.com/office/drawing/2014/main" id="{CC09CC0A-BA7C-7BE6-8FA5-DA467BE6D1CC}"/>
+              </a:ext>
+            </a:extLst>
+          </p:cNvPr>
+          <p:cNvCxnSpPr/>
+          <p:nvPr/>
+        </p:nvCxnSpPr>
+        <p:spPr>
+          <a:xfrm>
+            <a:off x="4064516" y="1290970"/>
+            <a:ext cx="0" cy="377788"/>
+          </a:xfrm>
+          <a:prstGeom prst="line">
+            <a:avLst/>
+          </a:prstGeom>
+        </p:spPr>
+        <p:style>
+          <a:lnRef idx="1">
+            <a:schemeClr val="dk1"/>
+          </a:lnRef>
+          <a:fillRef idx="0">
+            <a:schemeClr val="dk1"/>
+          </a:fillRef>
+          <a:effectRef idx="0">
+            <a:schemeClr val="dk1"/>
+          </a:effectRef>
+          <a:fontRef idx="minor">
+            <a:schemeClr val="tx1"/>
+          </a:fontRef>
+        </p:style>
+      </p:cxnSp>
+      <p:cxnSp>
+        <p:nvCxnSpPr>
+          <p:cNvPr id="104" name="直接箭头连接符 103">
+            <a:extLst>
+              <a:ext uri="{FF2B5EF4-FFF2-40B4-BE49-F238E27FC236}">
+                <a16:creationId xmlns:a16="http://schemas.microsoft.com/office/drawing/2014/main" id="{1137F3AB-FD34-D7A7-D781-FFB0F6A3EDFB}"/>
+              </a:ext>
+            </a:extLst>
+          </p:cNvPr>
+          <p:cNvCxnSpPr>
+            <a:cxnSpLocks/>
+          </p:cNvCxnSpPr>
+          <p:nvPr/>
+        </p:nvCxnSpPr>
+        <p:spPr>
+          <a:xfrm>
+            <a:off x="4884586" y="1140389"/>
+            <a:ext cx="0" cy="208058"/>
+          </a:xfrm>
+          <a:prstGeom prst="straightConnector1">
+            <a:avLst/>
+          </a:prstGeom>
+          <a:ln>
+            <a:tailEnd type="triangle"/>
+          </a:ln>
+        </p:spPr>
+        <p:style>
+          <a:lnRef idx="1">
+            <a:schemeClr val="dk1"/>
+          </a:lnRef>
+          <a:fillRef idx="0">
+            <a:schemeClr val="dk1"/>
+          </a:fillRef>
+          <a:effectRef idx="0">
+            <a:schemeClr val="dk1"/>
+          </a:effectRef>
+          <a:fontRef idx="minor">
+            <a:schemeClr val="tx1"/>
+          </a:fontRef>
+        </p:style>
+      </p:cxnSp>
+      <p:cxnSp>
+        <p:nvCxnSpPr>
+          <p:cNvPr id="105" name="直接连接符 104">
+            <a:extLst>
+              <a:ext uri="{FF2B5EF4-FFF2-40B4-BE49-F238E27FC236}">
+                <a16:creationId xmlns:a16="http://schemas.microsoft.com/office/drawing/2014/main" id="{D928736D-6629-E02A-F850-F7E3B7D0115D}"/>
+              </a:ext>
+            </a:extLst>
+          </p:cNvPr>
+          <p:cNvCxnSpPr>
+            <a:cxnSpLocks/>
+          </p:cNvCxnSpPr>
+          <p:nvPr/>
+        </p:nvCxnSpPr>
+        <p:spPr>
+          <a:xfrm>
+            <a:off x="5221917" y="1571009"/>
+            <a:ext cx="215698" cy="0"/>
+          </a:xfrm>
+          <a:prstGeom prst="line">
+            <a:avLst/>
+          </a:prstGeom>
+        </p:spPr>
+        <p:style>
+          <a:lnRef idx="1">
+            <a:schemeClr val="dk1"/>
+          </a:lnRef>
+          <a:fillRef idx="0">
+            <a:schemeClr val="dk1"/>
+          </a:fillRef>
+          <a:effectRef idx="0">
+            <a:schemeClr val="dk1"/>
+          </a:effectRef>
+          <a:fontRef idx="minor">
+            <a:schemeClr val="tx1"/>
+          </a:fontRef>
+        </p:style>
+      </p:cxnSp>
+      <p:cxnSp>
+        <p:nvCxnSpPr>
+          <p:cNvPr id="106" name="直接连接符 105">
+            <a:extLst>
+              <a:ext uri="{FF2B5EF4-FFF2-40B4-BE49-F238E27FC236}">
+                <a16:creationId xmlns:a16="http://schemas.microsoft.com/office/drawing/2014/main" id="{8A59D69E-806C-101D-BC68-B127516FC5A7}"/>
+              </a:ext>
+            </a:extLst>
+          </p:cNvPr>
+          <p:cNvCxnSpPr>
+            <a:cxnSpLocks/>
+          </p:cNvCxnSpPr>
+          <p:nvPr/>
+        </p:nvCxnSpPr>
+        <p:spPr>
+          <a:xfrm flipV="1">
+            <a:off x="5217276" y="1723548"/>
+            <a:ext cx="224983" cy="0"/>
+          </a:xfrm>
+          <a:prstGeom prst="line">
+            <a:avLst/>
+          </a:prstGeom>
+        </p:spPr>
+        <p:style>
+          <a:lnRef idx="1">
+            <a:schemeClr val="dk1"/>
+          </a:lnRef>
+          <a:fillRef idx="0">
+            <a:schemeClr val="dk1"/>
+          </a:fillRef>
+          <a:effectRef idx="0">
+            <a:schemeClr val="dk1"/>
+          </a:effectRef>
+          <a:fontRef idx="minor">
+            <a:schemeClr val="tx1"/>
+          </a:fontRef>
+        </p:style>
+      </p:cxnSp>
+      <p:cxnSp>
+        <p:nvCxnSpPr>
+          <p:cNvPr id="107" name="直接连接符 106">
+            <a:extLst>
+              <a:ext uri="{FF2B5EF4-FFF2-40B4-BE49-F238E27FC236}">
+                <a16:creationId xmlns:a16="http://schemas.microsoft.com/office/drawing/2014/main" id="{559F4C7C-14F7-2B06-1CEF-36A2C4E53AAE}"/>
+              </a:ext>
+            </a:extLst>
+          </p:cNvPr>
+          <p:cNvCxnSpPr>
+            <a:cxnSpLocks/>
+          </p:cNvCxnSpPr>
+          <p:nvPr/>
+        </p:nvCxnSpPr>
+        <p:spPr>
+          <a:xfrm>
+            <a:off x="3021356" y="2290684"/>
+            <a:ext cx="0" cy="240478"/>
+          </a:xfrm>
+          <a:prstGeom prst="line">
+            <a:avLst/>
+          </a:prstGeom>
+        </p:spPr>
+        <p:style>
+          <a:lnRef idx="1">
+            <a:schemeClr val="dk1"/>
+          </a:lnRef>
+          <a:fillRef idx="0">
+            <a:schemeClr val="dk1"/>
+          </a:fillRef>
+          <a:effectRef idx="0">
+            <a:schemeClr val="dk1"/>
+          </a:effectRef>
+          <a:fontRef idx="minor">
+            <a:schemeClr val="tx1"/>
+          </a:fontRef>
+        </p:style>
+      </p:cxnSp>
+      <p:cxnSp>
+        <p:nvCxnSpPr>
+          <p:cNvPr id="114" name="直接连接符 113">
+            <a:extLst>
+              <a:ext uri="{FF2B5EF4-FFF2-40B4-BE49-F238E27FC236}">
+                <a16:creationId xmlns:a16="http://schemas.microsoft.com/office/drawing/2014/main" id="{5161C3D7-1A12-41BE-36CD-89F4F4CAB42F}"/>
+              </a:ext>
+            </a:extLst>
+          </p:cNvPr>
+          <p:cNvCxnSpPr/>
+          <p:nvPr/>
+        </p:nvCxnSpPr>
+        <p:spPr>
+          <a:xfrm>
+            <a:off x="4064516" y="1140388"/>
+            <a:ext cx="0" cy="150582"/>
+          </a:xfrm>
+          <a:prstGeom prst="line">
+            <a:avLst/>
+          </a:prstGeom>
+        </p:spPr>
+        <p:style>
+          <a:lnRef idx="1">
+            <a:schemeClr val="dk1"/>
+          </a:lnRef>
+          <a:fillRef idx="0">
+            <a:schemeClr val="dk1"/>
+          </a:fillRef>
+          <a:effectRef idx="0">
+            <a:schemeClr val="dk1"/>
+          </a:effectRef>
+          <a:fontRef idx="minor">
+            <a:schemeClr val="tx1"/>
+          </a:fontRef>
+        </p:style>
+      </p:cxnSp>
+      <p:cxnSp>
+        <p:nvCxnSpPr>
+          <p:cNvPr id="120" name="直接箭头连接符 119">
+            <a:extLst>
+              <a:ext uri="{FF2B5EF4-FFF2-40B4-BE49-F238E27FC236}">
+                <a16:creationId xmlns:a16="http://schemas.microsoft.com/office/drawing/2014/main" id="{AB12BFCC-33B4-B088-9DE8-79417432E81B}"/>
+              </a:ext>
+            </a:extLst>
+          </p:cNvPr>
+          <p:cNvCxnSpPr>
+            <a:cxnSpLocks/>
+          </p:cNvCxnSpPr>
+          <p:nvPr/>
+        </p:nvCxnSpPr>
+        <p:spPr>
+          <a:xfrm>
+            <a:off x="3017178" y="2290050"/>
+            <a:ext cx="280731" cy="0"/>
+          </a:xfrm>
+          <a:prstGeom prst="straightConnector1">
+            <a:avLst/>
+          </a:prstGeom>
+          <a:ln>
+            <a:tailEnd type="triangle"/>
+          </a:ln>
+        </p:spPr>
+        <p:style>
+          <a:lnRef idx="1">
+            <a:schemeClr val="dk1"/>
+          </a:lnRef>
+          <a:fillRef idx="0">
+            <a:schemeClr val="dk1"/>
+          </a:fillRef>
+          <a:effectRef idx="0">
+            <a:schemeClr val="dk1"/>
+          </a:effectRef>
+          <a:fontRef idx="minor">
+            <a:schemeClr val="tx1"/>
+          </a:fontRef>
+        </p:style>
+      </p:cxnSp>
+      <p:cxnSp>
+        <p:nvCxnSpPr>
+          <p:cNvPr id="129" name="直接连接符 128">
+            <a:extLst>
+              <a:ext uri="{FF2B5EF4-FFF2-40B4-BE49-F238E27FC236}">
+                <a16:creationId xmlns:a16="http://schemas.microsoft.com/office/drawing/2014/main" id="{28FFA9D8-BAB0-FBE2-E169-4107A34AD626}"/>
+              </a:ext>
+            </a:extLst>
+          </p:cNvPr>
+          <p:cNvCxnSpPr>
+            <a:cxnSpLocks/>
+          </p:cNvCxnSpPr>
+          <p:nvPr/>
+        </p:nvCxnSpPr>
+        <p:spPr>
+          <a:xfrm flipV="1">
+            <a:off x="5442258" y="1317436"/>
+            <a:ext cx="0" cy="257265"/>
+          </a:xfrm>
+          <a:prstGeom prst="line">
+            <a:avLst/>
+          </a:prstGeom>
+        </p:spPr>
+        <p:style>
+          <a:lnRef idx="1">
+            <a:schemeClr val="dk1"/>
+          </a:lnRef>
+          <a:fillRef idx="0">
+            <a:schemeClr val="dk1"/>
+          </a:fillRef>
+          <a:effectRef idx="0">
+            <a:schemeClr val="dk1"/>
+          </a:effectRef>
+          <a:fontRef idx="minor">
+            <a:schemeClr val="tx1"/>
+          </a:fontRef>
+        </p:style>
+      </p:cxnSp>
+      <p:cxnSp>
+        <p:nvCxnSpPr>
+          <p:cNvPr id="133" name="直接连接符 132">
+            <a:extLst>
+              <a:ext uri="{FF2B5EF4-FFF2-40B4-BE49-F238E27FC236}">
+                <a16:creationId xmlns:a16="http://schemas.microsoft.com/office/drawing/2014/main" id="{B5C8862F-E2BC-50A3-6D1E-F7FDF2F5AE8B}"/>
+              </a:ext>
+            </a:extLst>
+          </p:cNvPr>
+          <p:cNvCxnSpPr>
+            <a:cxnSpLocks/>
+          </p:cNvCxnSpPr>
+          <p:nvPr/>
+        </p:nvCxnSpPr>
+        <p:spPr>
+          <a:xfrm>
+            <a:off x="4069197" y="2285818"/>
+            <a:ext cx="155187" cy="0"/>
+          </a:xfrm>
+          <a:prstGeom prst="line">
+            <a:avLst/>
+          </a:prstGeom>
+        </p:spPr>
+        <p:style>
+          <a:lnRef idx="1">
+            <a:schemeClr val="dk1"/>
+          </a:lnRef>
+          <a:fillRef idx="0">
+            <a:schemeClr val="dk1"/>
+          </a:fillRef>
+          <a:effectRef idx="0">
+            <a:schemeClr val="dk1"/>
+          </a:effectRef>
+          <a:fontRef idx="minor">
+            <a:schemeClr val="tx1"/>
+          </a:fontRef>
+        </p:style>
+      </p:cxnSp>
+      <p:cxnSp>
+        <p:nvCxnSpPr>
+          <p:cNvPr id="135" name="直接连接符 134">
+            <a:extLst>
+              <a:ext uri="{FF2B5EF4-FFF2-40B4-BE49-F238E27FC236}">
+                <a16:creationId xmlns:a16="http://schemas.microsoft.com/office/drawing/2014/main" id="{E8729DC0-E0E8-2B68-AFD9-44B6FB8EE37D}"/>
+              </a:ext>
+            </a:extLst>
+          </p:cNvPr>
+          <p:cNvCxnSpPr>
+            <a:cxnSpLocks/>
+          </p:cNvCxnSpPr>
+          <p:nvPr/>
+        </p:nvCxnSpPr>
+        <p:spPr>
+          <a:xfrm>
+            <a:off x="4215920" y="2285818"/>
+            <a:ext cx="1212437" cy="0"/>
+          </a:xfrm>
+          <a:prstGeom prst="line">
+            <a:avLst/>
+          </a:prstGeom>
+        </p:spPr>
+        <p:style>
+          <a:lnRef idx="1">
+            <a:schemeClr val="dk1"/>
+          </a:lnRef>
+          <a:fillRef idx="0">
+            <a:schemeClr val="dk1"/>
+          </a:fillRef>
+          <a:effectRef idx="0">
+            <a:schemeClr val="dk1"/>
+          </a:effectRef>
+          <a:fontRef idx="minor">
+            <a:schemeClr val="tx1"/>
+          </a:fontRef>
+        </p:style>
+      </p:cxnSp>
+      <p:cxnSp>
+        <p:nvCxnSpPr>
+          <p:cNvPr id="137" name="直接连接符 136">
+            <a:extLst>
+              <a:ext uri="{FF2B5EF4-FFF2-40B4-BE49-F238E27FC236}">
+                <a16:creationId xmlns:a16="http://schemas.microsoft.com/office/drawing/2014/main" id="{8D83B5AF-E57F-E2CB-0FCA-6898AB71AF1F}"/>
+              </a:ext>
+            </a:extLst>
+          </p:cNvPr>
+          <p:cNvCxnSpPr>
+            <a:cxnSpLocks/>
+          </p:cNvCxnSpPr>
+          <p:nvPr/>
+        </p:nvCxnSpPr>
+        <p:spPr>
+          <a:xfrm flipH="1">
+            <a:off x="5427964" y="1976751"/>
+            <a:ext cx="2177" cy="309067"/>
+          </a:xfrm>
+          <a:prstGeom prst="line">
+            <a:avLst/>
+          </a:prstGeom>
+        </p:spPr>
+        <p:style>
+          <a:lnRef idx="1">
+            <a:schemeClr val="dk1"/>
+          </a:lnRef>
+          <a:fillRef idx="0">
+            <a:schemeClr val="dk1"/>
+          </a:fillRef>
+          <a:effectRef idx="0">
+            <a:schemeClr val="dk1"/>
+          </a:effectRef>
+          <a:fontRef idx="minor">
+            <a:schemeClr val="tx1"/>
+          </a:fontRef>
+        </p:style>
+      </p:cxnSp>
+      <p:cxnSp>
+        <p:nvCxnSpPr>
+          <p:cNvPr id="150" name="直接连接符 149">
+            <a:extLst>
+              <a:ext uri="{FF2B5EF4-FFF2-40B4-BE49-F238E27FC236}">
+                <a16:creationId xmlns:a16="http://schemas.microsoft.com/office/drawing/2014/main" id="{6DA02FDE-D696-1196-FA93-7A0BB5312599}"/>
+              </a:ext>
+            </a:extLst>
+          </p:cNvPr>
+          <p:cNvCxnSpPr>
+            <a:cxnSpLocks/>
+          </p:cNvCxnSpPr>
+          <p:nvPr/>
+        </p:nvCxnSpPr>
+        <p:spPr>
+          <a:xfrm>
+            <a:off x="6823464" y="1468150"/>
+            <a:ext cx="298606" cy="0"/>
+          </a:xfrm>
+          <a:prstGeom prst="line">
+            <a:avLst/>
+          </a:prstGeom>
+        </p:spPr>
+        <p:style>
+          <a:lnRef idx="1">
+            <a:schemeClr val="dk1"/>
+          </a:lnRef>
+          <a:fillRef idx="0">
+            <a:schemeClr val="dk1"/>
+          </a:fillRef>
+          <a:effectRef idx="0">
+            <a:schemeClr val="dk1"/>
+          </a:effectRef>
+          <a:fontRef idx="minor">
+            <a:schemeClr val="tx1"/>
+          </a:fontRef>
+        </p:style>
+      </p:cxnSp>
+      <p:cxnSp>
+        <p:nvCxnSpPr>
+          <p:cNvPr id="152" name="直接连接符 151">
+            <a:extLst>
+              <a:ext uri="{FF2B5EF4-FFF2-40B4-BE49-F238E27FC236}">
+                <a16:creationId xmlns:a16="http://schemas.microsoft.com/office/drawing/2014/main" id="{EA775179-518D-D74E-C911-38FC65286706}"/>
+              </a:ext>
+            </a:extLst>
+          </p:cNvPr>
+          <p:cNvCxnSpPr>
+            <a:cxnSpLocks/>
+          </p:cNvCxnSpPr>
+          <p:nvPr/>
+        </p:nvCxnSpPr>
+        <p:spPr>
+          <a:xfrm>
+            <a:off x="6821318" y="1676577"/>
+            <a:ext cx="341482" cy="0"/>
+          </a:xfrm>
+          <a:prstGeom prst="line">
+            <a:avLst/>
+          </a:prstGeom>
+        </p:spPr>
+        <p:style>
+          <a:lnRef idx="1">
+            <a:schemeClr val="dk1"/>
+          </a:lnRef>
+          <a:fillRef idx="0">
+            <a:schemeClr val="dk1"/>
+          </a:fillRef>
+          <a:effectRef idx="0">
+            <a:schemeClr val="dk1"/>
+          </a:effectRef>
+          <a:fontRef idx="minor">
+            <a:schemeClr val="tx1"/>
+          </a:fontRef>
+        </p:style>
+      </p:cxnSp>
+      <p:cxnSp>
+        <p:nvCxnSpPr>
+          <p:cNvPr id="153" name="直接连接符 152">
+            <a:extLst>
+              <a:ext uri="{FF2B5EF4-FFF2-40B4-BE49-F238E27FC236}">
+                <a16:creationId xmlns:a16="http://schemas.microsoft.com/office/drawing/2014/main" id="{DF8139BD-1D21-7691-6152-C27B9132A162}"/>
+              </a:ext>
+            </a:extLst>
+          </p:cNvPr>
+          <p:cNvCxnSpPr>
+            <a:cxnSpLocks/>
+          </p:cNvCxnSpPr>
+          <p:nvPr/>
+        </p:nvCxnSpPr>
+        <p:spPr>
+          <a:xfrm>
+            <a:off x="1886674" y="723083"/>
+            <a:ext cx="5276127" cy="0"/>
+          </a:xfrm>
+          <a:prstGeom prst="line">
+            <a:avLst/>
+          </a:prstGeom>
+        </p:spPr>
+        <p:style>
+          <a:lnRef idx="1">
+            <a:schemeClr val="dk1"/>
+          </a:lnRef>
+          <a:fillRef idx="0">
+            <a:schemeClr val="dk1"/>
+          </a:fillRef>
+          <a:effectRef idx="0">
+            <a:schemeClr val="dk1"/>
+          </a:effectRef>
+          <a:fontRef idx="minor">
+            <a:schemeClr val="tx1"/>
+          </a:fontRef>
+        </p:style>
+      </p:cxnSp>
+      <p:cxnSp>
+        <p:nvCxnSpPr>
+          <p:cNvPr id="156" name="直接连接符 155">
+            <a:extLst>
+              <a:ext uri="{FF2B5EF4-FFF2-40B4-BE49-F238E27FC236}">
+                <a16:creationId xmlns:a16="http://schemas.microsoft.com/office/drawing/2014/main" id="{E5D8C51A-076A-D0BA-1975-65A687FD399A}"/>
+              </a:ext>
+            </a:extLst>
+          </p:cNvPr>
+          <p:cNvCxnSpPr>
+            <a:cxnSpLocks/>
+          </p:cNvCxnSpPr>
+          <p:nvPr/>
+        </p:nvCxnSpPr>
+        <p:spPr>
+          <a:xfrm>
+            <a:off x="3286684" y="721827"/>
+            <a:ext cx="0" cy="647503"/>
+          </a:xfrm>
+          <a:prstGeom prst="line">
+            <a:avLst/>
+          </a:prstGeom>
+        </p:spPr>
+        <p:style>
+          <a:lnRef idx="1">
+            <a:schemeClr val="dk1"/>
+          </a:lnRef>
+          <a:fillRef idx="0">
+            <a:schemeClr val="dk1"/>
+          </a:fillRef>
+          <a:effectRef idx="0">
+            <a:schemeClr val="dk1"/>
+          </a:effectRef>
+          <a:fontRef idx="minor">
+            <a:schemeClr val="tx1"/>
+          </a:fontRef>
+        </p:style>
+      </p:cxnSp>
+      <p:cxnSp>
+        <p:nvCxnSpPr>
+          <p:cNvPr id="160" name="直接连接符 159">
+            <a:extLst>
+              <a:ext uri="{FF2B5EF4-FFF2-40B4-BE49-F238E27FC236}">
+                <a16:creationId xmlns:a16="http://schemas.microsoft.com/office/drawing/2014/main" id="{70ACB4D0-1938-1025-DBCD-7F72BCB5BA4F}"/>
+              </a:ext>
+            </a:extLst>
+          </p:cNvPr>
+          <p:cNvCxnSpPr>
+            <a:cxnSpLocks/>
+          </p:cNvCxnSpPr>
+          <p:nvPr/>
+        </p:nvCxnSpPr>
+        <p:spPr>
+          <a:xfrm>
+            <a:off x="7160184" y="722770"/>
+            <a:ext cx="0" cy="1502922"/>
+          </a:xfrm>
+          <a:prstGeom prst="line">
+            <a:avLst/>
+          </a:prstGeom>
+        </p:spPr>
+        <p:style>
+          <a:lnRef idx="1">
+            <a:schemeClr val="dk1"/>
+          </a:lnRef>
+          <a:fillRef idx="0">
+            <a:schemeClr val="dk1"/>
+          </a:fillRef>
+          <a:effectRef idx="0">
+            <a:schemeClr val="dk1"/>
+          </a:effectRef>
+          <a:fontRef idx="minor">
+            <a:schemeClr val="tx1"/>
+          </a:fontRef>
+        </p:style>
+      </p:cxnSp>
+      <p:sp>
+        <p:nvSpPr>
+          <p:cNvPr id="166" name="矩形 165">
+            <a:extLst>
+              <a:ext uri="{FF2B5EF4-FFF2-40B4-BE49-F238E27FC236}">
+                <a16:creationId xmlns:a16="http://schemas.microsoft.com/office/drawing/2014/main" id="{23B1A855-1F21-F963-20C1-4C15A496A50E}"/>
+              </a:ext>
+            </a:extLst>
+          </p:cNvPr>
+          <p:cNvSpPr/>
+          <p:nvPr/>
+        </p:nvSpPr>
+        <p:spPr>
+          <a:xfrm>
+            <a:off x="1400136" y="1888069"/>
+            <a:ext cx="443906" cy="580441"/>
+          </a:xfrm>
+          <a:prstGeom prst="rect">
+            <a:avLst/>
+          </a:prstGeom>
+        </p:spPr>
+        <p:style>
+          <a:lnRef idx="2">
+            <a:schemeClr val="dk1"/>
+          </a:lnRef>
+          <a:fillRef idx="1">
+            <a:schemeClr val="lt1"/>
+          </a:fillRef>
+          <a:effectRef idx="0">
+            <a:schemeClr val="dk1"/>
+          </a:effectRef>
+          <a:fontRef idx="minor">
+            <a:schemeClr val="dk1"/>
+          </a:fontRef>
+        </p:style>
+        <p:txBody>
+          <a:bodyPr rtlCol="0" anchor="ctr"/>
+          <a:lstStyle/>
+          <a:p>
+            <a:pPr algn="ctr"/>
+            <a:endParaRPr lang="zh-CN" altLang="en-US" sz="1063" dirty="0"/>
+          </a:p>
+        </p:txBody>
+      </p:sp>
+      <p:sp>
+        <p:nvSpPr>
+          <p:cNvPr id="167" name="矩形 166">
+            <a:extLst>
+              <a:ext uri="{FF2B5EF4-FFF2-40B4-BE49-F238E27FC236}">
+                <a16:creationId xmlns:a16="http://schemas.microsoft.com/office/drawing/2014/main" id="{3EA36C13-B996-285C-C48A-70EACF107E44}"/>
+              </a:ext>
+            </a:extLst>
+          </p:cNvPr>
+          <p:cNvSpPr/>
+          <p:nvPr/>
+        </p:nvSpPr>
+        <p:spPr>
+          <a:xfrm>
+            <a:off x="2009735" y="1888070"/>
+            <a:ext cx="398186" cy="580441"/>
+          </a:xfrm>
+          <a:prstGeom prst="rect">
+            <a:avLst/>
+          </a:prstGeom>
+        </p:spPr>
+        <p:style>
+          <a:lnRef idx="2">
+            <a:schemeClr val="dk1"/>
+          </a:lnRef>
+          <a:fillRef idx="1">
+            <a:schemeClr val="lt1"/>
+          </a:fillRef>
+          <a:effectRef idx="0">
+            <a:schemeClr val="dk1"/>
+          </a:effectRef>
+          <a:fontRef idx="minor">
+            <a:schemeClr val="dk1"/>
+          </a:fontRef>
+        </p:style>
+        <p:txBody>
+          <a:bodyPr rtlCol="0" anchor="ctr"/>
+          <a:lstStyle/>
+          <a:p>
+            <a:pPr algn="ctr"/>
+            <a:endParaRPr lang="zh-CN" altLang="en-US" sz="1063" dirty="0"/>
+          </a:p>
+        </p:txBody>
+      </p:sp>
+      <p:sp>
+        <p:nvSpPr>
+          <p:cNvPr id="168" name="文本框 167">
+            <a:extLst>
+              <a:ext uri="{FF2B5EF4-FFF2-40B4-BE49-F238E27FC236}">
+                <a16:creationId xmlns:a16="http://schemas.microsoft.com/office/drawing/2014/main" id="{DFF02CD3-87C5-BE09-6D93-2A8AF1679682}"/>
+              </a:ext>
+            </a:extLst>
+          </p:cNvPr>
+          <p:cNvSpPr txBox="1"/>
+          <p:nvPr/>
+        </p:nvSpPr>
+        <p:spPr>
+          <a:xfrm>
+            <a:off x="748347" y="1728472"/>
+            <a:ext cx="399434" cy="200055"/>
+          </a:xfrm>
+          <a:prstGeom prst="rect">
+            <a:avLst/>
+          </a:prstGeom>
+          <a:noFill/>
+        </p:spPr>
+        <p:txBody>
+          <a:bodyPr wrap="square" rtlCol="0">
+            <a:spAutoFit/>
+          </a:bodyPr>
+          <a:lstStyle/>
+          <a:p>
+            <a:r>
+              <a:rPr lang="en-US" altLang="zh-CN" sz="700" dirty="0"/>
+              <a:t>NPC</a:t>
+            </a:r>
+            <a:endParaRPr lang="zh-CN" altLang="en-US" sz="700" dirty="0"/>
+          </a:p>
+        </p:txBody>
+      </p:sp>
+      <p:sp>
+        <p:nvSpPr>
+          <p:cNvPr id="169" name="文本框 168">
+            <a:extLst>
+              <a:ext uri="{FF2B5EF4-FFF2-40B4-BE49-F238E27FC236}">
+                <a16:creationId xmlns:a16="http://schemas.microsoft.com/office/drawing/2014/main" id="{C8BA2705-9174-6519-36B8-244F39126CDA}"/>
+              </a:ext>
+            </a:extLst>
+          </p:cNvPr>
+          <p:cNvSpPr txBox="1"/>
+          <p:nvPr/>
+        </p:nvSpPr>
+        <p:spPr>
+          <a:xfrm>
+            <a:off x="1456093" y="1728472"/>
+            <a:ext cx="399434" cy="200055"/>
+          </a:xfrm>
+          <a:prstGeom prst="rect">
+            <a:avLst/>
+          </a:prstGeom>
+          <a:noFill/>
+        </p:spPr>
+        <p:txBody>
+          <a:bodyPr wrap="square" rtlCol="0">
+            <a:spAutoFit/>
+          </a:bodyPr>
+          <a:lstStyle/>
+          <a:p>
+            <a:r>
+              <a:rPr lang="en-US" altLang="zh-CN" sz="700" dirty="0"/>
+              <a:t> PC</a:t>
+            </a:r>
+            <a:endParaRPr lang="zh-CN" altLang="en-US" sz="700" dirty="0"/>
+          </a:p>
+        </p:txBody>
+      </p:sp>
+      <p:sp>
+        <p:nvSpPr>
+          <p:cNvPr id="170" name="文本框 169">
+            <a:extLst>
+              <a:ext uri="{FF2B5EF4-FFF2-40B4-BE49-F238E27FC236}">
+                <a16:creationId xmlns:a16="http://schemas.microsoft.com/office/drawing/2014/main" id="{8659A939-33EE-E26F-0E20-9A40620939E1}"/>
+              </a:ext>
+            </a:extLst>
+          </p:cNvPr>
+          <p:cNvSpPr txBox="1"/>
+          <p:nvPr/>
+        </p:nvSpPr>
+        <p:spPr>
+          <a:xfrm>
+            <a:off x="2019973" y="1733551"/>
+            <a:ext cx="399434" cy="200055"/>
+          </a:xfrm>
+          <a:prstGeom prst="rect">
+            <a:avLst/>
+          </a:prstGeom>
+          <a:noFill/>
+        </p:spPr>
+        <p:txBody>
+          <a:bodyPr wrap="square" rtlCol="0">
+            <a:spAutoFit/>
+          </a:bodyPr>
+          <a:lstStyle/>
+          <a:p>
+            <a:r>
+              <a:rPr lang="en-US" altLang="zh-CN" sz="700" dirty="0"/>
+              <a:t>IROM</a:t>
+            </a:r>
+            <a:endParaRPr lang="zh-CN" altLang="en-US" sz="700" dirty="0"/>
+          </a:p>
+        </p:txBody>
+      </p:sp>
+      <p:sp>
+        <p:nvSpPr>
+          <p:cNvPr id="172" name="文本框 171">
+            <a:extLst>
+              <a:ext uri="{FF2B5EF4-FFF2-40B4-BE49-F238E27FC236}">
+                <a16:creationId xmlns:a16="http://schemas.microsoft.com/office/drawing/2014/main" id="{EBDB6103-31AE-AD6B-7FBE-ECF613BDF21E}"/>
+              </a:ext>
+            </a:extLst>
+          </p:cNvPr>
+          <p:cNvSpPr txBox="1"/>
+          <p:nvPr/>
+        </p:nvSpPr>
+        <p:spPr>
+          <a:xfrm>
+            <a:off x="620203" y="1916679"/>
+            <a:ext cx="659958" cy="523220"/>
+          </a:xfrm>
+          <a:prstGeom prst="rect">
+            <a:avLst/>
+          </a:prstGeom>
+          <a:noFill/>
+        </p:spPr>
+        <p:txBody>
+          <a:bodyPr wrap="square" rtlCol="0">
+            <a:spAutoFit/>
+          </a:bodyPr>
+          <a:lstStyle/>
+          <a:p>
+            <a:r>
+              <a:rPr lang="en-US" altLang="zh-CN" sz="400" dirty="0"/>
+              <a:t>PC</a:t>
+            </a:r>
+          </a:p>
+          <a:p>
+            <a:endParaRPr lang="en-US" altLang="zh-CN" sz="400" dirty="0"/>
+          </a:p>
+          <a:p>
+            <a:r>
+              <a:rPr lang="en-US" altLang="zh-CN" sz="400" dirty="0" err="1"/>
+              <a:t>br</a:t>
+            </a:r>
+            <a:endParaRPr lang="en-US" altLang="zh-CN" sz="400" dirty="0"/>
+          </a:p>
+          <a:p>
+            <a:endParaRPr lang="en-US" altLang="zh-CN" sz="400" dirty="0"/>
+          </a:p>
+          <a:p>
+            <a:r>
+              <a:rPr lang="en-US" altLang="zh-CN" sz="400" dirty="0"/>
+              <a:t>offset</a:t>
+            </a:r>
+          </a:p>
+          <a:p>
+            <a:endParaRPr lang="en-US" altLang="zh-CN" sz="400" dirty="0"/>
+          </a:p>
+          <a:p>
+            <a:r>
+              <a:rPr lang="en-US" altLang="zh-CN" sz="400" dirty="0"/>
+              <a:t>op</a:t>
+            </a:r>
+            <a:endParaRPr lang="zh-CN" altLang="en-US" sz="400" dirty="0"/>
+          </a:p>
+        </p:txBody>
+      </p:sp>
+      <p:sp>
+        <p:nvSpPr>
+          <p:cNvPr id="173" name="文本框 172">
+            <a:extLst>
+              <a:ext uri="{FF2B5EF4-FFF2-40B4-BE49-F238E27FC236}">
+                <a16:creationId xmlns:a16="http://schemas.microsoft.com/office/drawing/2014/main" id="{C6766B74-BBAC-555D-DE45-E50560C893AC}"/>
+              </a:ext>
+            </a:extLst>
+          </p:cNvPr>
+          <p:cNvSpPr txBox="1"/>
+          <p:nvPr/>
+        </p:nvSpPr>
+        <p:spPr>
+          <a:xfrm>
+            <a:off x="955481" y="2039790"/>
+            <a:ext cx="659958" cy="276999"/>
+          </a:xfrm>
+          <a:prstGeom prst="rect">
+            <a:avLst/>
+          </a:prstGeom>
+          <a:noFill/>
+        </p:spPr>
+        <p:txBody>
+          <a:bodyPr wrap="square" rtlCol="0">
+            <a:spAutoFit/>
+          </a:bodyPr>
+          <a:lstStyle/>
+          <a:p>
+            <a:r>
+              <a:rPr lang="en-US" altLang="zh-CN" sz="400" dirty="0" err="1"/>
+              <a:t>npc</a:t>
+            </a:r>
+            <a:endParaRPr lang="en-US" altLang="zh-CN" sz="400" dirty="0"/>
+          </a:p>
+          <a:p>
+            <a:endParaRPr lang="en-US" altLang="zh-CN" sz="400" dirty="0"/>
+          </a:p>
+          <a:p>
+            <a:r>
+              <a:rPr lang="en-US" altLang="zh-CN" sz="400" dirty="0"/>
+              <a:t>pc4</a:t>
+            </a:r>
+          </a:p>
+        </p:txBody>
+      </p:sp>
+      <p:sp>
+        <p:nvSpPr>
+          <p:cNvPr id="174" name="文本框 173">
+            <a:extLst>
+              <a:ext uri="{FF2B5EF4-FFF2-40B4-BE49-F238E27FC236}">
+                <a16:creationId xmlns:a16="http://schemas.microsoft.com/office/drawing/2014/main" id="{60793F6A-A749-77AA-4E43-BFD12773781A}"/>
+              </a:ext>
+            </a:extLst>
+          </p:cNvPr>
+          <p:cNvSpPr txBox="1"/>
+          <p:nvPr/>
+        </p:nvSpPr>
+        <p:spPr>
+          <a:xfrm>
+            <a:off x="1350396" y="1913893"/>
+            <a:ext cx="659958" cy="523220"/>
+          </a:xfrm>
+          <a:prstGeom prst="rect">
+            <a:avLst/>
+          </a:prstGeom>
+          <a:noFill/>
+        </p:spPr>
+        <p:txBody>
+          <a:bodyPr wrap="square" rtlCol="0">
+            <a:spAutoFit/>
+          </a:bodyPr>
+          <a:lstStyle/>
+          <a:p>
+            <a:r>
+              <a:rPr lang="en-US" altLang="zh-CN" sz="400" dirty="0" err="1"/>
+              <a:t>rst</a:t>
+            </a:r>
+            <a:endParaRPr lang="en-US" altLang="zh-CN" sz="400" dirty="0"/>
+          </a:p>
+          <a:p>
+            <a:endParaRPr lang="en-US" altLang="zh-CN" sz="400" dirty="0"/>
+          </a:p>
+          <a:p>
+            <a:r>
+              <a:rPr lang="en-US" altLang="zh-CN" sz="400"/>
+              <a:t>din</a:t>
+            </a:r>
+          </a:p>
+          <a:p>
+            <a:endParaRPr lang="en-US" altLang="zh-CN" sz="400"/>
+          </a:p>
+          <a:p>
+            <a:endParaRPr lang="en-US" altLang="zh-CN" sz="400"/>
+          </a:p>
+          <a:p>
+            <a:endParaRPr lang="en-US" altLang="zh-CN" sz="400"/>
+          </a:p>
+          <a:p>
+            <a:r>
+              <a:rPr lang="en-US" altLang="zh-CN" sz="400"/>
+              <a:t>stop</a:t>
+            </a:r>
+            <a:endParaRPr lang="en-US" altLang="zh-CN" sz="400" dirty="0"/>
+          </a:p>
+        </p:txBody>
+      </p:sp>
+      <p:sp>
+        <p:nvSpPr>
+          <p:cNvPr id="175" name="等腰三角形 174">
+            <a:extLst>
+              <a:ext uri="{FF2B5EF4-FFF2-40B4-BE49-F238E27FC236}">
+                <a16:creationId xmlns:a16="http://schemas.microsoft.com/office/drawing/2014/main" id="{8A52A5E8-047C-6938-6C32-940E20448A26}"/>
+              </a:ext>
+            </a:extLst>
+          </p:cNvPr>
+          <p:cNvSpPr/>
+          <p:nvPr/>
+        </p:nvSpPr>
+        <p:spPr>
+          <a:xfrm>
+            <a:off x="1543905" y="2368008"/>
+            <a:ext cx="149752" cy="100503"/>
+          </a:xfrm>
+          <a:prstGeom prst="triangle">
+            <a:avLst/>
+          </a:prstGeom>
+        </p:spPr>
+        <p:style>
+          <a:lnRef idx="2">
+            <a:schemeClr val="dk1"/>
+          </a:lnRef>
+          <a:fillRef idx="1">
+            <a:schemeClr val="lt1"/>
+          </a:fillRef>
+          <a:effectRef idx="0">
+            <a:schemeClr val="dk1"/>
+          </a:effectRef>
+          <a:fontRef idx="minor">
+            <a:schemeClr val="dk1"/>
+          </a:fontRef>
+        </p:style>
+        <p:txBody>
+          <a:bodyPr rtlCol="0" anchor="ctr"/>
+          <a:lstStyle/>
+          <a:p>
+            <a:pPr algn="ctr"/>
+            <a:endParaRPr lang="zh-CN" altLang="en-US" sz="700"/>
+          </a:p>
+        </p:txBody>
+      </p:sp>
+      <p:sp>
+        <p:nvSpPr>
+          <p:cNvPr id="176" name="文本框 175">
+            <a:extLst>
+              <a:ext uri="{FF2B5EF4-FFF2-40B4-BE49-F238E27FC236}">
+                <a16:creationId xmlns:a16="http://schemas.microsoft.com/office/drawing/2014/main" id="{4F3E182B-F520-71C3-2BCC-1AC617697E71}"/>
+              </a:ext>
+            </a:extLst>
+          </p:cNvPr>
+          <p:cNvSpPr txBox="1"/>
+          <p:nvPr/>
+        </p:nvSpPr>
+        <p:spPr>
+          <a:xfrm>
+            <a:off x="1673750" y="2080521"/>
+            <a:ext cx="337930" cy="153888"/>
+          </a:xfrm>
+          <a:prstGeom prst="rect">
+            <a:avLst/>
+          </a:prstGeom>
+          <a:noFill/>
+        </p:spPr>
+        <p:txBody>
+          <a:bodyPr wrap="square" rtlCol="0">
+            <a:spAutoFit/>
+          </a:bodyPr>
+          <a:lstStyle/>
+          <a:p>
+            <a:r>
+              <a:rPr lang="en-US" altLang="zh-CN" sz="400" dirty="0"/>
+              <a:t>pc</a:t>
+            </a:r>
+            <a:endParaRPr lang="zh-CN" altLang="en-US" sz="400" dirty="0"/>
+          </a:p>
+        </p:txBody>
+      </p:sp>
+      <p:sp>
+        <p:nvSpPr>
+          <p:cNvPr id="177" name="文本框 176">
+            <a:extLst>
+              <a:ext uri="{FF2B5EF4-FFF2-40B4-BE49-F238E27FC236}">
+                <a16:creationId xmlns:a16="http://schemas.microsoft.com/office/drawing/2014/main" id="{D03EE0A8-20C4-4445-86AE-BCA0678DD939}"/>
+              </a:ext>
+            </a:extLst>
+          </p:cNvPr>
+          <p:cNvSpPr txBox="1"/>
+          <p:nvPr/>
+        </p:nvSpPr>
+        <p:spPr>
+          <a:xfrm>
+            <a:off x="1501954" y="2236895"/>
+            <a:ext cx="337930" cy="153888"/>
+          </a:xfrm>
+          <a:prstGeom prst="rect">
+            <a:avLst/>
+          </a:prstGeom>
+          <a:noFill/>
+        </p:spPr>
+        <p:txBody>
+          <a:bodyPr wrap="square" rtlCol="0">
+            <a:spAutoFit/>
+          </a:bodyPr>
+          <a:lstStyle/>
+          <a:p>
+            <a:r>
+              <a:rPr lang="en-US" altLang="zh-CN" sz="400" dirty="0" err="1"/>
+              <a:t>clk</a:t>
+            </a:r>
+            <a:endParaRPr lang="zh-CN" altLang="en-US" sz="400" dirty="0"/>
+          </a:p>
+        </p:txBody>
+      </p:sp>
+      <p:cxnSp>
+        <p:nvCxnSpPr>
+          <p:cNvPr id="181" name="直接箭头连接符 180">
+            <a:extLst>
+              <a:ext uri="{FF2B5EF4-FFF2-40B4-BE49-F238E27FC236}">
+                <a16:creationId xmlns:a16="http://schemas.microsoft.com/office/drawing/2014/main" id="{B3B6869E-2EEA-7953-E653-ED0BD4BBF5BB}"/>
+              </a:ext>
+            </a:extLst>
+          </p:cNvPr>
+          <p:cNvCxnSpPr>
+            <a:cxnSpLocks/>
+          </p:cNvCxnSpPr>
+          <p:nvPr/>
+        </p:nvCxnSpPr>
+        <p:spPr>
+          <a:xfrm>
+            <a:off x="1160223" y="2116301"/>
+            <a:ext cx="231256" cy="0"/>
+          </a:xfrm>
+          <a:prstGeom prst="straightConnector1">
+            <a:avLst/>
+          </a:prstGeom>
+          <a:ln>
+            <a:tailEnd type="triangle"/>
+          </a:ln>
+        </p:spPr>
+        <p:style>
+          <a:lnRef idx="1">
+            <a:schemeClr val="dk1"/>
+          </a:lnRef>
+          <a:fillRef idx="0">
+            <a:schemeClr val="dk1"/>
+          </a:fillRef>
+          <a:effectRef idx="0">
+            <a:schemeClr val="dk1"/>
+          </a:effectRef>
+          <a:fontRef idx="minor">
+            <a:schemeClr val="tx1"/>
+          </a:fontRef>
+        </p:style>
+      </p:cxnSp>
+      <p:sp>
+        <p:nvSpPr>
+          <p:cNvPr id="184" name="流程图: 手动操作 183">
+            <a:extLst>
+              <a:ext uri="{FF2B5EF4-FFF2-40B4-BE49-F238E27FC236}">
+                <a16:creationId xmlns:a16="http://schemas.microsoft.com/office/drawing/2014/main" id="{039052E8-A55B-E695-C444-61A54E1B3E89}"/>
+              </a:ext>
+            </a:extLst>
+          </p:cNvPr>
+          <p:cNvSpPr/>
+          <p:nvPr/>
+        </p:nvSpPr>
+        <p:spPr>
+          <a:xfrm rot="5400000">
+            <a:off x="1186186" y="1056628"/>
+            <a:ext cx="645879" cy="368141"/>
+          </a:xfrm>
+          <a:prstGeom prst="flowChartManualOperation">
+            <a:avLst/>
+          </a:prstGeom>
+        </p:spPr>
+        <p:style>
+          <a:lnRef idx="2">
+            <a:schemeClr val="dk1"/>
+          </a:lnRef>
+          <a:fillRef idx="1">
+            <a:schemeClr val="lt1"/>
+          </a:fillRef>
+          <a:effectRef idx="0">
+            <a:schemeClr val="dk1"/>
+          </a:effectRef>
+          <a:fontRef idx="minor">
+            <a:schemeClr val="dk1"/>
+          </a:fontRef>
+        </p:style>
+        <p:txBody>
+          <a:bodyPr rtlCol="0" anchor="ctr"/>
+          <a:lstStyle/>
+          <a:p>
+            <a:pPr algn="ctr"/>
+            <a:endParaRPr lang="en-US" altLang="zh-CN" sz="700" dirty="0"/>
+          </a:p>
+        </p:txBody>
+      </p:sp>
+      <p:sp>
+        <p:nvSpPr>
+          <p:cNvPr id="185" name="文本框 184">
+            <a:extLst>
+              <a:ext uri="{FF2B5EF4-FFF2-40B4-BE49-F238E27FC236}">
+                <a16:creationId xmlns:a16="http://schemas.microsoft.com/office/drawing/2014/main" id="{3B989ADE-B57B-DD97-FC03-5A28480ACCF1}"/>
+              </a:ext>
+            </a:extLst>
+          </p:cNvPr>
+          <p:cNvSpPr txBox="1"/>
+          <p:nvPr/>
+        </p:nvSpPr>
+        <p:spPr>
+          <a:xfrm>
+            <a:off x="1338855" y="1075315"/>
+            <a:ext cx="452933" cy="307777"/>
+          </a:xfrm>
+          <a:prstGeom prst="rect">
+            <a:avLst/>
+          </a:prstGeom>
+          <a:noFill/>
+        </p:spPr>
+        <p:txBody>
+          <a:bodyPr wrap="square" rtlCol="0">
+            <a:spAutoFit/>
+          </a:bodyPr>
+          <a:lstStyle/>
+          <a:p>
+            <a:r>
+              <a:rPr lang="en-US" altLang="zh-CN" sz="700" dirty="0"/>
+              <a:t>MUX</a:t>
+            </a:r>
+          </a:p>
+          <a:p>
+            <a:r>
+              <a:rPr lang="en-US" altLang="zh-CN" sz="700" dirty="0"/>
+              <a:t> 2_1</a:t>
+            </a:r>
+            <a:endParaRPr lang="zh-CN" altLang="en-US" sz="700" dirty="0"/>
+          </a:p>
+        </p:txBody>
+      </p:sp>
+      <p:sp>
+        <p:nvSpPr>
+          <p:cNvPr id="186" name="文本框 185">
+            <a:extLst>
+              <a:ext uri="{FF2B5EF4-FFF2-40B4-BE49-F238E27FC236}">
+                <a16:creationId xmlns:a16="http://schemas.microsoft.com/office/drawing/2014/main" id="{9698072B-EF3D-92FE-1F3E-4ECA054EAF17}"/>
+              </a:ext>
+            </a:extLst>
+          </p:cNvPr>
+          <p:cNvSpPr txBox="1"/>
+          <p:nvPr/>
+        </p:nvSpPr>
+        <p:spPr>
+          <a:xfrm>
+            <a:off x="1371877" y="1342245"/>
+            <a:ext cx="353389" cy="200055"/>
+          </a:xfrm>
+          <a:prstGeom prst="rect">
+            <a:avLst/>
+          </a:prstGeom>
+          <a:noFill/>
+        </p:spPr>
+        <p:txBody>
+          <a:bodyPr wrap="square" rtlCol="0">
+            <a:spAutoFit/>
+          </a:bodyPr>
+          <a:lstStyle/>
+          <a:p>
+            <a:r>
+              <a:rPr lang="en-US" altLang="zh-CN" sz="700" dirty="0" err="1"/>
+              <a:t>sel</a:t>
+            </a:r>
+            <a:endParaRPr lang="en-US" altLang="zh-CN" sz="700" dirty="0"/>
+          </a:p>
+        </p:txBody>
+      </p:sp>
+      <p:cxnSp>
+        <p:nvCxnSpPr>
+          <p:cNvPr id="189" name="直接箭头连接符 188">
+            <a:extLst>
+              <a:ext uri="{FF2B5EF4-FFF2-40B4-BE49-F238E27FC236}">
+                <a16:creationId xmlns:a16="http://schemas.microsoft.com/office/drawing/2014/main" id="{B361F4CB-B5B9-1281-C7E9-50A5834325DD}"/>
+              </a:ext>
+            </a:extLst>
+          </p:cNvPr>
+          <p:cNvCxnSpPr>
+            <a:cxnSpLocks/>
+          </p:cNvCxnSpPr>
+          <p:nvPr/>
+        </p:nvCxnSpPr>
+        <p:spPr>
+          <a:xfrm>
+            <a:off x="453224" y="2002332"/>
+            <a:ext cx="201910" cy="0"/>
+          </a:xfrm>
+          <a:prstGeom prst="straightConnector1">
+            <a:avLst/>
+          </a:prstGeom>
+          <a:ln>
+            <a:tailEnd type="triangle"/>
+          </a:ln>
+        </p:spPr>
+        <p:style>
+          <a:lnRef idx="1">
+            <a:schemeClr val="dk1"/>
+          </a:lnRef>
+          <a:fillRef idx="0">
+            <a:schemeClr val="dk1"/>
+          </a:fillRef>
+          <a:effectRef idx="0">
+            <a:schemeClr val="dk1"/>
+          </a:effectRef>
+          <a:fontRef idx="minor">
+            <a:schemeClr val="tx1"/>
+          </a:fontRef>
+        </p:style>
+      </p:cxnSp>
+      <p:cxnSp>
+        <p:nvCxnSpPr>
+          <p:cNvPr id="191" name="直接连接符 190">
+            <a:extLst>
+              <a:ext uri="{FF2B5EF4-FFF2-40B4-BE49-F238E27FC236}">
+                <a16:creationId xmlns:a16="http://schemas.microsoft.com/office/drawing/2014/main" id="{3F667DCB-6A06-B41E-7BA3-D6A86691463B}"/>
+              </a:ext>
+            </a:extLst>
+          </p:cNvPr>
+          <p:cNvCxnSpPr>
+            <a:cxnSpLocks/>
+          </p:cNvCxnSpPr>
+          <p:nvPr/>
+        </p:nvCxnSpPr>
+        <p:spPr>
+          <a:xfrm>
+            <a:off x="457715" y="1258252"/>
+            <a:ext cx="872095" cy="0"/>
+          </a:xfrm>
+          <a:prstGeom prst="line">
+            <a:avLst/>
+          </a:prstGeom>
+        </p:spPr>
+        <p:style>
+          <a:lnRef idx="1">
+            <a:schemeClr val="dk1"/>
+          </a:lnRef>
+          <a:fillRef idx="0">
+            <a:schemeClr val="dk1"/>
+          </a:fillRef>
+          <a:effectRef idx="0">
+            <a:schemeClr val="dk1"/>
+          </a:effectRef>
+          <a:fontRef idx="minor">
+            <a:schemeClr val="tx1"/>
+          </a:fontRef>
+        </p:style>
+      </p:cxnSp>
+      <p:cxnSp>
+        <p:nvCxnSpPr>
+          <p:cNvPr id="195" name="直接连接符 194">
+            <a:extLst>
+              <a:ext uri="{FF2B5EF4-FFF2-40B4-BE49-F238E27FC236}">
+                <a16:creationId xmlns:a16="http://schemas.microsoft.com/office/drawing/2014/main" id="{EC0B36A9-3E06-6F8F-78CD-5F750663AEE8}"/>
+              </a:ext>
+            </a:extLst>
+          </p:cNvPr>
+          <p:cNvCxnSpPr>
+            <a:cxnSpLocks/>
+          </p:cNvCxnSpPr>
+          <p:nvPr/>
+        </p:nvCxnSpPr>
+        <p:spPr>
+          <a:xfrm>
+            <a:off x="457201" y="1257908"/>
+            <a:ext cx="0" cy="743101"/>
+          </a:xfrm>
+          <a:prstGeom prst="line">
+            <a:avLst/>
+          </a:prstGeom>
+        </p:spPr>
+        <p:style>
+          <a:lnRef idx="1">
+            <a:schemeClr val="dk1"/>
+          </a:lnRef>
+          <a:fillRef idx="0">
+            <a:schemeClr val="dk1"/>
+          </a:fillRef>
+          <a:effectRef idx="0">
+            <a:schemeClr val="dk1"/>
+          </a:effectRef>
+          <a:fontRef idx="minor">
+            <a:schemeClr val="tx1"/>
+          </a:fontRef>
+        </p:style>
+      </p:cxnSp>
+      <p:sp>
+        <p:nvSpPr>
+          <p:cNvPr id="201" name="文本框 200">
+            <a:extLst>
+              <a:ext uri="{FF2B5EF4-FFF2-40B4-BE49-F238E27FC236}">
+                <a16:creationId xmlns:a16="http://schemas.microsoft.com/office/drawing/2014/main" id="{7CCEFFCD-FC40-0E48-72E6-2952E2200FD5}"/>
+              </a:ext>
+            </a:extLst>
+          </p:cNvPr>
+          <p:cNvSpPr txBox="1"/>
+          <p:nvPr/>
+        </p:nvSpPr>
+        <p:spPr>
+          <a:xfrm>
+            <a:off x="1959996" y="2077489"/>
+            <a:ext cx="1037218" cy="153888"/>
+          </a:xfrm>
+          <a:prstGeom prst="rect">
+            <a:avLst/>
+          </a:prstGeom>
+          <a:noFill/>
+        </p:spPr>
+        <p:txBody>
+          <a:bodyPr wrap="square" rtlCol="0">
+            <a:spAutoFit/>
+          </a:bodyPr>
+          <a:lstStyle/>
+          <a:p>
+            <a:r>
+              <a:rPr lang="en-US" altLang="zh-CN" sz="400" dirty="0" err="1"/>
+              <a:t>adr</a:t>
+            </a:r>
+            <a:r>
+              <a:rPr lang="en-US" altLang="zh-CN" sz="400" dirty="0"/>
+              <a:t>                 </a:t>
+            </a:r>
+            <a:r>
+              <a:rPr lang="en-US" altLang="zh-CN" sz="400" dirty="0" err="1"/>
+              <a:t>inst</a:t>
+            </a:r>
+            <a:endParaRPr lang="en-US" altLang="zh-CN" sz="400" dirty="0"/>
+          </a:p>
+        </p:txBody>
+      </p:sp>
+      <p:cxnSp>
+        <p:nvCxnSpPr>
+          <p:cNvPr id="202" name="直接箭头连接符 201">
+            <a:extLst>
+              <a:ext uri="{FF2B5EF4-FFF2-40B4-BE49-F238E27FC236}">
+                <a16:creationId xmlns:a16="http://schemas.microsoft.com/office/drawing/2014/main" id="{EF9CE831-31E0-70E3-BBB9-B413F3B53A61}"/>
+              </a:ext>
+            </a:extLst>
+          </p:cNvPr>
+          <p:cNvCxnSpPr>
+            <a:cxnSpLocks/>
+          </p:cNvCxnSpPr>
+          <p:nvPr/>
+        </p:nvCxnSpPr>
+        <p:spPr>
+          <a:xfrm>
+            <a:off x="1846692" y="2156897"/>
+            <a:ext cx="157038" cy="0"/>
+          </a:xfrm>
+          <a:prstGeom prst="straightConnector1">
+            <a:avLst/>
+          </a:prstGeom>
+          <a:ln>
+            <a:tailEnd type="triangle"/>
+          </a:ln>
+        </p:spPr>
+        <p:style>
+          <a:lnRef idx="1">
+            <a:schemeClr val="dk1"/>
+          </a:lnRef>
+          <a:fillRef idx="0">
+            <a:schemeClr val="dk1"/>
+          </a:fillRef>
+          <a:effectRef idx="0">
+            <a:schemeClr val="dk1"/>
+          </a:effectRef>
+          <a:fontRef idx="minor">
+            <a:schemeClr val="tx1"/>
+          </a:fontRef>
+        </p:style>
+      </p:cxnSp>
+      <p:cxnSp>
+        <p:nvCxnSpPr>
+          <p:cNvPr id="205" name="直接箭头连接符 204">
+            <a:extLst>
+              <a:ext uri="{FF2B5EF4-FFF2-40B4-BE49-F238E27FC236}">
+                <a16:creationId xmlns:a16="http://schemas.microsoft.com/office/drawing/2014/main" id="{420C6CD3-4294-2C28-E394-9D705D5551F0}"/>
+              </a:ext>
+            </a:extLst>
+          </p:cNvPr>
+          <p:cNvCxnSpPr>
+            <a:cxnSpLocks/>
+          </p:cNvCxnSpPr>
+          <p:nvPr/>
+        </p:nvCxnSpPr>
+        <p:spPr>
+          <a:xfrm flipH="1">
+            <a:off x="1705071" y="1363511"/>
+            <a:ext cx="177578" cy="0"/>
+          </a:xfrm>
+          <a:prstGeom prst="straightConnector1">
+            <a:avLst/>
+          </a:prstGeom>
+          <a:ln>
+            <a:tailEnd type="triangle"/>
+          </a:ln>
+        </p:spPr>
+        <p:style>
+          <a:lnRef idx="1">
+            <a:schemeClr val="dk1"/>
+          </a:lnRef>
+          <a:fillRef idx="0">
+            <a:schemeClr val="dk1"/>
+          </a:fillRef>
+          <a:effectRef idx="0">
+            <a:schemeClr val="dk1"/>
+          </a:effectRef>
+          <a:fontRef idx="minor">
+            <a:schemeClr val="tx1"/>
+          </a:fontRef>
+        </p:style>
+      </p:cxnSp>
+      <p:cxnSp>
+        <p:nvCxnSpPr>
+          <p:cNvPr id="210" name="直接连接符 209">
+            <a:extLst>
+              <a:ext uri="{FF2B5EF4-FFF2-40B4-BE49-F238E27FC236}">
+                <a16:creationId xmlns:a16="http://schemas.microsoft.com/office/drawing/2014/main" id="{54AC6FCF-C85D-C7CD-49D4-B7DC820FD411}"/>
+              </a:ext>
+            </a:extLst>
+          </p:cNvPr>
+          <p:cNvCxnSpPr>
+            <a:cxnSpLocks/>
+          </p:cNvCxnSpPr>
+          <p:nvPr/>
+        </p:nvCxnSpPr>
+        <p:spPr>
+          <a:xfrm>
+            <a:off x="1885307" y="1360918"/>
+            <a:ext cx="0" cy="797107"/>
+          </a:xfrm>
+          <a:prstGeom prst="line">
+            <a:avLst/>
+          </a:prstGeom>
+        </p:spPr>
+        <p:style>
+          <a:lnRef idx="1">
+            <a:schemeClr val="dk1"/>
+          </a:lnRef>
+          <a:fillRef idx="0">
+            <a:schemeClr val="dk1"/>
+          </a:fillRef>
+          <a:effectRef idx="0">
+            <a:schemeClr val="dk1"/>
+          </a:effectRef>
+          <a:fontRef idx="minor">
+            <a:schemeClr val="tx1"/>
+          </a:fontRef>
+        </p:style>
+      </p:cxnSp>
+      <p:cxnSp>
+        <p:nvCxnSpPr>
+          <p:cNvPr id="224" name="直接连接符 223">
+            <a:extLst>
+              <a:ext uri="{FF2B5EF4-FFF2-40B4-BE49-F238E27FC236}">
+                <a16:creationId xmlns:a16="http://schemas.microsoft.com/office/drawing/2014/main" id="{AF84D689-C4EF-2D07-6E1E-C86DE9905A94}"/>
+              </a:ext>
+            </a:extLst>
+          </p:cNvPr>
+          <p:cNvCxnSpPr>
+            <a:cxnSpLocks/>
+          </p:cNvCxnSpPr>
+          <p:nvPr/>
+        </p:nvCxnSpPr>
+        <p:spPr>
+          <a:xfrm>
+            <a:off x="1241147" y="1667936"/>
+            <a:ext cx="0" cy="329140"/>
+          </a:xfrm>
+          <a:prstGeom prst="line">
+            <a:avLst/>
+          </a:prstGeom>
+        </p:spPr>
+        <p:style>
+          <a:lnRef idx="1">
+            <a:schemeClr val="dk1"/>
+          </a:lnRef>
+          <a:fillRef idx="0">
+            <a:schemeClr val="dk1"/>
+          </a:fillRef>
+          <a:effectRef idx="0">
+            <a:schemeClr val="dk1"/>
+          </a:effectRef>
+          <a:fontRef idx="minor">
+            <a:schemeClr val="tx1"/>
+          </a:fontRef>
+        </p:style>
+      </p:cxnSp>
+      <p:cxnSp>
+        <p:nvCxnSpPr>
+          <p:cNvPr id="229" name="直接箭头连接符 228">
+            <a:extLst>
+              <a:ext uri="{FF2B5EF4-FFF2-40B4-BE49-F238E27FC236}">
+                <a16:creationId xmlns:a16="http://schemas.microsoft.com/office/drawing/2014/main" id="{025B3A7D-271E-B9F0-9544-5CF6BEA9AFF2}"/>
+              </a:ext>
+            </a:extLst>
+          </p:cNvPr>
+          <p:cNvCxnSpPr>
+            <a:cxnSpLocks/>
+          </p:cNvCxnSpPr>
+          <p:nvPr/>
+        </p:nvCxnSpPr>
+        <p:spPr>
+          <a:xfrm>
+            <a:off x="1237093" y="1996032"/>
+            <a:ext cx="157038" cy="0"/>
+          </a:xfrm>
+          <a:prstGeom prst="straightConnector1">
+            <a:avLst/>
+          </a:prstGeom>
+          <a:ln>
+            <a:tailEnd type="triangle"/>
+          </a:ln>
+        </p:spPr>
+        <p:style>
+          <a:lnRef idx="1">
+            <a:schemeClr val="dk1"/>
+          </a:lnRef>
+          <a:fillRef idx="0">
+            <a:schemeClr val="dk1"/>
+          </a:fillRef>
+          <a:effectRef idx="0">
+            <a:schemeClr val="dk1"/>
+          </a:effectRef>
+          <a:fontRef idx="minor">
+            <a:schemeClr val="tx1"/>
+          </a:fontRef>
+        </p:style>
+      </p:cxnSp>
+      <p:sp>
+        <p:nvSpPr>
+          <p:cNvPr id="230" name="文本框 229">
+            <a:extLst>
+              <a:ext uri="{FF2B5EF4-FFF2-40B4-BE49-F238E27FC236}">
+                <a16:creationId xmlns:a16="http://schemas.microsoft.com/office/drawing/2014/main" id="{6FBF5655-3350-86AE-744F-7C37D9D24D70}"/>
+              </a:ext>
+            </a:extLst>
+          </p:cNvPr>
+          <p:cNvSpPr txBox="1"/>
+          <p:nvPr/>
+        </p:nvSpPr>
+        <p:spPr>
+          <a:xfrm>
+            <a:off x="1092199" y="1552599"/>
+            <a:ext cx="338668" cy="153888"/>
+          </a:xfrm>
+          <a:prstGeom prst="rect">
+            <a:avLst/>
+          </a:prstGeom>
+          <a:noFill/>
+        </p:spPr>
+        <p:txBody>
+          <a:bodyPr wrap="square" rtlCol="0">
+            <a:spAutoFit/>
+          </a:bodyPr>
+          <a:lstStyle/>
+          <a:p>
+            <a:r>
+              <a:rPr lang="en-US" altLang="zh-CN" sz="400" dirty="0"/>
+              <a:t>reset</a:t>
+            </a:r>
+            <a:endParaRPr lang="zh-CN" altLang="en-US" sz="400" dirty="0"/>
+          </a:p>
+        </p:txBody>
+      </p:sp>
+      <p:cxnSp>
+        <p:nvCxnSpPr>
+          <p:cNvPr id="231" name="直接连接符 230">
+            <a:extLst>
+              <a:ext uri="{FF2B5EF4-FFF2-40B4-BE49-F238E27FC236}">
+                <a16:creationId xmlns:a16="http://schemas.microsoft.com/office/drawing/2014/main" id="{CE38B0B6-1A87-359D-3316-5D9EE8165911}"/>
+              </a:ext>
+            </a:extLst>
+          </p:cNvPr>
+          <p:cNvCxnSpPr>
+            <a:cxnSpLocks/>
+          </p:cNvCxnSpPr>
+          <p:nvPr/>
+        </p:nvCxnSpPr>
+        <p:spPr>
+          <a:xfrm>
+            <a:off x="7122084" y="518863"/>
+            <a:ext cx="0" cy="950391"/>
+          </a:xfrm>
+          <a:prstGeom prst="line">
+            <a:avLst/>
+          </a:prstGeom>
+        </p:spPr>
+        <p:style>
+          <a:lnRef idx="1">
+            <a:schemeClr val="dk1"/>
+          </a:lnRef>
+          <a:fillRef idx="0">
+            <a:schemeClr val="dk1"/>
+          </a:fillRef>
+          <a:effectRef idx="0">
+            <a:schemeClr val="dk1"/>
+          </a:effectRef>
+          <a:fontRef idx="minor">
+            <a:schemeClr val="tx1"/>
+          </a:fontRef>
+        </p:style>
+      </p:cxnSp>
+      <p:cxnSp>
+        <p:nvCxnSpPr>
+          <p:cNvPr id="232" name="直接连接符 231">
+            <a:extLst>
+              <a:ext uri="{FF2B5EF4-FFF2-40B4-BE49-F238E27FC236}">
+                <a16:creationId xmlns:a16="http://schemas.microsoft.com/office/drawing/2014/main" id="{591A2359-8C2A-DE0A-6C7D-DB47AF6CA1C9}"/>
+              </a:ext>
+            </a:extLst>
+          </p:cNvPr>
+          <p:cNvCxnSpPr>
+            <a:cxnSpLocks/>
+          </p:cNvCxnSpPr>
+          <p:nvPr/>
+        </p:nvCxnSpPr>
+        <p:spPr>
+          <a:xfrm>
+            <a:off x="317501" y="519882"/>
+            <a:ext cx="6809232" cy="0"/>
+          </a:xfrm>
+          <a:prstGeom prst="line">
+            <a:avLst/>
+          </a:prstGeom>
+        </p:spPr>
+        <p:style>
+          <a:lnRef idx="1">
+            <a:schemeClr val="dk1"/>
+          </a:lnRef>
+          <a:fillRef idx="0">
+            <a:schemeClr val="dk1"/>
+          </a:fillRef>
+          <a:effectRef idx="0">
+            <a:schemeClr val="dk1"/>
+          </a:effectRef>
+          <a:fontRef idx="minor">
+            <a:schemeClr val="tx1"/>
+          </a:fontRef>
+        </p:style>
+      </p:cxnSp>
+      <p:cxnSp>
+        <p:nvCxnSpPr>
+          <p:cNvPr id="234" name="直接连接符 233">
+            <a:extLst>
+              <a:ext uri="{FF2B5EF4-FFF2-40B4-BE49-F238E27FC236}">
+                <a16:creationId xmlns:a16="http://schemas.microsoft.com/office/drawing/2014/main" id="{7DEC8D2E-5517-148C-4B5F-DE9CDD2F1FAA}"/>
+              </a:ext>
+            </a:extLst>
+          </p:cNvPr>
+          <p:cNvCxnSpPr>
+            <a:cxnSpLocks/>
+          </p:cNvCxnSpPr>
+          <p:nvPr/>
+        </p:nvCxnSpPr>
+        <p:spPr>
+          <a:xfrm>
+            <a:off x="320041" y="521686"/>
+            <a:ext cx="0" cy="1608466"/>
+          </a:xfrm>
+          <a:prstGeom prst="line">
+            <a:avLst/>
+          </a:prstGeom>
+        </p:spPr>
+        <p:style>
+          <a:lnRef idx="1">
+            <a:schemeClr val="dk1"/>
+          </a:lnRef>
+          <a:fillRef idx="0">
+            <a:schemeClr val="dk1"/>
+          </a:fillRef>
+          <a:effectRef idx="0">
+            <a:schemeClr val="dk1"/>
+          </a:effectRef>
+          <a:fontRef idx="minor">
+            <a:schemeClr val="tx1"/>
+          </a:fontRef>
+        </p:style>
+      </p:cxnSp>
+      <p:cxnSp>
+        <p:nvCxnSpPr>
+          <p:cNvPr id="236" name="直接箭头连接符 235">
+            <a:extLst>
+              <a:ext uri="{FF2B5EF4-FFF2-40B4-BE49-F238E27FC236}">
+                <a16:creationId xmlns:a16="http://schemas.microsoft.com/office/drawing/2014/main" id="{0978DE76-46B8-94D1-13A2-5FACAE729D8B}"/>
+              </a:ext>
+            </a:extLst>
+          </p:cNvPr>
+          <p:cNvCxnSpPr>
+            <a:cxnSpLocks/>
+          </p:cNvCxnSpPr>
+          <p:nvPr/>
+        </p:nvCxnSpPr>
+        <p:spPr>
+          <a:xfrm>
+            <a:off x="321734" y="2127611"/>
+            <a:ext cx="333401" cy="0"/>
+          </a:xfrm>
+          <a:prstGeom prst="straightConnector1">
+            <a:avLst/>
+          </a:prstGeom>
+          <a:ln>
+            <a:tailEnd type="triangle"/>
+          </a:ln>
+        </p:spPr>
+        <p:style>
+          <a:lnRef idx="1">
+            <a:schemeClr val="dk1"/>
+          </a:lnRef>
+          <a:fillRef idx="0">
+            <a:schemeClr val="dk1"/>
+          </a:fillRef>
+          <a:effectRef idx="0">
+            <a:schemeClr val="dk1"/>
+          </a:effectRef>
+          <a:fontRef idx="minor">
+            <a:schemeClr val="tx1"/>
+          </a:fontRef>
+        </p:style>
+      </p:cxnSp>
+      <p:cxnSp>
+        <p:nvCxnSpPr>
+          <p:cNvPr id="239" name="直接连接符 238">
+            <a:extLst>
+              <a:ext uri="{FF2B5EF4-FFF2-40B4-BE49-F238E27FC236}">
+                <a16:creationId xmlns:a16="http://schemas.microsoft.com/office/drawing/2014/main" id="{00EEA20C-F1F3-7D8B-0CEC-21642F6B5508}"/>
+              </a:ext>
+            </a:extLst>
+          </p:cNvPr>
+          <p:cNvCxnSpPr>
+            <a:cxnSpLocks/>
+          </p:cNvCxnSpPr>
+          <p:nvPr/>
+        </p:nvCxnSpPr>
+        <p:spPr>
+          <a:xfrm>
+            <a:off x="2415444" y="2155364"/>
+            <a:ext cx="350652" cy="0"/>
+          </a:xfrm>
+          <a:prstGeom prst="line">
+            <a:avLst/>
+          </a:prstGeom>
+        </p:spPr>
+        <p:style>
+          <a:lnRef idx="1">
+            <a:schemeClr val="dk1"/>
+          </a:lnRef>
+          <a:fillRef idx="0">
+            <a:schemeClr val="dk1"/>
+          </a:fillRef>
+          <a:effectRef idx="0">
+            <a:schemeClr val="dk1"/>
+          </a:effectRef>
+          <a:fontRef idx="minor">
+            <a:schemeClr val="tx1"/>
+          </a:fontRef>
+        </p:style>
+      </p:cxnSp>
+      <p:cxnSp>
+        <p:nvCxnSpPr>
+          <p:cNvPr id="244" name="直接连接符 243">
+            <a:extLst>
+              <a:ext uri="{FF2B5EF4-FFF2-40B4-BE49-F238E27FC236}">
+                <a16:creationId xmlns:a16="http://schemas.microsoft.com/office/drawing/2014/main" id="{9E4EC77F-C4B7-23A9-591D-C4B88B8EF49A}"/>
+              </a:ext>
+            </a:extLst>
+          </p:cNvPr>
+          <p:cNvCxnSpPr>
+            <a:cxnSpLocks/>
+          </p:cNvCxnSpPr>
+          <p:nvPr/>
+        </p:nvCxnSpPr>
+        <p:spPr>
+          <a:xfrm>
+            <a:off x="2766096" y="2157767"/>
+            <a:ext cx="0" cy="788634"/>
+          </a:xfrm>
+          <a:prstGeom prst="line">
+            <a:avLst/>
+          </a:prstGeom>
+        </p:spPr>
+        <p:style>
+          <a:lnRef idx="1">
+            <a:schemeClr val="dk1"/>
+          </a:lnRef>
+          <a:fillRef idx="0">
+            <a:schemeClr val="dk1"/>
+          </a:fillRef>
+          <a:effectRef idx="0">
+            <a:schemeClr val="dk1"/>
+          </a:effectRef>
+          <a:fontRef idx="minor">
+            <a:schemeClr val="tx1"/>
+          </a:fontRef>
+        </p:style>
+      </p:cxnSp>
+      <p:cxnSp>
+        <p:nvCxnSpPr>
+          <p:cNvPr id="255" name="直接连接符 254">
+            <a:extLst>
+              <a:ext uri="{FF2B5EF4-FFF2-40B4-BE49-F238E27FC236}">
+                <a16:creationId xmlns:a16="http://schemas.microsoft.com/office/drawing/2014/main" id="{014F4EB3-DD14-6000-64ED-73E6535DCEFF}"/>
+              </a:ext>
+            </a:extLst>
+          </p:cNvPr>
+          <p:cNvCxnSpPr>
+            <a:cxnSpLocks/>
+          </p:cNvCxnSpPr>
+          <p:nvPr/>
+        </p:nvCxnSpPr>
+        <p:spPr>
+          <a:xfrm>
+            <a:off x="1156247" y="2239345"/>
+            <a:ext cx="152400" cy="0"/>
+          </a:xfrm>
+          <a:prstGeom prst="line">
+            <a:avLst/>
+          </a:prstGeom>
+        </p:spPr>
+        <p:style>
+          <a:lnRef idx="1">
+            <a:schemeClr val="dk1"/>
+          </a:lnRef>
+          <a:fillRef idx="0">
+            <a:schemeClr val="dk1"/>
+          </a:fillRef>
+          <a:effectRef idx="0">
+            <a:schemeClr val="dk1"/>
+          </a:effectRef>
+          <a:fontRef idx="minor">
+            <a:schemeClr val="tx1"/>
+          </a:fontRef>
+        </p:style>
+      </p:cxnSp>
+      <p:cxnSp>
+        <p:nvCxnSpPr>
+          <p:cNvPr id="258" name="直接连接符 257">
+            <a:extLst>
+              <a:ext uri="{FF2B5EF4-FFF2-40B4-BE49-F238E27FC236}">
+                <a16:creationId xmlns:a16="http://schemas.microsoft.com/office/drawing/2014/main" id="{850A40E8-CB1F-1073-22ED-0E845EFA9774}"/>
+              </a:ext>
+            </a:extLst>
+          </p:cNvPr>
+          <p:cNvCxnSpPr>
+            <a:cxnSpLocks/>
+          </p:cNvCxnSpPr>
+          <p:nvPr/>
+        </p:nvCxnSpPr>
+        <p:spPr>
+          <a:xfrm>
+            <a:off x="2628901" y="1720922"/>
+            <a:ext cx="563907" cy="0"/>
+          </a:xfrm>
+          <a:prstGeom prst="line">
+            <a:avLst/>
+          </a:prstGeom>
+        </p:spPr>
+        <p:style>
+          <a:lnRef idx="1">
+            <a:schemeClr val="dk1"/>
+          </a:lnRef>
+          <a:fillRef idx="0">
+            <a:schemeClr val="dk1"/>
+          </a:fillRef>
+          <a:effectRef idx="0">
+            <a:schemeClr val="dk1"/>
+          </a:effectRef>
+          <a:fontRef idx="minor">
+            <a:schemeClr val="tx1"/>
+          </a:fontRef>
+        </p:style>
+      </p:cxnSp>
+      <p:cxnSp>
+        <p:nvCxnSpPr>
+          <p:cNvPr id="260" name="直接连接符 259">
+            <a:extLst>
+              <a:ext uri="{FF2B5EF4-FFF2-40B4-BE49-F238E27FC236}">
+                <a16:creationId xmlns:a16="http://schemas.microsoft.com/office/drawing/2014/main" id="{EAEF84AB-0758-AF7A-EB1A-4F770A3B6369}"/>
+              </a:ext>
+            </a:extLst>
+          </p:cNvPr>
+          <p:cNvCxnSpPr>
+            <a:cxnSpLocks/>
+          </p:cNvCxnSpPr>
+          <p:nvPr/>
+        </p:nvCxnSpPr>
+        <p:spPr>
+          <a:xfrm>
+            <a:off x="2633134" y="1720920"/>
+            <a:ext cx="0" cy="856141"/>
+          </a:xfrm>
+          <a:prstGeom prst="line">
+            <a:avLst/>
+          </a:prstGeom>
+        </p:spPr>
+        <p:style>
+          <a:lnRef idx="1">
+            <a:schemeClr val="dk1"/>
+          </a:lnRef>
+          <a:fillRef idx="0">
+            <a:schemeClr val="dk1"/>
+          </a:fillRef>
+          <a:effectRef idx="0">
+            <a:schemeClr val="dk1"/>
+          </a:effectRef>
+          <a:fontRef idx="minor">
+            <a:schemeClr val="tx1"/>
+          </a:fontRef>
+        </p:style>
+      </p:cxnSp>
+      <p:cxnSp>
+        <p:nvCxnSpPr>
+          <p:cNvPr id="263" name="直接连接符 262">
+            <a:extLst>
+              <a:ext uri="{FF2B5EF4-FFF2-40B4-BE49-F238E27FC236}">
+                <a16:creationId xmlns:a16="http://schemas.microsoft.com/office/drawing/2014/main" id="{C7323CF4-321F-FFC2-A22B-C957F73C741B}"/>
+              </a:ext>
+            </a:extLst>
+          </p:cNvPr>
+          <p:cNvCxnSpPr>
+            <a:cxnSpLocks/>
+          </p:cNvCxnSpPr>
+          <p:nvPr/>
+        </p:nvCxnSpPr>
+        <p:spPr>
+          <a:xfrm>
+            <a:off x="1303867" y="2241913"/>
+            <a:ext cx="0" cy="335149"/>
+          </a:xfrm>
+          <a:prstGeom prst="line">
+            <a:avLst/>
+          </a:prstGeom>
+        </p:spPr>
+        <p:style>
+          <a:lnRef idx="1">
+            <a:schemeClr val="dk1"/>
+          </a:lnRef>
+          <a:fillRef idx="0">
+            <a:schemeClr val="dk1"/>
+          </a:fillRef>
+          <a:effectRef idx="0">
+            <a:schemeClr val="dk1"/>
+          </a:effectRef>
+          <a:fontRef idx="minor">
+            <a:schemeClr val="tx1"/>
+          </a:fontRef>
+        </p:style>
+      </p:cxnSp>
+      <p:cxnSp>
+        <p:nvCxnSpPr>
+          <p:cNvPr id="266" name="直接连接符 265">
+            <a:extLst>
+              <a:ext uri="{FF2B5EF4-FFF2-40B4-BE49-F238E27FC236}">
+                <a16:creationId xmlns:a16="http://schemas.microsoft.com/office/drawing/2014/main" id="{74F9D92B-9A71-8B5D-3F43-02B3F536A732}"/>
+              </a:ext>
+            </a:extLst>
+          </p:cNvPr>
+          <p:cNvCxnSpPr>
+            <a:cxnSpLocks/>
+          </p:cNvCxnSpPr>
+          <p:nvPr/>
+        </p:nvCxnSpPr>
+        <p:spPr>
+          <a:xfrm>
+            <a:off x="1308100" y="2577061"/>
+            <a:ext cx="1325576" cy="0"/>
+          </a:xfrm>
+          <a:prstGeom prst="line">
+            <a:avLst/>
+          </a:prstGeom>
+        </p:spPr>
+        <p:style>
+          <a:lnRef idx="1">
+            <a:schemeClr val="dk1"/>
+          </a:lnRef>
+          <a:fillRef idx="0">
+            <a:schemeClr val="dk1"/>
+          </a:fillRef>
+          <a:effectRef idx="0">
+            <a:schemeClr val="dk1"/>
+          </a:effectRef>
+          <a:fontRef idx="minor">
+            <a:schemeClr val="tx1"/>
+          </a:fontRef>
+        </p:style>
+      </p:cxnSp>
+      <p:cxnSp>
+        <p:nvCxnSpPr>
+          <p:cNvPr id="275" name="直接连接符 274">
+            <a:extLst>
+              <a:ext uri="{FF2B5EF4-FFF2-40B4-BE49-F238E27FC236}">
+                <a16:creationId xmlns:a16="http://schemas.microsoft.com/office/drawing/2014/main" id="{2C5BA61C-AC34-0106-5005-EF11907CD5A7}"/>
+              </a:ext>
+            </a:extLst>
+          </p:cNvPr>
+          <p:cNvCxnSpPr>
+            <a:cxnSpLocks/>
+          </p:cNvCxnSpPr>
+          <p:nvPr/>
+        </p:nvCxnSpPr>
+        <p:spPr>
+          <a:xfrm>
+            <a:off x="4143950" y="2275289"/>
+            <a:ext cx="0" cy="391712"/>
+          </a:xfrm>
+          <a:prstGeom prst="line">
+            <a:avLst/>
+          </a:prstGeom>
+        </p:spPr>
+        <p:style>
+          <a:lnRef idx="1">
+            <a:schemeClr val="dk1"/>
+          </a:lnRef>
+          <a:fillRef idx="0">
+            <a:schemeClr val="dk1"/>
+          </a:fillRef>
+          <a:effectRef idx="0">
+            <a:schemeClr val="dk1"/>
+          </a:effectRef>
+          <a:fontRef idx="minor">
+            <a:schemeClr val="tx1"/>
+          </a:fontRef>
+        </p:style>
+      </p:cxnSp>
+      <p:cxnSp>
+        <p:nvCxnSpPr>
+          <p:cNvPr id="277" name="直接箭头连接符 276">
+            <a:extLst>
+              <a:ext uri="{FF2B5EF4-FFF2-40B4-BE49-F238E27FC236}">
+                <a16:creationId xmlns:a16="http://schemas.microsoft.com/office/drawing/2014/main" id="{FF3A9D09-293C-92C2-9C91-AF648097DE60}"/>
+              </a:ext>
+            </a:extLst>
+          </p:cNvPr>
+          <p:cNvCxnSpPr>
+            <a:cxnSpLocks/>
+          </p:cNvCxnSpPr>
+          <p:nvPr/>
+        </p:nvCxnSpPr>
+        <p:spPr>
+          <a:xfrm>
+            <a:off x="321734" y="2242624"/>
+            <a:ext cx="333401" cy="0"/>
+          </a:xfrm>
+          <a:prstGeom prst="straightConnector1">
+            <a:avLst/>
+          </a:prstGeom>
+          <a:ln>
+            <a:tailEnd type="triangle"/>
+          </a:ln>
+        </p:spPr>
+        <p:style>
+          <a:lnRef idx="1">
+            <a:schemeClr val="dk1"/>
+          </a:lnRef>
+          <a:fillRef idx="0">
+            <a:schemeClr val="dk1"/>
+          </a:fillRef>
+          <a:effectRef idx="0">
+            <a:schemeClr val="dk1"/>
+          </a:effectRef>
+          <a:fontRef idx="minor">
+            <a:schemeClr val="tx1"/>
+          </a:fontRef>
+        </p:style>
+      </p:cxnSp>
+      <p:cxnSp>
+        <p:nvCxnSpPr>
+          <p:cNvPr id="278" name="直接连接符 277">
+            <a:extLst>
+              <a:ext uri="{FF2B5EF4-FFF2-40B4-BE49-F238E27FC236}">
+                <a16:creationId xmlns:a16="http://schemas.microsoft.com/office/drawing/2014/main" id="{6891E1F1-AC15-FFBE-20D0-B0A5DE0ACF26}"/>
+              </a:ext>
+            </a:extLst>
+          </p:cNvPr>
+          <p:cNvCxnSpPr>
+            <a:cxnSpLocks/>
+          </p:cNvCxnSpPr>
+          <p:nvPr/>
+        </p:nvCxnSpPr>
+        <p:spPr>
+          <a:xfrm>
+            <a:off x="317501" y="2659486"/>
+            <a:ext cx="3830683" cy="0"/>
+          </a:xfrm>
+          <a:prstGeom prst="line">
+            <a:avLst/>
+          </a:prstGeom>
+        </p:spPr>
+        <p:style>
+          <a:lnRef idx="1">
+            <a:schemeClr val="dk1"/>
+          </a:lnRef>
+          <a:fillRef idx="0">
+            <a:schemeClr val="dk1"/>
+          </a:fillRef>
+          <a:effectRef idx="0">
+            <a:schemeClr val="dk1"/>
+          </a:effectRef>
+          <a:fontRef idx="minor">
+            <a:schemeClr val="tx1"/>
+          </a:fontRef>
+        </p:style>
+      </p:cxnSp>
+      <p:cxnSp>
+        <p:nvCxnSpPr>
+          <p:cNvPr id="280" name="直接连接符 279">
+            <a:extLst>
+              <a:ext uri="{FF2B5EF4-FFF2-40B4-BE49-F238E27FC236}">
+                <a16:creationId xmlns:a16="http://schemas.microsoft.com/office/drawing/2014/main" id="{32E37EF9-D8BF-9B55-42B7-3515B45173B5}"/>
+              </a:ext>
+            </a:extLst>
+          </p:cNvPr>
+          <p:cNvCxnSpPr>
+            <a:cxnSpLocks/>
+          </p:cNvCxnSpPr>
+          <p:nvPr/>
+        </p:nvCxnSpPr>
+        <p:spPr>
+          <a:xfrm>
+            <a:off x="321734" y="2239900"/>
+            <a:ext cx="0" cy="416941"/>
+          </a:xfrm>
+          <a:prstGeom prst="line">
+            <a:avLst/>
+          </a:prstGeom>
+        </p:spPr>
+        <p:style>
+          <a:lnRef idx="1">
+            <a:schemeClr val="dk1"/>
+          </a:lnRef>
+          <a:fillRef idx="0">
+            <a:schemeClr val="dk1"/>
+          </a:fillRef>
+          <a:effectRef idx="0">
+            <a:schemeClr val="dk1"/>
+          </a:effectRef>
+          <a:fontRef idx="minor">
+            <a:schemeClr val="tx1"/>
+          </a:fontRef>
+        </p:style>
+      </p:cxnSp>
+      <p:sp>
+        <p:nvSpPr>
+          <p:cNvPr id="288" name="矩形 287">
+            <a:extLst>
+              <a:ext uri="{FF2B5EF4-FFF2-40B4-BE49-F238E27FC236}">
+                <a16:creationId xmlns:a16="http://schemas.microsoft.com/office/drawing/2014/main" id="{69031B54-47F6-30D7-812E-12814E308647}"/>
+              </a:ext>
+            </a:extLst>
+          </p:cNvPr>
+          <p:cNvSpPr/>
+          <p:nvPr/>
+        </p:nvSpPr>
+        <p:spPr>
+          <a:xfrm>
+            <a:off x="6491478" y="2484966"/>
+            <a:ext cx="381712" cy="630765"/>
+          </a:xfrm>
+          <a:prstGeom prst="rect">
+            <a:avLst/>
+          </a:prstGeom>
+        </p:spPr>
+        <p:style>
+          <a:lnRef idx="2">
+            <a:schemeClr val="dk1"/>
+          </a:lnRef>
+          <a:fillRef idx="1">
+            <a:schemeClr val="lt1"/>
+          </a:fillRef>
+          <a:effectRef idx="0">
+            <a:schemeClr val="dk1"/>
+          </a:effectRef>
+          <a:fontRef idx="minor">
+            <a:schemeClr val="dk1"/>
+          </a:fontRef>
+        </p:style>
+        <p:txBody>
+          <a:bodyPr rtlCol="0" anchor="ctr"/>
+          <a:lstStyle/>
+          <a:p>
+            <a:pPr algn="ctr"/>
+            <a:endParaRPr lang="zh-CN" altLang="en-US"/>
+          </a:p>
+        </p:txBody>
+      </p:sp>
+      <p:sp>
+        <p:nvSpPr>
+          <p:cNvPr id="289" name="文本框 288">
+            <a:extLst>
+              <a:ext uri="{FF2B5EF4-FFF2-40B4-BE49-F238E27FC236}">
+                <a16:creationId xmlns:a16="http://schemas.microsoft.com/office/drawing/2014/main" id="{38906E99-E171-1614-4473-DB4411F9512A}"/>
+              </a:ext>
+            </a:extLst>
+          </p:cNvPr>
+          <p:cNvSpPr txBox="1"/>
+          <p:nvPr/>
+        </p:nvSpPr>
+        <p:spPr>
+          <a:xfrm>
+            <a:off x="6483013" y="2315099"/>
+            <a:ext cx="476169" cy="200055"/>
+          </a:xfrm>
+          <a:prstGeom prst="rect">
+            <a:avLst/>
+          </a:prstGeom>
+          <a:noFill/>
+        </p:spPr>
+        <p:txBody>
+          <a:bodyPr wrap="square" rtlCol="0">
+            <a:spAutoFit/>
+          </a:bodyPr>
+          <a:lstStyle/>
+          <a:p>
+            <a:r>
+              <a:rPr lang="en-US" altLang="zh-CN" sz="700" dirty="0"/>
+              <a:t>DRAM</a:t>
+            </a:r>
+            <a:endParaRPr lang="zh-CN" altLang="en-US" sz="700" dirty="0"/>
+          </a:p>
+        </p:txBody>
+      </p:sp>
+      <p:sp>
+        <p:nvSpPr>
+          <p:cNvPr id="2" name="文本框 1">
+            <a:extLst>
+              <a:ext uri="{FF2B5EF4-FFF2-40B4-BE49-F238E27FC236}">
+                <a16:creationId xmlns:a16="http://schemas.microsoft.com/office/drawing/2014/main" id="{87FF763A-9E0C-0CC4-A356-046153851741}"/>
+              </a:ext>
+            </a:extLst>
+          </p:cNvPr>
+          <p:cNvSpPr txBox="1"/>
+          <p:nvPr/>
+        </p:nvSpPr>
+        <p:spPr>
+          <a:xfrm>
+            <a:off x="6442602" y="2569865"/>
+            <a:ext cx="659958" cy="461665"/>
+          </a:xfrm>
+          <a:prstGeom prst="rect">
+            <a:avLst/>
+          </a:prstGeom>
+          <a:noFill/>
+        </p:spPr>
+        <p:txBody>
+          <a:bodyPr wrap="square" rtlCol="0">
+            <a:spAutoFit/>
+          </a:bodyPr>
+          <a:lstStyle/>
+          <a:p>
+            <a:r>
+              <a:rPr lang="en-US" altLang="zh-CN" sz="400" dirty="0" err="1"/>
+              <a:t>adr</a:t>
+            </a:r>
+            <a:endParaRPr lang="en-US" altLang="zh-CN" sz="400" dirty="0"/>
+          </a:p>
+          <a:p>
+            <a:endParaRPr lang="en-US" altLang="zh-CN" sz="400" dirty="0"/>
+          </a:p>
+          <a:p>
+            <a:endParaRPr lang="en-US" altLang="zh-CN" sz="400" dirty="0"/>
+          </a:p>
+          <a:p>
+            <a:endParaRPr lang="en-US" altLang="zh-CN" sz="400" dirty="0"/>
+          </a:p>
+          <a:p>
+            <a:endParaRPr lang="en-US" altLang="zh-CN" sz="400" dirty="0"/>
+          </a:p>
+          <a:p>
+            <a:r>
+              <a:rPr lang="en-US" altLang="zh-CN" sz="400" dirty="0" err="1"/>
+              <a:t>wdin</a:t>
+            </a:r>
+            <a:endParaRPr lang="zh-CN" altLang="en-US" sz="400" dirty="0"/>
+          </a:p>
+        </p:txBody>
+      </p:sp>
+      <p:sp>
+        <p:nvSpPr>
+          <p:cNvPr id="3" name="文本框 2">
+            <a:extLst>
+              <a:ext uri="{FF2B5EF4-FFF2-40B4-BE49-F238E27FC236}">
+                <a16:creationId xmlns:a16="http://schemas.microsoft.com/office/drawing/2014/main" id="{70F2D325-9DC4-C8A7-516D-FB9F3EB02E0F}"/>
+              </a:ext>
+            </a:extLst>
+          </p:cNvPr>
+          <p:cNvSpPr txBox="1"/>
+          <p:nvPr/>
+        </p:nvSpPr>
+        <p:spPr>
+          <a:xfrm>
+            <a:off x="6700213" y="2720709"/>
+            <a:ext cx="1092731" cy="153888"/>
+          </a:xfrm>
+          <a:prstGeom prst="rect">
+            <a:avLst/>
+          </a:prstGeom>
+          <a:noFill/>
+        </p:spPr>
+        <p:txBody>
+          <a:bodyPr wrap="square" rtlCol="0">
+            <a:spAutoFit/>
+          </a:bodyPr>
+          <a:lstStyle/>
+          <a:p>
+            <a:r>
+              <a:rPr lang="en-US" altLang="zh-CN" sz="400" dirty="0" err="1"/>
+              <a:t>rd</a:t>
+            </a:r>
+            <a:endParaRPr lang="zh-CN" altLang="en-US" sz="400" dirty="0"/>
+          </a:p>
+        </p:txBody>
+      </p:sp>
+      <p:cxnSp>
+        <p:nvCxnSpPr>
+          <p:cNvPr id="6" name="直接连接符 5">
+            <a:extLst>
+              <a:ext uri="{FF2B5EF4-FFF2-40B4-BE49-F238E27FC236}">
+                <a16:creationId xmlns:a16="http://schemas.microsoft.com/office/drawing/2014/main" id="{A2B8E6D0-550B-F414-87F5-6B2C27CB67D2}"/>
+              </a:ext>
+            </a:extLst>
+          </p:cNvPr>
+          <p:cNvCxnSpPr>
+            <a:cxnSpLocks/>
+          </p:cNvCxnSpPr>
+          <p:nvPr/>
+        </p:nvCxnSpPr>
+        <p:spPr>
+          <a:xfrm>
+            <a:off x="1888076" y="721827"/>
+            <a:ext cx="0" cy="384509"/>
+          </a:xfrm>
+          <a:prstGeom prst="line">
+            <a:avLst/>
+          </a:prstGeom>
+        </p:spPr>
+        <p:style>
+          <a:lnRef idx="1">
+            <a:schemeClr val="dk1"/>
+          </a:lnRef>
+          <a:fillRef idx="0">
+            <a:schemeClr val="dk1"/>
+          </a:fillRef>
+          <a:effectRef idx="0">
+            <a:schemeClr val="dk1"/>
+          </a:effectRef>
+          <a:fontRef idx="minor">
+            <a:schemeClr val="tx1"/>
+          </a:fontRef>
+        </p:style>
+      </p:cxnSp>
+      <p:cxnSp>
+        <p:nvCxnSpPr>
+          <p:cNvPr id="8" name="直接箭头连接符 7">
+            <a:extLst>
+              <a:ext uri="{FF2B5EF4-FFF2-40B4-BE49-F238E27FC236}">
+                <a16:creationId xmlns:a16="http://schemas.microsoft.com/office/drawing/2014/main" id="{CFF7FD15-F062-B32D-7A2A-34BE143CBB90}"/>
+              </a:ext>
+            </a:extLst>
+          </p:cNvPr>
+          <p:cNvCxnSpPr>
+            <a:cxnSpLocks/>
+          </p:cNvCxnSpPr>
+          <p:nvPr/>
+        </p:nvCxnSpPr>
+        <p:spPr>
+          <a:xfrm flipH="1">
+            <a:off x="1707003" y="1105009"/>
+            <a:ext cx="177578" cy="0"/>
+          </a:xfrm>
+          <a:prstGeom prst="straightConnector1">
+            <a:avLst/>
+          </a:prstGeom>
+          <a:ln>
+            <a:tailEnd type="triangle"/>
+          </a:ln>
+        </p:spPr>
+        <p:style>
+          <a:lnRef idx="1">
+            <a:schemeClr val="dk1"/>
+          </a:lnRef>
+          <a:fillRef idx="0">
+            <a:schemeClr val="dk1"/>
+          </a:fillRef>
+          <a:effectRef idx="0">
+            <a:schemeClr val="dk1"/>
+          </a:effectRef>
+          <a:fontRef idx="minor">
+            <a:schemeClr val="tx1"/>
+          </a:fontRef>
+        </p:style>
+      </p:cxnSp>
+      <p:cxnSp>
+        <p:nvCxnSpPr>
+          <p:cNvPr id="11" name="直接连接符 10">
+            <a:extLst>
+              <a:ext uri="{FF2B5EF4-FFF2-40B4-BE49-F238E27FC236}">
+                <a16:creationId xmlns:a16="http://schemas.microsoft.com/office/drawing/2014/main" id="{196D0E6A-D84E-44F2-23C5-29DAD4994CC0}"/>
+              </a:ext>
+            </a:extLst>
+          </p:cNvPr>
+          <p:cNvCxnSpPr>
+            <a:cxnSpLocks/>
+          </p:cNvCxnSpPr>
+          <p:nvPr/>
+        </p:nvCxnSpPr>
+        <p:spPr>
+          <a:xfrm flipV="1">
+            <a:off x="6300280" y="2223516"/>
+            <a:ext cx="855403" cy="5071"/>
+          </a:xfrm>
+          <a:prstGeom prst="line">
+            <a:avLst/>
+          </a:prstGeom>
+        </p:spPr>
+        <p:style>
+          <a:lnRef idx="1">
+            <a:schemeClr val="dk1"/>
+          </a:lnRef>
+          <a:fillRef idx="0">
+            <a:schemeClr val="dk1"/>
+          </a:fillRef>
+          <a:effectRef idx="0">
+            <a:schemeClr val="dk1"/>
+          </a:effectRef>
+          <a:fontRef idx="minor">
+            <a:schemeClr val="tx1"/>
+          </a:fontRef>
+        </p:style>
+      </p:cxnSp>
+      <p:cxnSp>
+        <p:nvCxnSpPr>
+          <p:cNvPr id="13" name="直接连接符 12">
+            <a:extLst>
+              <a:ext uri="{FF2B5EF4-FFF2-40B4-BE49-F238E27FC236}">
+                <a16:creationId xmlns:a16="http://schemas.microsoft.com/office/drawing/2014/main" id="{227EB750-897D-F97C-046F-9842A5FF9310}"/>
+              </a:ext>
+            </a:extLst>
+          </p:cNvPr>
+          <p:cNvCxnSpPr>
+            <a:cxnSpLocks/>
+          </p:cNvCxnSpPr>
+          <p:nvPr/>
+        </p:nvCxnSpPr>
+        <p:spPr>
+          <a:xfrm>
+            <a:off x="6303173" y="2225693"/>
+            <a:ext cx="0" cy="424911"/>
+          </a:xfrm>
+          <a:prstGeom prst="line">
+            <a:avLst/>
+          </a:prstGeom>
+        </p:spPr>
+        <p:style>
+          <a:lnRef idx="1">
+            <a:schemeClr val="dk1"/>
+          </a:lnRef>
+          <a:fillRef idx="0">
+            <a:schemeClr val="dk1"/>
+          </a:fillRef>
+          <a:effectRef idx="0">
+            <a:schemeClr val="dk1"/>
+          </a:effectRef>
+          <a:fontRef idx="minor">
+            <a:schemeClr val="tx1"/>
+          </a:fontRef>
+        </p:style>
+      </p:cxnSp>
+      <p:cxnSp>
+        <p:nvCxnSpPr>
+          <p:cNvPr id="16" name="直接箭头连接符 15">
+            <a:extLst>
+              <a:ext uri="{FF2B5EF4-FFF2-40B4-BE49-F238E27FC236}">
+                <a16:creationId xmlns:a16="http://schemas.microsoft.com/office/drawing/2014/main" id="{F4F69EE6-6132-A024-2C37-C7C7513FC57C}"/>
+              </a:ext>
+            </a:extLst>
+          </p:cNvPr>
+          <p:cNvCxnSpPr>
+            <a:cxnSpLocks/>
+          </p:cNvCxnSpPr>
+          <p:nvPr/>
+        </p:nvCxnSpPr>
+        <p:spPr>
+          <a:xfrm>
+            <a:off x="6300279" y="2650206"/>
+            <a:ext cx="171766" cy="0"/>
+          </a:xfrm>
+          <a:prstGeom prst="straightConnector1">
+            <a:avLst/>
+          </a:prstGeom>
+          <a:ln>
+            <a:tailEnd type="triangle"/>
+          </a:ln>
+        </p:spPr>
+        <p:style>
+          <a:lnRef idx="1">
+            <a:schemeClr val="dk1"/>
+          </a:lnRef>
+          <a:fillRef idx="0">
+            <a:schemeClr val="dk1"/>
+          </a:fillRef>
+          <a:effectRef idx="0">
+            <a:schemeClr val="dk1"/>
+          </a:effectRef>
+          <a:fontRef idx="minor">
+            <a:schemeClr val="tx1"/>
+          </a:fontRef>
+        </p:style>
+      </p:cxnSp>
+      <p:cxnSp>
+        <p:nvCxnSpPr>
+          <p:cNvPr id="22" name="直接连接符 21">
+            <a:extLst>
+              <a:ext uri="{FF2B5EF4-FFF2-40B4-BE49-F238E27FC236}">
+                <a16:creationId xmlns:a16="http://schemas.microsoft.com/office/drawing/2014/main" id="{9FC051E1-45F7-3556-AF60-5B1A08D936E0}"/>
+              </a:ext>
+            </a:extLst>
+          </p:cNvPr>
+          <p:cNvCxnSpPr>
+            <a:cxnSpLocks/>
+          </p:cNvCxnSpPr>
+          <p:nvPr/>
+        </p:nvCxnSpPr>
+        <p:spPr>
+          <a:xfrm>
+            <a:off x="2552472" y="1598208"/>
+            <a:ext cx="718965" cy="0"/>
+          </a:xfrm>
+          <a:prstGeom prst="line">
+            <a:avLst/>
+          </a:prstGeom>
+        </p:spPr>
+        <p:style>
+          <a:lnRef idx="1">
+            <a:schemeClr val="dk1"/>
+          </a:lnRef>
+          <a:fillRef idx="0">
+            <a:schemeClr val="dk1"/>
+          </a:fillRef>
+          <a:effectRef idx="0">
+            <a:schemeClr val="dk1"/>
+          </a:effectRef>
+          <a:fontRef idx="minor">
+            <a:schemeClr val="tx1"/>
+          </a:fontRef>
+        </p:style>
+      </p:cxnSp>
+      <p:cxnSp>
+        <p:nvCxnSpPr>
+          <p:cNvPr id="25" name="直接连接符 24">
+            <a:extLst>
+              <a:ext uri="{FF2B5EF4-FFF2-40B4-BE49-F238E27FC236}">
+                <a16:creationId xmlns:a16="http://schemas.microsoft.com/office/drawing/2014/main" id="{5A334AB0-8284-A362-EF03-FE9B6F94BB30}"/>
+              </a:ext>
+            </a:extLst>
+          </p:cNvPr>
+          <p:cNvCxnSpPr>
+            <a:cxnSpLocks/>
+          </p:cNvCxnSpPr>
+          <p:nvPr/>
+        </p:nvCxnSpPr>
+        <p:spPr>
+          <a:xfrm>
+            <a:off x="2554041" y="1596650"/>
+            <a:ext cx="0" cy="1547184"/>
+          </a:xfrm>
+          <a:prstGeom prst="line">
+            <a:avLst/>
+          </a:prstGeom>
+        </p:spPr>
+        <p:style>
+          <a:lnRef idx="1">
+            <a:schemeClr val="dk1"/>
+          </a:lnRef>
+          <a:fillRef idx="0">
+            <a:schemeClr val="dk1"/>
+          </a:fillRef>
+          <a:effectRef idx="0">
+            <a:schemeClr val="dk1"/>
+          </a:effectRef>
+          <a:fontRef idx="minor">
+            <a:schemeClr val="tx1"/>
+          </a:fontRef>
+        </p:style>
+      </p:cxnSp>
+      <p:cxnSp>
+        <p:nvCxnSpPr>
+          <p:cNvPr id="27" name="直接连接符 26">
+            <a:extLst>
+              <a:ext uri="{FF2B5EF4-FFF2-40B4-BE49-F238E27FC236}">
+                <a16:creationId xmlns:a16="http://schemas.microsoft.com/office/drawing/2014/main" id="{954049CB-924C-35FF-F453-FAB0424E1DD3}"/>
+              </a:ext>
+            </a:extLst>
+          </p:cNvPr>
+          <p:cNvCxnSpPr>
+            <a:cxnSpLocks/>
+          </p:cNvCxnSpPr>
+          <p:nvPr/>
+        </p:nvCxnSpPr>
+        <p:spPr>
+          <a:xfrm>
+            <a:off x="7122069" y="2801074"/>
+            <a:ext cx="0" cy="341835"/>
+          </a:xfrm>
+          <a:prstGeom prst="line">
+            <a:avLst/>
+          </a:prstGeom>
+        </p:spPr>
+        <p:style>
+          <a:lnRef idx="1">
+            <a:schemeClr val="dk1"/>
+          </a:lnRef>
+          <a:fillRef idx="0">
+            <a:schemeClr val="dk1"/>
+          </a:fillRef>
+          <a:effectRef idx="0">
+            <a:schemeClr val="dk1"/>
+          </a:effectRef>
+          <a:fontRef idx="minor">
+            <a:schemeClr val="tx1"/>
+          </a:fontRef>
+        </p:style>
+      </p:cxnSp>
+      <p:cxnSp>
+        <p:nvCxnSpPr>
+          <p:cNvPr id="29" name="直接连接符 28">
+            <a:extLst>
+              <a:ext uri="{FF2B5EF4-FFF2-40B4-BE49-F238E27FC236}">
+                <a16:creationId xmlns:a16="http://schemas.microsoft.com/office/drawing/2014/main" id="{DC0E1601-8F81-640A-5FDE-2650B47B7593}"/>
+              </a:ext>
+            </a:extLst>
+          </p:cNvPr>
+          <p:cNvCxnSpPr>
+            <a:cxnSpLocks/>
+          </p:cNvCxnSpPr>
+          <p:nvPr/>
+        </p:nvCxnSpPr>
+        <p:spPr>
+          <a:xfrm>
+            <a:off x="2558005" y="3142705"/>
+            <a:ext cx="4564065" cy="0"/>
+          </a:xfrm>
+          <a:prstGeom prst="line">
+            <a:avLst/>
+          </a:prstGeom>
+        </p:spPr>
+        <p:style>
+          <a:lnRef idx="1">
+            <a:schemeClr val="dk1"/>
+          </a:lnRef>
+          <a:fillRef idx="0">
+            <a:schemeClr val="dk1"/>
+          </a:fillRef>
+          <a:effectRef idx="0">
+            <a:schemeClr val="dk1"/>
+          </a:effectRef>
+          <a:fontRef idx="minor">
+            <a:schemeClr val="tx1"/>
+          </a:fontRef>
+        </p:style>
+      </p:cxnSp>
+      <p:cxnSp>
+        <p:nvCxnSpPr>
+          <p:cNvPr id="53" name="直接连接符 52">
+            <a:extLst>
+              <a:ext uri="{FF2B5EF4-FFF2-40B4-BE49-F238E27FC236}">
+                <a16:creationId xmlns:a16="http://schemas.microsoft.com/office/drawing/2014/main" id="{3D5E9B1C-F872-495D-5415-E3E43019666F}"/>
+              </a:ext>
+            </a:extLst>
+          </p:cNvPr>
+          <p:cNvCxnSpPr>
+            <a:cxnSpLocks/>
+          </p:cNvCxnSpPr>
+          <p:nvPr/>
+        </p:nvCxnSpPr>
+        <p:spPr>
+          <a:xfrm>
+            <a:off x="6881151" y="2803213"/>
+            <a:ext cx="240919" cy="0"/>
+          </a:xfrm>
+          <a:prstGeom prst="line">
+            <a:avLst/>
+          </a:prstGeom>
+        </p:spPr>
+        <p:style>
+          <a:lnRef idx="1">
+            <a:schemeClr val="dk1"/>
+          </a:lnRef>
+          <a:fillRef idx="0">
+            <a:schemeClr val="dk1"/>
+          </a:fillRef>
+          <a:effectRef idx="0">
+            <a:schemeClr val="dk1"/>
+          </a:effectRef>
+          <a:fontRef idx="minor">
+            <a:schemeClr val="tx1"/>
+          </a:fontRef>
+        </p:style>
+      </p:cxnSp>
+      <p:cxnSp>
+        <p:nvCxnSpPr>
+          <p:cNvPr id="108" name="直接连接符 107">
+            <a:extLst>
+              <a:ext uri="{FF2B5EF4-FFF2-40B4-BE49-F238E27FC236}">
+                <a16:creationId xmlns:a16="http://schemas.microsoft.com/office/drawing/2014/main" id="{6600B65A-935B-ABCD-E743-D432859171CC}"/>
+              </a:ext>
+            </a:extLst>
+          </p:cNvPr>
+          <p:cNvCxnSpPr>
+            <a:cxnSpLocks/>
+          </p:cNvCxnSpPr>
+          <p:nvPr/>
+        </p:nvCxnSpPr>
+        <p:spPr>
+          <a:xfrm flipH="1">
+            <a:off x="5304665" y="1726223"/>
+            <a:ext cx="1987" cy="1216642"/>
+          </a:xfrm>
+          <a:prstGeom prst="line">
+            <a:avLst/>
+          </a:prstGeom>
+        </p:spPr>
+        <p:style>
+          <a:lnRef idx="1">
+            <a:schemeClr val="dk1"/>
+          </a:lnRef>
+          <a:fillRef idx="0">
+            <a:schemeClr val="dk1"/>
+          </a:fillRef>
+          <a:effectRef idx="0">
+            <a:schemeClr val="dk1"/>
+          </a:effectRef>
+          <a:fontRef idx="minor">
+            <a:schemeClr val="tx1"/>
+          </a:fontRef>
+        </p:style>
+      </p:cxnSp>
+      <p:cxnSp>
+        <p:nvCxnSpPr>
+          <p:cNvPr id="110" name="直接箭头连接符 109">
+            <a:extLst>
+              <a:ext uri="{FF2B5EF4-FFF2-40B4-BE49-F238E27FC236}">
+                <a16:creationId xmlns:a16="http://schemas.microsoft.com/office/drawing/2014/main" id="{D4EBB851-1AEB-75BF-3E57-171843C6EA21}"/>
+              </a:ext>
+            </a:extLst>
+          </p:cNvPr>
+          <p:cNvCxnSpPr>
+            <a:cxnSpLocks/>
+          </p:cNvCxnSpPr>
+          <p:nvPr/>
+        </p:nvCxnSpPr>
+        <p:spPr>
+          <a:xfrm>
+            <a:off x="5306055" y="2941501"/>
+            <a:ext cx="1167923" cy="0"/>
+          </a:xfrm>
+          <a:prstGeom prst="straightConnector1">
+            <a:avLst/>
+          </a:prstGeom>
+          <a:ln>
+            <a:tailEnd type="triangle"/>
+          </a:ln>
+        </p:spPr>
+        <p:style>
+          <a:lnRef idx="1">
+            <a:schemeClr val="dk1"/>
+          </a:lnRef>
+          <a:fillRef idx="0">
+            <a:schemeClr val="dk1"/>
+          </a:fillRef>
+          <a:effectRef idx="0">
+            <a:schemeClr val="dk1"/>
+          </a:effectRef>
+          <a:fontRef idx="minor">
+            <a:schemeClr val="tx1"/>
+          </a:fontRef>
+        </p:style>
+      </p:cxnSp>
+      <p:sp>
+        <p:nvSpPr>
+          <p:cNvPr id="118" name="矩形: 圆角 117">
+            <a:extLst>
+              <a:ext uri="{FF2B5EF4-FFF2-40B4-BE49-F238E27FC236}">
+                <a16:creationId xmlns:a16="http://schemas.microsoft.com/office/drawing/2014/main" id="{6C2E6841-7AD9-89D8-235D-A0155CFFC282}"/>
+              </a:ext>
+            </a:extLst>
+          </p:cNvPr>
+          <p:cNvSpPr/>
+          <p:nvPr/>
+        </p:nvSpPr>
+        <p:spPr>
+          <a:xfrm>
+            <a:off x="2117556" y="3236956"/>
+            <a:ext cx="2992794" cy="613245"/>
+          </a:xfrm>
+          <a:prstGeom prst="roundRect">
+            <a:avLst/>
+          </a:prstGeom>
+        </p:spPr>
+        <p:style>
+          <a:lnRef idx="2">
+            <a:schemeClr val="dk1"/>
+          </a:lnRef>
+          <a:fillRef idx="1">
+            <a:schemeClr val="lt1"/>
+          </a:fillRef>
+          <a:effectRef idx="0">
+            <a:schemeClr val="dk1"/>
+          </a:effectRef>
+          <a:fontRef idx="minor">
+            <a:schemeClr val="dk1"/>
+          </a:fontRef>
+        </p:style>
+        <p:txBody>
+          <a:bodyPr rtlCol="0" anchor="ctr"/>
+          <a:lstStyle/>
+          <a:p>
+            <a:pPr algn="ctr"/>
+            <a:r>
+              <a:rPr lang="en-US" altLang="zh-CN" sz="1050" dirty="0"/>
+              <a:t>control</a:t>
+            </a:r>
+            <a:endParaRPr lang="zh-CN" altLang="en-US" sz="1050" dirty="0"/>
+          </a:p>
+        </p:txBody>
+      </p:sp>
+      <p:sp>
+        <p:nvSpPr>
+          <p:cNvPr id="119" name="文本框 118">
+            <a:extLst>
+              <a:ext uri="{FF2B5EF4-FFF2-40B4-BE49-F238E27FC236}">
+                <a16:creationId xmlns:a16="http://schemas.microsoft.com/office/drawing/2014/main" id="{2F82886D-9690-9854-DB5C-19528657251B}"/>
+              </a:ext>
+            </a:extLst>
+          </p:cNvPr>
+          <p:cNvSpPr txBox="1"/>
+          <p:nvPr/>
+        </p:nvSpPr>
+        <p:spPr>
+          <a:xfrm>
+            <a:off x="2126494" y="3252363"/>
+            <a:ext cx="3622728" cy="215444"/>
+          </a:xfrm>
+          <a:prstGeom prst="rect">
+            <a:avLst/>
+          </a:prstGeom>
+          <a:noFill/>
+        </p:spPr>
+        <p:txBody>
+          <a:bodyPr wrap="square" rtlCol="0">
+            <a:spAutoFit/>
+          </a:bodyPr>
+          <a:lstStyle/>
+          <a:p>
+            <a:r>
+              <a:rPr lang="en-US" altLang="zh-CN" sz="800" dirty="0" err="1"/>
+              <a:t>npc_sel</a:t>
+            </a:r>
+            <a:r>
+              <a:rPr lang="en-US" altLang="zh-CN" sz="800" dirty="0"/>
+              <a:t>               </a:t>
+            </a:r>
+            <a:r>
+              <a:rPr lang="en-US" altLang="zh-CN" sz="800" dirty="0" err="1"/>
+              <a:t>sext_op</a:t>
+            </a:r>
+            <a:r>
+              <a:rPr lang="en-US" altLang="zh-CN" sz="800" dirty="0"/>
+              <a:t>              </a:t>
+            </a:r>
+            <a:r>
+              <a:rPr lang="en-US" altLang="zh-CN" sz="800" dirty="0" err="1"/>
+              <a:t>rf_sel</a:t>
+            </a:r>
+            <a:r>
+              <a:rPr lang="en-US" altLang="zh-CN" sz="800" dirty="0"/>
+              <a:t>               </a:t>
+            </a:r>
+            <a:r>
+              <a:rPr lang="en-US" altLang="zh-CN" sz="800" dirty="0" err="1"/>
+              <a:t>rf_we</a:t>
+            </a:r>
+            <a:r>
+              <a:rPr lang="en-US" altLang="zh-CN" sz="800" dirty="0"/>
+              <a:t>                 </a:t>
+            </a:r>
+            <a:r>
+              <a:rPr lang="en-US" altLang="zh-CN" sz="800" dirty="0" err="1"/>
+              <a:t>alu_sel</a:t>
+            </a:r>
+            <a:endParaRPr lang="zh-CN" altLang="en-US" sz="800" dirty="0"/>
+          </a:p>
+        </p:txBody>
+      </p:sp>
+      <p:sp>
+        <p:nvSpPr>
+          <p:cNvPr id="123" name="文本框 122">
+            <a:extLst>
+              <a:ext uri="{FF2B5EF4-FFF2-40B4-BE49-F238E27FC236}">
+                <a16:creationId xmlns:a16="http://schemas.microsoft.com/office/drawing/2014/main" id="{75F3F7D5-0A82-FA94-8030-65F7433E712C}"/>
+              </a:ext>
+            </a:extLst>
+          </p:cNvPr>
+          <p:cNvSpPr txBox="1"/>
+          <p:nvPr/>
+        </p:nvSpPr>
+        <p:spPr>
+          <a:xfrm>
+            <a:off x="2119926" y="3433107"/>
+            <a:ext cx="501113" cy="215444"/>
+          </a:xfrm>
+          <a:prstGeom prst="rect">
+            <a:avLst/>
+          </a:prstGeom>
+          <a:noFill/>
+        </p:spPr>
+        <p:txBody>
+          <a:bodyPr wrap="square" rtlCol="0">
+            <a:spAutoFit/>
+          </a:bodyPr>
+          <a:lstStyle/>
+          <a:p>
+            <a:r>
+              <a:rPr lang="en-US" altLang="zh-CN" sz="800" dirty="0" err="1"/>
+              <a:t>npc_op</a:t>
+            </a:r>
+            <a:endParaRPr lang="zh-CN" altLang="en-US" sz="800" dirty="0"/>
+          </a:p>
+        </p:txBody>
+      </p:sp>
+      <p:sp>
+        <p:nvSpPr>
+          <p:cNvPr id="124" name="文本框 123">
+            <a:extLst>
+              <a:ext uri="{FF2B5EF4-FFF2-40B4-BE49-F238E27FC236}">
+                <a16:creationId xmlns:a16="http://schemas.microsoft.com/office/drawing/2014/main" id="{4DFD4C65-F56A-D466-FD50-635E25E745F2}"/>
+              </a:ext>
+            </a:extLst>
+          </p:cNvPr>
+          <p:cNvSpPr txBox="1"/>
+          <p:nvPr/>
+        </p:nvSpPr>
+        <p:spPr>
+          <a:xfrm>
+            <a:off x="4611464" y="3437356"/>
+            <a:ext cx="501113" cy="215444"/>
+          </a:xfrm>
+          <a:prstGeom prst="rect">
+            <a:avLst/>
+          </a:prstGeom>
+          <a:noFill/>
+        </p:spPr>
+        <p:txBody>
+          <a:bodyPr wrap="square" rtlCol="0">
+            <a:spAutoFit/>
+          </a:bodyPr>
+          <a:lstStyle/>
+          <a:p>
+            <a:r>
+              <a:rPr lang="en-US" altLang="zh-CN" sz="800" dirty="0" err="1"/>
+              <a:t>alu_op</a:t>
+            </a:r>
+            <a:endParaRPr lang="zh-CN" altLang="en-US" sz="800" dirty="0"/>
+          </a:p>
+        </p:txBody>
+      </p:sp>
+      <p:sp>
+        <p:nvSpPr>
+          <p:cNvPr id="125" name="文本框 124">
+            <a:extLst>
+              <a:ext uri="{FF2B5EF4-FFF2-40B4-BE49-F238E27FC236}">
+                <a16:creationId xmlns:a16="http://schemas.microsoft.com/office/drawing/2014/main" id="{998E3986-BB7E-1AB6-4B77-0A901E9ED880}"/>
+              </a:ext>
+            </a:extLst>
+          </p:cNvPr>
+          <p:cNvSpPr txBox="1"/>
+          <p:nvPr/>
+        </p:nvSpPr>
+        <p:spPr>
+          <a:xfrm>
+            <a:off x="4589230" y="3573613"/>
+            <a:ext cx="609276" cy="215444"/>
+          </a:xfrm>
+          <a:prstGeom prst="rect">
+            <a:avLst/>
+          </a:prstGeom>
+          <a:noFill/>
+        </p:spPr>
+        <p:txBody>
+          <a:bodyPr wrap="square" rtlCol="0">
+            <a:spAutoFit/>
+          </a:bodyPr>
+          <a:lstStyle/>
+          <a:p>
+            <a:r>
+              <a:rPr lang="en-US" altLang="zh-CN" sz="800" dirty="0" err="1"/>
+              <a:t>ram_we</a:t>
+            </a:r>
+            <a:endParaRPr lang="zh-CN" altLang="en-US" sz="800" dirty="0"/>
+          </a:p>
+        </p:txBody>
+      </p:sp>
+      <p:sp>
+        <p:nvSpPr>
+          <p:cNvPr id="126" name="文本框 125">
+            <a:extLst>
+              <a:ext uri="{FF2B5EF4-FFF2-40B4-BE49-F238E27FC236}">
+                <a16:creationId xmlns:a16="http://schemas.microsoft.com/office/drawing/2014/main" id="{90A14BAB-0B4C-EF67-DB8D-4EFE9A4DEB39}"/>
+              </a:ext>
+            </a:extLst>
+          </p:cNvPr>
+          <p:cNvSpPr txBox="1"/>
+          <p:nvPr/>
+        </p:nvSpPr>
+        <p:spPr>
+          <a:xfrm>
+            <a:off x="2739580" y="3676589"/>
+            <a:ext cx="3622728" cy="215444"/>
+          </a:xfrm>
+          <a:prstGeom prst="rect">
+            <a:avLst/>
+          </a:prstGeom>
+          <a:noFill/>
+        </p:spPr>
+        <p:txBody>
+          <a:bodyPr wrap="square" rtlCol="0">
+            <a:spAutoFit/>
+          </a:bodyPr>
+          <a:lstStyle/>
+          <a:p>
+            <a:r>
+              <a:rPr lang="en-US" altLang="zh-CN" sz="800" dirty="0"/>
+              <a:t>opcode                func3                func7</a:t>
+            </a:r>
+            <a:endParaRPr lang="zh-CN" altLang="en-US" sz="800" dirty="0"/>
+          </a:p>
+        </p:txBody>
+      </p:sp>
+      <p:cxnSp>
+        <p:nvCxnSpPr>
+          <p:cNvPr id="139" name="直接连接符 138">
+            <a:extLst>
+              <a:ext uri="{FF2B5EF4-FFF2-40B4-BE49-F238E27FC236}">
+                <a16:creationId xmlns:a16="http://schemas.microsoft.com/office/drawing/2014/main" id="{E78ADA50-B7A0-8C82-7B6F-801A3182FF0A}"/>
+              </a:ext>
+            </a:extLst>
+          </p:cNvPr>
+          <p:cNvCxnSpPr>
+            <a:cxnSpLocks/>
+          </p:cNvCxnSpPr>
+          <p:nvPr/>
+        </p:nvCxnSpPr>
+        <p:spPr>
+          <a:xfrm flipV="1">
+            <a:off x="393702" y="1575170"/>
+            <a:ext cx="1114603" cy="3718"/>
+          </a:xfrm>
+          <a:prstGeom prst="line">
+            <a:avLst/>
+          </a:prstGeom>
+          <a:ln>
+            <a:solidFill>
+              <a:srgbClr val="FF0000"/>
+            </a:solidFill>
+          </a:ln>
+        </p:spPr>
+        <p:style>
+          <a:lnRef idx="1">
+            <a:schemeClr val="dk1"/>
+          </a:lnRef>
+          <a:fillRef idx="0">
+            <a:schemeClr val="dk1"/>
+          </a:fillRef>
+          <a:effectRef idx="0">
+            <a:schemeClr val="dk1"/>
+          </a:effectRef>
+          <a:fontRef idx="minor">
+            <a:schemeClr val="tx1"/>
+          </a:fontRef>
+        </p:style>
+      </p:cxnSp>
+      <p:cxnSp>
+        <p:nvCxnSpPr>
+          <p:cNvPr id="141" name="直接连接符 140">
+            <a:extLst>
+              <a:ext uri="{FF2B5EF4-FFF2-40B4-BE49-F238E27FC236}">
+                <a16:creationId xmlns:a16="http://schemas.microsoft.com/office/drawing/2014/main" id="{256C883C-3B1D-F949-74B7-90155C03F33D}"/>
+              </a:ext>
+            </a:extLst>
+          </p:cNvPr>
+          <p:cNvCxnSpPr>
+            <a:cxnSpLocks/>
+          </p:cNvCxnSpPr>
+          <p:nvPr/>
+        </p:nvCxnSpPr>
+        <p:spPr>
+          <a:xfrm>
+            <a:off x="395823" y="1578888"/>
+            <a:ext cx="0" cy="1781532"/>
+          </a:xfrm>
+          <a:prstGeom prst="line">
+            <a:avLst/>
+          </a:prstGeom>
+          <a:ln>
+            <a:solidFill>
+              <a:srgbClr val="FF0000"/>
+            </a:solidFill>
+          </a:ln>
+        </p:spPr>
+        <p:style>
+          <a:lnRef idx="1">
+            <a:schemeClr val="dk1"/>
+          </a:lnRef>
+          <a:fillRef idx="0">
+            <a:schemeClr val="dk1"/>
+          </a:fillRef>
+          <a:effectRef idx="0">
+            <a:schemeClr val="dk1"/>
+          </a:effectRef>
+          <a:fontRef idx="minor">
+            <a:schemeClr val="tx1"/>
+          </a:fontRef>
+        </p:style>
+      </p:cxnSp>
+      <p:cxnSp>
+        <p:nvCxnSpPr>
+          <p:cNvPr id="146" name="直接箭头连接符 145">
+            <a:extLst>
+              <a:ext uri="{FF2B5EF4-FFF2-40B4-BE49-F238E27FC236}">
+                <a16:creationId xmlns:a16="http://schemas.microsoft.com/office/drawing/2014/main" id="{A6525C63-C2A8-CF8C-2CAB-61AF53F890F6}"/>
+              </a:ext>
+            </a:extLst>
+          </p:cNvPr>
+          <p:cNvCxnSpPr>
+            <a:cxnSpLocks/>
+          </p:cNvCxnSpPr>
+          <p:nvPr/>
+        </p:nvCxnSpPr>
+        <p:spPr>
+          <a:xfrm flipV="1">
+            <a:off x="1513840" y="1508776"/>
+            <a:ext cx="0" cy="70747"/>
+          </a:xfrm>
+          <a:prstGeom prst="straightConnector1">
+            <a:avLst/>
+          </a:prstGeom>
+          <a:ln>
+            <a:solidFill>
+              <a:srgbClr val="FF0000"/>
+            </a:solidFill>
+            <a:tailEnd type="triangle"/>
+          </a:ln>
+        </p:spPr>
+        <p:style>
+          <a:lnRef idx="1">
+            <a:schemeClr val="dk1"/>
+          </a:lnRef>
+          <a:fillRef idx="0">
+            <a:schemeClr val="dk1"/>
+          </a:fillRef>
+          <a:effectRef idx="0">
+            <a:schemeClr val="dk1"/>
+          </a:effectRef>
+          <a:fontRef idx="minor">
+            <a:schemeClr val="tx1"/>
+          </a:fontRef>
+        </p:style>
+      </p:cxnSp>
+      <p:cxnSp>
+        <p:nvCxnSpPr>
+          <p:cNvPr id="148" name="直接连接符 147">
+            <a:extLst>
+              <a:ext uri="{FF2B5EF4-FFF2-40B4-BE49-F238E27FC236}">
+                <a16:creationId xmlns:a16="http://schemas.microsoft.com/office/drawing/2014/main" id="{84387DBF-A641-352F-EA8D-774EEAF9B736}"/>
+              </a:ext>
+            </a:extLst>
+          </p:cNvPr>
+          <p:cNvCxnSpPr>
+            <a:cxnSpLocks/>
+          </p:cNvCxnSpPr>
+          <p:nvPr/>
+        </p:nvCxnSpPr>
+        <p:spPr>
+          <a:xfrm>
+            <a:off x="398781" y="3360790"/>
+            <a:ext cx="1719124" cy="0"/>
+          </a:xfrm>
+          <a:prstGeom prst="line">
+            <a:avLst/>
+          </a:prstGeom>
+          <a:ln>
+            <a:solidFill>
+              <a:srgbClr val="FF0000"/>
+            </a:solidFill>
+          </a:ln>
+        </p:spPr>
+        <p:style>
+          <a:lnRef idx="1">
+            <a:schemeClr val="dk1"/>
+          </a:lnRef>
+          <a:fillRef idx="0">
+            <a:schemeClr val="dk1"/>
+          </a:fillRef>
+          <a:effectRef idx="0">
+            <a:schemeClr val="dk1"/>
+          </a:effectRef>
+          <a:fontRef idx="minor">
+            <a:schemeClr val="tx1"/>
+          </a:fontRef>
+        </p:style>
+      </p:cxnSp>
+      <p:cxnSp>
+        <p:nvCxnSpPr>
+          <p:cNvPr id="155" name="直接箭头连接符 154">
+            <a:extLst>
+              <a:ext uri="{FF2B5EF4-FFF2-40B4-BE49-F238E27FC236}">
+                <a16:creationId xmlns:a16="http://schemas.microsoft.com/office/drawing/2014/main" id="{58C2D639-EA76-8341-8D0D-789D8A752142}"/>
+              </a:ext>
+            </a:extLst>
+          </p:cNvPr>
+          <p:cNvCxnSpPr>
+            <a:cxnSpLocks/>
+          </p:cNvCxnSpPr>
+          <p:nvPr/>
+        </p:nvCxnSpPr>
+        <p:spPr>
+          <a:xfrm flipV="1">
+            <a:off x="736767" y="2468511"/>
+            <a:ext cx="0" cy="1095110"/>
+          </a:xfrm>
+          <a:prstGeom prst="straightConnector1">
+            <a:avLst/>
+          </a:prstGeom>
+          <a:ln>
+            <a:solidFill>
+              <a:srgbClr val="FF0000"/>
+            </a:solidFill>
+            <a:tailEnd type="triangle"/>
+          </a:ln>
+        </p:spPr>
+        <p:style>
+          <a:lnRef idx="1">
+            <a:schemeClr val="dk1"/>
+          </a:lnRef>
+          <a:fillRef idx="0">
+            <a:schemeClr val="dk1"/>
+          </a:fillRef>
+          <a:effectRef idx="0">
+            <a:schemeClr val="dk1"/>
+          </a:effectRef>
+          <a:fontRef idx="minor">
+            <a:schemeClr val="tx1"/>
+          </a:fontRef>
+        </p:style>
+      </p:cxnSp>
+      <p:cxnSp>
+        <p:nvCxnSpPr>
+          <p:cNvPr id="159" name="直接连接符 158">
+            <a:extLst>
+              <a:ext uri="{FF2B5EF4-FFF2-40B4-BE49-F238E27FC236}">
+                <a16:creationId xmlns:a16="http://schemas.microsoft.com/office/drawing/2014/main" id="{D3713E60-A2E2-5672-6921-B0FBC57DEED3}"/>
+              </a:ext>
+            </a:extLst>
+          </p:cNvPr>
+          <p:cNvCxnSpPr>
+            <a:cxnSpLocks/>
+          </p:cNvCxnSpPr>
+          <p:nvPr/>
+        </p:nvCxnSpPr>
+        <p:spPr>
+          <a:xfrm>
+            <a:off x="739140" y="3561450"/>
+            <a:ext cx="1373051" cy="0"/>
+          </a:xfrm>
+          <a:prstGeom prst="line">
+            <a:avLst/>
+          </a:prstGeom>
+          <a:ln>
+            <a:solidFill>
+              <a:srgbClr val="FF0000"/>
+            </a:solidFill>
+          </a:ln>
+        </p:spPr>
+        <p:style>
+          <a:lnRef idx="1">
+            <a:schemeClr val="dk1"/>
+          </a:lnRef>
+          <a:fillRef idx="0">
+            <a:schemeClr val="dk1"/>
+          </a:fillRef>
+          <a:effectRef idx="0">
+            <a:schemeClr val="dk1"/>
+          </a:effectRef>
+          <a:fontRef idx="minor">
+            <a:schemeClr val="tx1"/>
+          </a:fontRef>
+        </p:style>
+      </p:cxnSp>
+      <p:cxnSp>
+        <p:nvCxnSpPr>
+          <p:cNvPr id="165" name="直接箭头连接符 164">
+            <a:extLst>
+              <a:ext uri="{FF2B5EF4-FFF2-40B4-BE49-F238E27FC236}">
+                <a16:creationId xmlns:a16="http://schemas.microsoft.com/office/drawing/2014/main" id="{63447049-F8D5-016E-F958-27A8ADFD0B0F}"/>
+              </a:ext>
+            </a:extLst>
+          </p:cNvPr>
+          <p:cNvCxnSpPr/>
+          <p:nvPr/>
+        </p:nvCxnSpPr>
+        <p:spPr>
+          <a:xfrm flipH="1" flipV="1">
+            <a:off x="3683330" y="2437664"/>
+            <a:ext cx="1745" cy="301569"/>
+          </a:xfrm>
+          <a:prstGeom prst="straightConnector1">
+            <a:avLst/>
+          </a:prstGeom>
+          <a:ln>
+            <a:solidFill>
+              <a:srgbClr val="FF0000"/>
+            </a:solidFill>
+            <a:tailEnd type="triangle"/>
+          </a:ln>
+        </p:spPr>
+        <p:style>
+          <a:lnRef idx="1">
+            <a:schemeClr val="dk1"/>
+          </a:lnRef>
+          <a:fillRef idx="0">
+            <a:schemeClr val="dk1"/>
+          </a:fillRef>
+          <a:effectRef idx="0">
+            <a:schemeClr val="dk1"/>
+          </a:effectRef>
+          <a:fontRef idx="minor">
+            <a:schemeClr val="tx1"/>
+          </a:fontRef>
+        </p:style>
+      </p:cxnSp>
+      <p:cxnSp>
+        <p:nvCxnSpPr>
+          <p:cNvPr id="171" name="直接连接符 170">
+            <a:extLst>
+              <a:ext uri="{FF2B5EF4-FFF2-40B4-BE49-F238E27FC236}">
+                <a16:creationId xmlns:a16="http://schemas.microsoft.com/office/drawing/2014/main" id="{5DD1D37D-DEFF-35B2-10AC-4C47CA754A9A}"/>
+              </a:ext>
+            </a:extLst>
+          </p:cNvPr>
+          <p:cNvCxnSpPr>
+            <a:cxnSpLocks/>
+          </p:cNvCxnSpPr>
+          <p:nvPr/>
+        </p:nvCxnSpPr>
+        <p:spPr>
+          <a:xfrm flipH="1">
+            <a:off x="3017178" y="2736902"/>
+            <a:ext cx="666152" cy="0"/>
+          </a:xfrm>
+          <a:prstGeom prst="line">
+            <a:avLst/>
+          </a:prstGeom>
+          <a:ln>
+            <a:solidFill>
+              <a:srgbClr val="FF0000"/>
+            </a:solidFill>
+          </a:ln>
+        </p:spPr>
+        <p:style>
+          <a:lnRef idx="1">
+            <a:schemeClr val="dk1"/>
+          </a:lnRef>
+          <a:fillRef idx="0">
+            <a:schemeClr val="dk1"/>
+          </a:fillRef>
+          <a:effectRef idx="0">
+            <a:schemeClr val="dk1"/>
+          </a:effectRef>
+          <a:fontRef idx="minor">
+            <a:schemeClr val="tx1"/>
+          </a:fontRef>
+        </p:style>
+      </p:cxnSp>
+      <p:cxnSp>
+        <p:nvCxnSpPr>
+          <p:cNvPr id="180" name="直接连接符 179">
+            <a:extLst>
+              <a:ext uri="{FF2B5EF4-FFF2-40B4-BE49-F238E27FC236}">
+                <a16:creationId xmlns:a16="http://schemas.microsoft.com/office/drawing/2014/main" id="{A248A7AA-4134-15BD-7A72-C4504145F343}"/>
+              </a:ext>
+            </a:extLst>
+          </p:cNvPr>
+          <p:cNvCxnSpPr>
+            <a:cxnSpLocks/>
+          </p:cNvCxnSpPr>
+          <p:nvPr/>
+        </p:nvCxnSpPr>
+        <p:spPr>
+          <a:xfrm>
+            <a:off x="3017177" y="2738799"/>
+            <a:ext cx="0" cy="493775"/>
+          </a:xfrm>
+          <a:prstGeom prst="line">
+            <a:avLst/>
+          </a:prstGeom>
+          <a:ln>
+            <a:solidFill>
+              <a:srgbClr val="FF0000"/>
+            </a:solidFill>
+          </a:ln>
+        </p:spPr>
+        <p:style>
+          <a:lnRef idx="1">
+            <a:schemeClr val="dk1"/>
+          </a:lnRef>
+          <a:fillRef idx="0">
+            <a:schemeClr val="dk1"/>
+          </a:fillRef>
+          <a:effectRef idx="0">
+            <a:schemeClr val="dk1"/>
+          </a:effectRef>
+          <a:fontRef idx="minor">
+            <a:schemeClr val="tx1"/>
+          </a:fontRef>
+        </p:style>
+      </p:cxnSp>
+      <p:sp>
+        <p:nvSpPr>
+          <p:cNvPr id="187" name="文本框 186">
+            <a:extLst>
+              <a:ext uri="{FF2B5EF4-FFF2-40B4-BE49-F238E27FC236}">
+                <a16:creationId xmlns:a16="http://schemas.microsoft.com/office/drawing/2014/main" id="{5B1E2CF0-B3BF-1DAA-0F33-CCDCC1DAA69A}"/>
+              </a:ext>
+            </a:extLst>
+          </p:cNvPr>
+          <p:cNvSpPr txBox="1"/>
+          <p:nvPr/>
+        </p:nvSpPr>
+        <p:spPr>
+          <a:xfrm>
+            <a:off x="3541246" y="1772001"/>
+            <a:ext cx="353389" cy="200055"/>
+          </a:xfrm>
+          <a:prstGeom prst="rect">
+            <a:avLst/>
+          </a:prstGeom>
+          <a:noFill/>
+        </p:spPr>
+        <p:txBody>
+          <a:bodyPr wrap="square" rtlCol="0">
+            <a:spAutoFit/>
+          </a:bodyPr>
+          <a:lstStyle/>
+          <a:p>
+            <a:r>
+              <a:rPr lang="en-US" altLang="zh-CN" sz="700" dirty="0" err="1"/>
+              <a:t>sel</a:t>
+            </a:r>
+            <a:endParaRPr lang="en-US" altLang="zh-CN" sz="700" dirty="0"/>
+          </a:p>
+        </p:txBody>
+      </p:sp>
+      <p:cxnSp>
+        <p:nvCxnSpPr>
+          <p:cNvPr id="188" name="直接箭头连接符 187">
+            <a:extLst>
+              <a:ext uri="{FF2B5EF4-FFF2-40B4-BE49-F238E27FC236}">
+                <a16:creationId xmlns:a16="http://schemas.microsoft.com/office/drawing/2014/main" id="{8BB08869-31C7-742C-2415-39BA9FE2F4BC}"/>
+              </a:ext>
+            </a:extLst>
+          </p:cNvPr>
+          <p:cNvCxnSpPr>
+            <a:cxnSpLocks/>
+          </p:cNvCxnSpPr>
+          <p:nvPr/>
+        </p:nvCxnSpPr>
+        <p:spPr>
+          <a:xfrm flipV="1">
+            <a:off x="3683329" y="1931983"/>
+            <a:ext cx="0" cy="70747"/>
+          </a:xfrm>
+          <a:prstGeom prst="straightConnector1">
+            <a:avLst/>
+          </a:prstGeom>
+          <a:ln>
+            <a:solidFill>
+              <a:srgbClr val="FF0000"/>
+            </a:solidFill>
+            <a:tailEnd type="triangle"/>
+          </a:ln>
+        </p:spPr>
+        <p:style>
+          <a:lnRef idx="1">
+            <a:schemeClr val="dk1"/>
+          </a:lnRef>
+          <a:fillRef idx="0">
+            <a:schemeClr val="dk1"/>
+          </a:fillRef>
+          <a:effectRef idx="0">
+            <a:schemeClr val="dk1"/>
+          </a:effectRef>
+          <a:fontRef idx="minor">
+            <a:schemeClr val="tx1"/>
+          </a:fontRef>
+        </p:style>
+      </p:cxnSp>
+      <p:cxnSp>
+        <p:nvCxnSpPr>
+          <p:cNvPr id="190" name="直接连接符 189">
+            <a:extLst>
+              <a:ext uri="{FF2B5EF4-FFF2-40B4-BE49-F238E27FC236}">
+                <a16:creationId xmlns:a16="http://schemas.microsoft.com/office/drawing/2014/main" id="{594641CB-92AD-3979-2F1C-0AD91C5BE70A}"/>
+              </a:ext>
+            </a:extLst>
+          </p:cNvPr>
+          <p:cNvCxnSpPr>
+            <a:cxnSpLocks/>
+          </p:cNvCxnSpPr>
+          <p:nvPr/>
+        </p:nvCxnSpPr>
+        <p:spPr>
+          <a:xfrm>
+            <a:off x="3704396" y="2002602"/>
+            <a:ext cx="682210" cy="0"/>
+          </a:xfrm>
+          <a:prstGeom prst="line">
+            <a:avLst/>
+          </a:prstGeom>
+          <a:ln>
+            <a:solidFill>
+              <a:srgbClr val="FF0000"/>
+            </a:solidFill>
+          </a:ln>
+        </p:spPr>
+        <p:style>
+          <a:lnRef idx="1">
+            <a:schemeClr val="dk1"/>
+          </a:lnRef>
+          <a:fillRef idx="0">
+            <a:schemeClr val="dk1"/>
+          </a:fillRef>
+          <a:effectRef idx="0">
+            <a:schemeClr val="dk1"/>
+          </a:effectRef>
+          <a:fontRef idx="minor">
+            <a:schemeClr val="tx1"/>
+          </a:fontRef>
+        </p:style>
+      </p:cxnSp>
+      <p:cxnSp>
+        <p:nvCxnSpPr>
+          <p:cNvPr id="193" name="直接箭头连接符 192">
+            <a:extLst>
+              <a:ext uri="{FF2B5EF4-FFF2-40B4-BE49-F238E27FC236}">
+                <a16:creationId xmlns:a16="http://schemas.microsoft.com/office/drawing/2014/main" id="{206C9B4F-0FA8-D767-69DD-E00FA5FCE95E}"/>
+              </a:ext>
+            </a:extLst>
+          </p:cNvPr>
+          <p:cNvCxnSpPr>
+            <a:cxnSpLocks/>
+          </p:cNvCxnSpPr>
+          <p:nvPr/>
+        </p:nvCxnSpPr>
+        <p:spPr>
+          <a:xfrm flipV="1">
+            <a:off x="4680942" y="2027505"/>
+            <a:ext cx="0" cy="906196"/>
+          </a:xfrm>
+          <a:prstGeom prst="straightConnector1">
+            <a:avLst/>
+          </a:prstGeom>
+          <a:ln>
+            <a:solidFill>
+              <a:srgbClr val="FF0000"/>
+            </a:solidFill>
+            <a:tailEnd type="triangle"/>
+          </a:ln>
+        </p:spPr>
+        <p:style>
+          <a:lnRef idx="1">
+            <a:schemeClr val="dk1"/>
+          </a:lnRef>
+          <a:fillRef idx="0">
+            <a:schemeClr val="dk1"/>
+          </a:fillRef>
+          <a:effectRef idx="0">
+            <a:schemeClr val="dk1"/>
+          </a:effectRef>
+          <a:fontRef idx="minor">
+            <a:schemeClr val="tx1"/>
+          </a:fontRef>
+        </p:style>
+      </p:cxnSp>
+      <p:cxnSp>
+        <p:nvCxnSpPr>
+          <p:cNvPr id="196" name="直接连接符 195">
+            <a:extLst>
+              <a:ext uri="{FF2B5EF4-FFF2-40B4-BE49-F238E27FC236}">
+                <a16:creationId xmlns:a16="http://schemas.microsoft.com/office/drawing/2014/main" id="{562A86A7-2B8A-D8FE-2935-6670D5284F5E}"/>
+              </a:ext>
+            </a:extLst>
+          </p:cNvPr>
+          <p:cNvCxnSpPr>
+            <a:cxnSpLocks/>
+          </p:cNvCxnSpPr>
+          <p:nvPr/>
+        </p:nvCxnSpPr>
+        <p:spPr>
+          <a:xfrm>
+            <a:off x="4382473" y="2002499"/>
+            <a:ext cx="2252" cy="837222"/>
+          </a:xfrm>
+          <a:prstGeom prst="line">
+            <a:avLst/>
+          </a:prstGeom>
+          <a:ln>
+            <a:solidFill>
+              <a:srgbClr val="FF0000"/>
+            </a:solidFill>
+          </a:ln>
+        </p:spPr>
+        <p:style>
+          <a:lnRef idx="1">
+            <a:schemeClr val="dk1"/>
+          </a:lnRef>
+          <a:fillRef idx="0">
+            <a:schemeClr val="dk1"/>
+          </a:fillRef>
+          <a:effectRef idx="0">
+            <a:schemeClr val="dk1"/>
+          </a:effectRef>
+          <a:fontRef idx="minor">
+            <a:schemeClr val="tx1"/>
+          </a:fontRef>
+        </p:style>
+      </p:cxnSp>
+      <p:cxnSp>
+        <p:nvCxnSpPr>
+          <p:cNvPr id="199" name="直接连接符 198">
+            <a:extLst>
+              <a:ext uri="{FF2B5EF4-FFF2-40B4-BE49-F238E27FC236}">
+                <a16:creationId xmlns:a16="http://schemas.microsoft.com/office/drawing/2014/main" id="{00F19FA5-EF23-D2EE-FD36-42211DC092D6}"/>
+              </a:ext>
+            </a:extLst>
+          </p:cNvPr>
+          <p:cNvCxnSpPr>
+            <a:cxnSpLocks/>
+          </p:cNvCxnSpPr>
+          <p:nvPr/>
+        </p:nvCxnSpPr>
+        <p:spPr>
+          <a:xfrm>
+            <a:off x="3606965" y="2836997"/>
+            <a:ext cx="777970" cy="0"/>
+          </a:xfrm>
+          <a:prstGeom prst="line">
+            <a:avLst/>
+          </a:prstGeom>
+          <a:ln>
+            <a:solidFill>
+              <a:srgbClr val="FF0000"/>
+            </a:solidFill>
+          </a:ln>
+        </p:spPr>
+        <p:style>
+          <a:lnRef idx="1">
+            <a:schemeClr val="dk1"/>
+          </a:lnRef>
+          <a:fillRef idx="0">
+            <a:schemeClr val="dk1"/>
+          </a:fillRef>
+          <a:effectRef idx="0">
+            <a:schemeClr val="dk1"/>
+          </a:effectRef>
+          <a:fontRef idx="minor">
+            <a:schemeClr val="tx1"/>
+          </a:fontRef>
+        </p:style>
+      </p:cxnSp>
+      <p:cxnSp>
+        <p:nvCxnSpPr>
+          <p:cNvPr id="204" name="直接连接符 203">
+            <a:extLst>
+              <a:ext uri="{FF2B5EF4-FFF2-40B4-BE49-F238E27FC236}">
+                <a16:creationId xmlns:a16="http://schemas.microsoft.com/office/drawing/2014/main" id="{8D55CFD1-7F36-90EC-03F6-F52DB25FFF9C}"/>
+              </a:ext>
+            </a:extLst>
+          </p:cNvPr>
+          <p:cNvCxnSpPr>
+            <a:cxnSpLocks/>
+          </p:cNvCxnSpPr>
+          <p:nvPr/>
+        </p:nvCxnSpPr>
+        <p:spPr>
+          <a:xfrm>
+            <a:off x="4197671" y="2933517"/>
+            <a:ext cx="482957" cy="0"/>
+          </a:xfrm>
+          <a:prstGeom prst="line">
+            <a:avLst/>
+          </a:prstGeom>
+          <a:ln>
+            <a:solidFill>
+              <a:srgbClr val="FF0000"/>
+            </a:solidFill>
+          </a:ln>
+        </p:spPr>
+        <p:style>
+          <a:lnRef idx="1">
+            <a:schemeClr val="dk1"/>
+          </a:lnRef>
+          <a:fillRef idx="0">
+            <a:schemeClr val="dk1"/>
+          </a:fillRef>
+          <a:effectRef idx="0">
+            <a:schemeClr val="dk1"/>
+          </a:effectRef>
+          <a:fontRef idx="minor">
+            <a:schemeClr val="tx1"/>
+          </a:fontRef>
+        </p:style>
+      </p:cxnSp>
+      <p:cxnSp>
+        <p:nvCxnSpPr>
+          <p:cNvPr id="207" name="直接连接符 206">
+            <a:extLst>
+              <a:ext uri="{FF2B5EF4-FFF2-40B4-BE49-F238E27FC236}">
+                <a16:creationId xmlns:a16="http://schemas.microsoft.com/office/drawing/2014/main" id="{FCF22849-B673-FF3E-245D-F8F368A9A9CF}"/>
+              </a:ext>
+            </a:extLst>
+          </p:cNvPr>
+          <p:cNvCxnSpPr>
+            <a:cxnSpLocks/>
+          </p:cNvCxnSpPr>
+          <p:nvPr/>
+        </p:nvCxnSpPr>
+        <p:spPr>
+          <a:xfrm>
+            <a:off x="3606964" y="2834641"/>
+            <a:ext cx="0" cy="403859"/>
+          </a:xfrm>
+          <a:prstGeom prst="line">
+            <a:avLst/>
+          </a:prstGeom>
+          <a:ln>
+            <a:solidFill>
+              <a:srgbClr val="FF0000"/>
+            </a:solidFill>
+          </a:ln>
+        </p:spPr>
+        <p:style>
+          <a:lnRef idx="1">
+            <a:schemeClr val="dk1"/>
+          </a:lnRef>
+          <a:fillRef idx="0">
+            <a:schemeClr val="dk1"/>
+          </a:fillRef>
+          <a:effectRef idx="0">
+            <a:schemeClr val="dk1"/>
+          </a:effectRef>
+          <a:fontRef idx="minor">
+            <a:schemeClr val="tx1"/>
+          </a:fontRef>
+        </p:style>
+      </p:cxnSp>
+      <p:cxnSp>
+        <p:nvCxnSpPr>
+          <p:cNvPr id="212" name="直接连接符 211">
+            <a:extLst>
+              <a:ext uri="{FF2B5EF4-FFF2-40B4-BE49-F238E27FC236}">
+                <a16:creationId xmlns:a16="http://schemas.microsoft.com/office/drawing/2014/main" id="{AD9C4A62-AF90-E792-AD68-D021B6329C2B}"/>
+              </a:ext>
+            </a:extLst>
+          </p:cNvPr>
+          <p:cNvCxnSpPr>
+            <a:cxnSpLocks/>
+          </p:cNvCxnSpPr>
+          <p:nvPr/>
+        </p:nvCxnSpPr>
+        <p:spPr>
+          <a:xfrm>
+            <a:off x="4199386" y="2931161"/>
+            <a:ext cx="0" cy="304799"/>
+          </a:xfrm>
+          <a:prstGeom prst="line">
+            <a:avLst/>
+          </a:prstGeom>
+          <a:ln>
+            <a:solidFill>
+              <a:srgbClr val="FF0000"/>
+            </a:solidFill>
+          </a:ln>
+        </p:spPr>
+        <p:style>
+          <a:lnRef idx="1">
+            <a:schemeClr val="dk1"/>
+          </a:lnRef>
+          <a:fillRef idx="0">
+            <a:schemeClr val="dk1"/>
+          </a:fillRef>
+          <a:effectRef idx="0">
+            <a:schemeClr val="dk1"/>
+          </a:effectRef>
+          <a:fontRef idx="minor">
+            <a:schemeClr val="tx1"/>
+          </a:fontRef>
+        </p:style>
+      </p:cxnSp>
+      <p:cxnSp>
+        <p:nvCxnSpPr>
+          <p:cNvPr id="214" name="直接连接符 213">
+            <a:extLst>
+              <a:ext uri="{FF2B5EF4-FFF2-40B4-BE49-F238E27FC236}">
+                <a16:creationId xmlns:a16="http://schemas.microsoft.com/office/drawing/2014/main" id="{845FD038-D0D4-728A-7AE8-C101BBE87337}"/>
+              </a:ext>
+            </a:extLst>
+          </p:cNvPr>
+          <p:cNvCxnSpPr>
+            <a:cxnSpLocks/>
+          </p:cNvCxnSpPr>
+          <p:nvPr/>
+        </p:nvCxnSpPr>
+        <p:spPr>
+          <a:xfrm>
+            <a:off x="4862022" y="2429180"/>
+            <a:ext cx="1172070" cy="0"/>
+          </a:xfrm>
+          <a:prstGeom prst="line">
+            <a:avLst/>
+          </a:prstGeom>
+          <a:ln>
+            <a:solidFill>
+              <a:srgbClr val="FF0000"/>
+            </a:solidFill>
+          </a:ln>
+        </p:spPr>
+        <p:style>
+          <a:lnRef idx="1">
+            <a:schemeClr val="dk1"/>
+          </a:lnRef>
+          <a:fillRef idx="0">
+            <a:schemeClr val="dk1"/>
+          </a:fillRef>
+          <a:effectRef idx="0">
+            <a:schemeClr val="dk1"/>
+          </a:effectRef>
+          <a:fontRef idx="minor">
+            <a:schemeClr val="tx1"/>
+          </a:fontRef>
+        </p:style>
+      </p:cxnSp>
+      <p:cxnSp>
+        <p:nvCxnSpPr>
+          <p:cNvPr id="216" name="直接连接符 215">
+            <a:extLst>
+              <a:ext uri="{FF2B5EF4-FFF2-40B4-BE49-F238E27FC236}">
+                <a16:creationId xmlns:a16="http://schemas.microsoft.com/office/drawing/2014/main" id="{0908A20B-03C8-58F6-2B89-EA172F8E42C9}"/>
+              </a:ext>
+            </a:extLst>
+          </p:cNvPr>
+          <p:cNvCxnSpPr>
+            <a:cxnSpLocks/>
+          </p:cNvCxnSpPr>
+          <p:nvPr/>
+        </p:nvCxnSpPr>
+        <p:spPr>
+          <a:xfrm>
+            <a:off x="4862021" y="2425132"/>
+            <a:ext cx="0" cy="808289"/>
+          </a:xfrm>
+          <a:prstGeom prst="line">
+            <a:avLst/>
+          </a:prstGeom>
+          <a:ln>
+            <a:solidFill>
+              <a:srgbClr val="FF0000"/>
+            </a:solidFill>
+          </a:ln>
+        </p:spPr>
+        <p:style>
+          <a:lnRef idx="1">
+            <a:schemeClr val="dk1"/>
+          </a:lnRef>
+          <a:fillRef idx="0">
+            <a:schemeClr val="dk1"/>
+          </a:fillRef>
+          <a:effectRef idx="0">
+            <a:schemeClr val="dk1"/>
+          </a:effectRef>
+          <a:fontRef idx="minor">
+            <a:schemeClr val="tx1"/>
+          </a:fontRef>
+        </p:style>
+      </p:cxnSp>
+      <p:sp>
+        <p:nvSpPr>
+          <p:cNvPr id="219" name="文本框 218">
+            <a:extLst>
+              <a:ext uri="{FF2B5EF4-FFF2-40B4-BE49-F238E27FC236}">
+                <a16:creationId xmlns:a16="http://schemas.microsoft.com/office/drawing/2014/main" id="{F60041BC-6470-5DF2-5EF2-2CA4C62F0064}"/>
+              </a:ext>
+            </a:extLst>
+          </p:cNvPr>
+          <p:cNvSpPr txBox="1"/>
+          <p:nvPr/>
+        </p:nvSpPr>
+        <p:spPr>
+          <a:xfrm>
+            <a:off x="6535926" y="1655412"/>
+            <a:ext cx="353389" cy="200055"/>
+          </a:xfrm>
+          <a:prstGeom prst="rect">
+            <a:avLst/>
+          </a:prstGeom>
+          <a:noFill/>
+        </p:spPr>
+        <p:txBody>
+          <a:bodyPr wrap="square" rtlCol="0">
+            <a:spAutoFit/>
+          </a:bodyPr>
+          <a:lstStyle/>
+          <a:p>
+            <a:r>
+              <a:rPr lang="en-US" altLang="zh-CN" sz="700" dirty="0"/>
+              <a:t>op</a:t>
+            </a:r>
+          </a:p>
+        </p:txBody>
+      </p:sp>
+      <p:sp>
+        <p:nvSpPr>
+          <p:cNvPr id="225" name="文本框 224">
+            <a:extLst>
+              <a:ext uri="{FF2B5EF4-FFF2-40B4-BE49-F238E27FC236}">
+                <a16:creationId xmlns:a16="http://schemas.microsoft.com/office/drawing/2014/main" id="{2A04893A-5C37-01C3-5F28-E1A1AD206E70}"/>
+              </a:ext>
+            </a:extLst>
+          </p:cNvPr>
+          <p:cNvSpPr txBox="1"/>
+          <p:nvPr/>
+        </p:nvSpPr>
+        <p:spPr>
+          <a:xfrm>
+            <a:off x="6563218" y="2994216"/>
+            <a:ext cx="353389" cy="153888"/>
+          </a:xfrm>
+          <a:prstGeom prst="rect">
+            <a:avLst/>
+          </a:prstGeom>
+          <a:noFill/>
+        </p:spPr>
+        <p:txBody>
+          <a:bodyPr wrap="square" rtlCol="0">
+            <a:spAutoFit/>
+          </a:bodyPr>
+          <a:lstStyle/>
+          <a:p>
+            <a:r>
+              <a:rPr lang="en-US" altLang="zh-CN" sz="400" dirty="0"/>
+              <a:t>we</a:t>
+            </a:r>
+          </a:p>
+        </p:txBody>
+      </p:sp>
+      <p:cxnSp>
+        <p:nvCxnSpPr>
+          <p:cNvPr id="226" name="直接箭头连接符 225">
+            <a:extLst>
+              <a:ext uri="{FF2B5EF4-FFF2-40B4-BE49-F238E27FC236}">
+                <a16:creationId xmlns:a16="http://schemas.microsoft.com/office/drawing/2014/main" id="{3A27FCA6-901D-8E23-B8E8-FBE4C1182DCB}"/>
+              </a:ext>
+            </a:extLst>
+          </p:cNvPr>
+          <p:cNvCxnSpPr/>
+          <p:nvPr/>
+        </p:nvCxnSpPr>
+        <p:spPr>
+          <a:xfrm flipH="1" flipV="1">
+            <a:off x="6679166" y="1820464"/>
+            <a:ext cx="1745" cy="301569"/>
+          </a:xfrm>
+          <a:prstGeom prst="straightConnector1">
+            <a:avLst/>
+          </a:prstGeom>
+          <a:ln>
+            <a:solidFill>
+              <a:srgbClr val="FF0000"/>
+            </a:solidFill>
+            <a:tailEnd type="triangle"/>
+          </a:ln>
+        </p:spPr>
+        <p:style>
+          <a:lnRef idx="1">
+            <a:schemeClr val="dk1"/>
+          </a:lnRef>
+          <a:fillRef idx="0">
+            <a:schemeClr val="dk1"/>
+          </a:fillRef>
+          <a:effectRef idx="0">
+            <a:schemeClr val="dk1"/>
+          </a:effectRef>
+          <a:fontRef idx="minor">
+            <a:schemeClr val="tx1"/>
+          </a:fontRef>
+        </p:style>
+      </p:cxnSp>
+      <p:cxnSp>
+        <p:nvCxnSpPr>
+          <p:cNvPr id="227" name="直接连接符 226">
+            <a:extLst>
+              <a:ext uri="{FF2B5EF4-FFF2-40B4-BE49-F238E27FC236}">
+                <a16:creationId xmlns:a16="http://schemas.microsoft.com/office/drawing/2014/main" id="{E9ACAEFE-D57F-1105-6936-6CC594A335EB}"/>
+              </a:ext>
+            </a:extLst>
+          </p:cNvPr>
+          <p:cNvCxnSpPr>
+            <a:cxnSpLocks/>
+          </p:cNvCxnSpPr>
+          <p:nvPr/>
+        </p:nvCxnSpPr>
+        <p:spPr>
+          <a:xfrm>
+            <a:off x="6195492" y="2121749"/>
+            <a:ext cx="485997" cy="74"/>
+          </a:xfrm>
+          <a:prstGeom prst="line">
+            <a:avLst/>
+          </a:prstGeom>
+          <a:ln>
+            <a:solidFill>
+              <a:srgbClr val="FF0000"/>
+            </a:solidFill>
+          </a:ln>
+        </p:spPr>
+        <p:style>
+          <a:lnRef idx="1">
+            <a:schemeClr val="dk1"/>
+          </a:lnRef>
+          <a:fillRef idx="0">
+            <a:schemeClr val="dk1"/>
+          </a:fillRef>
+          <a:effectRef idx="0">
+            <a:schemeClr val="dk1"/>
+          </a:effectRef>
+          <a:fontRef idx="minor">
+            <a:schemeClr val="tx1"/>
+          </a:fontRef>
+        </p:style>
+      </p:cxnSp>
+      <p:cxnSp>
+        <p:nvCxnSpPr>
+          <p:cNvPr id="235" name="直接箭头连接符 234">
+            <a:extLst>
+              <a:ext uri="{FF2B5EF4-FFF2-40B4-BE49-F238E27FC236}">
+                <a16:creationId xmlns:a16="http://schemas.microsoft.com/office/drawing/2014/main" id="{5AFABFBF-9EA9-556A-BED3-8DA980337CFF}"/>
+              </a:ext>
+            </a:extLst>
+          </p:cNvPr>
+          <p:cNvCxnSpPr>
+            <a:cxnSpLocks/>
+          </p:cNvCxnSpPr>
+          <p:nvPr/>
+        </p:nvCxnSpPr>
+        <p:spPr>
+          <a:xfrm flipV="1">
+            <a:off x="6683988" y="3115863"/>
+            <a:ext cx="0" cy="573567"/>
+          </a:xfrm>
+          <a:prstGeom prst="straightConnector1">
+            <a:avLst/>
+          </a:prstGeom>
+          <a:ln>
+            <a:solidFill>
+              <a:srgbClr val="FF0000"/>
+            </a:solidFill>
+            <a:tailEnd type="triangle"/>
+          </a:ln>
+        </p:spPr>
+        <p:style>
+          <a:lnRef idx="1">
+            <a:schemeClr val="dk1"/>
+          </a:lnRef>
+          <a:fillRef idx="0">
+            <a:schemeClr val="dk1"/>
+          </a:fillRef>
+          <a:effectRef idx="0">
+            <a:schemeClr val="dk1"/>
+          </a:effectRef>
+          <a:fontRef idx="minor">
+            <a:schemeClr val="tx1"/>
+          </a:fontRef>
+        </p:style>
+      </p:cxnSp>
+      <p:cxnSp>
+        <p:nvCxnSpPr>
+          <p:cNvPr id="238" name="直接连接符 237">
+            <a:extLst>
+              <a:ext uri="{FF2B5EF4-FFF2-40B4-BE49-F238E27FC236}">
+                <a16:creationId xmlns:a16="http://schemas.microsoft.com/office/drawing/2014/main" id="{1D5C6CC0-8132-43F9-851B-7254D8E0DCF0}"/>
+              </a:ext>
+            </a:extLst>
+          </p:cNvPr>
+          <p:cNvCxnSpPr>
+            <a:cxnSpLocks/>
+          </p:cNvCxnSpPr>
+          <p:nvPr/>
+        </p:nvCxnSpPr>
+        <p:spPr>
+          <a:xfrm>
+            <a:off x="6198711" y="2118930"/>
+            <a:ext cx="0" cy="1446073"/>
+          </a:xfrm>
+          <a:prstGeom prst="line">
+            <a:avLst/>
+          </a:prstGeom>
+          <a:ln>
+            <a:solidFill>
+              <a:srgbClr val="FF0000"/>
+            </a:solidFill>
+          </a:ln>
+        </p:spPr>
+        <p:style>
+          <a:lnRef idx="1">
+            <a:schemeClr val="dk1"/>
+          </a:lnRef>
+          <a:fillRef idx="0">
+            <a:schemeClr val="dk1"/>
+          </a:fillRef>
+          <a:effectRef idx="0">
+            <a:schemeClr val="dk1"/>
+          </a:effectRef>
+          <a:fontRef idx="minor">
+            <a:schemeClr val="tx1"/>
+          </a:fontRef>
+        </p:style>
+      </p:cxnSp>
+      <p:cxnSp>
+        <p:nvCxnSpPr>
+          <p:cNvPr id="242" name="直接连接符 241">
+            <a:extLst>
+              <a:ext uri="{FF2B5EF4-FFF2-40B4-BE49-F238E27FC236}">
+                <a16:creationId xmlns:a16="http://schemas.microsoft.com/office/drawing/2014/main" id="{3AFD78A2-0488-1C9D-B981-245E0DE1330F}"/>
+              </a:ext>
+            </a:extLst>
+          </p:cNvPr>
+          <p:cNvCxnSpPr>
+            <a:cxnSpLocks/>
+          </p:cNvCxnSpPr>
+          <p:nvPr/>
+        </p:nvCxnSpPr>
+        <p:spPr>
+          <a:xfrm>
+            <a:off x="5116011" y="3565333"/>
+            <a:ext cx="1080430" cy="0"/>
+          </a:xfrm>
+          <a:prstGeom prst="line">
+            <a:avLst/>
+          </a:prstGeom>
+          <a:ln>
+            <a:solidFill>
+              <a:srgbClr val="FF0000"/>
+            </a:solidFill>
+          </a:ln>
+        </p:spPr>
+        <p:style>
+          <a:lnRef idx="1">
+            <a:schemeClr val="dk1"/>
+          </a:lnRef>
+          <a:fillRef idx="0">
+            <a:schemeClr val="dk1"/>
+          </a:fillRef>
+          <a:effectRef idx="0">
+            <a:schemeClr val="dk1"/>
+          </a:effectRef>
+          <a:fontRef idx="minor">
+            <a:schemeClr val="tx1"/>
+          </a:fontRef>
+        </p:style>
+      </p:cxnSp>
+      <p:cxnSp>
+        <p:nvCxnSpPr>
+          <p:cNvPr id="267" name="直接连接符 266">
+            <a:extLst>
+              <a:ext uri="{FF2B5EF4-FFF2-40B4-BE49-F238E27FC236}">
+                <a16:creationId xmlns:a16="http://schemas.microsoft.com/office/drawing/2014/main" id="{71F132B5-7E90-5081-05E3-528E43FFA2CB}"/>
+              </a:ext>
+            </a:extLst>
+          </p:cNvPr>
+          <p:cNvCxnSpPr>
+            <a:cxnSpLocks/>
+          </p:cNvCxnSpPr>
+          <p:nvPr/>
+        </p:nvCxnSpPr>
+        <p:spPr>
+          <a:xfrm>
+            <a:off x="5103213" y="3691690"/>
+            <a:ext cx="1580678" cy="0"/>
+          </a:xfrm>
+          <a:prstGeom prst="line">
+            <a:avLst/>
+          </a:prstGeom>
+          <a:ln>
+            <a:solidFill>
+              <a:srgbClr val="FF0000"/>
+            </a:solidFill>
+          </a:ln>
+        </p:spPr>
+        <p:style>
+          <a:lnRef idx="1">
+            <a:schemeClr val="dk1"/>
+          </a:lnRef>
+          <a:fillRef idx="0">
+            <a:schemeClr val="dk1"/>
+          </a:fillRef>
+          <a:effectRef idx="0">
+            <a:schemeClr val="dk1"/>
+          </a:effectRef>
+          <a:fontRef idx="minor">
+            <a:schemeClr val="tx1"/>
+          </a:fontRef>
+        </p:style>
+      </p:cxnSp>
+      <p:cxnSp>
+        <p:nvCxnSpPr>
+          <p:cNvPr id="273" name="直接连接符 272">
+            <a:extLst>
+              <a:ext uri="{FF2B5EF4-FFF2-40B4-BE49-F238E27FC236}">
+                <a16:creationId xmlns:a16="http://schemas.microsoft.com/office/drawing/2014/main" id="{77307B94-D4E2-3403-9E8C-7C9A0DB82A78}"/>
+              </a:ext>
+            </a:extLst>
+          </p:cNvPr>
+          <p:cNvCxnSpPr>
+            <a:cxnSpLocks/>
+          </p:cNvCxnSpPr>
+          <p:nvPr/>
+        </p:nvCxnSpPr>
+        <p:spPr>
+          <a:xfrm flipH="1">
+            <a:off x="1849968" y="2944336"/>
+            <a:ext cx="916129" cy="0"/>
+          </a:xfrm>
+          <a:prstGeom prst="line">
+            <a:avLst/>
+          </a:prstGeom>
+          <a:ln>
+            <a:solidFill>
+              <a:srgbClr val="FF0000"/>
+            </a:solidFill>
+          </a:ln>
+        </p:spPr>
+        <p:style>
+          <a:lnRef idx="1">
+            <a:schemeClr val="dk1"/>
+          </a:lnRef>
+          <a:fillRef idx="0">
+            <a:schemeClr val="dk1"/>
+          </a:fillRef>
+          <a:effectRef idx="0">
+            <a:schemeClr val="dk1"/>
+          </a:effectRef>
+          <a:fontRef idx="minor">
+            <a:schemeClr val="tx1"/>
+          </a:fontRef>
+        </p:style>
+      </p:cxnSp>
+      <p:cxnSp>
+        <p:nvCxnSpPr>
+          <p:cNvPr id="276" name="直接连接符 275">
+            <a:extLst>
+              <a:ext uri="{FF2B5EF4-FFF2-40B4-BE49-F238E27FC236}">
+                <a16:creationId xmlns:a16="http://schemas.microsoft.com/office/drawing/2014/main" id="{0ED0DF4F-B412-03A0-C104-848B91CA1F57}"/>
+              </a:ext>
+            </a:extLst>
+          </p:cNvPr>
+          <p:cNvCxnSpPr>
+            <a:cxnSpLocks/>
+          </p:cNvCxnSpPr>
+          <p:nvPr/>
+        </p:nvCxnSpPr>
+        <p:spPr>
+          <a:xfrm>
+            <a:off x="1855928" y="2945167"/>
+            <a:ext cx="0" cy="1059567"/>
+          </a:xfrm>
+          <a:prstGeom prst="line">
+            <a:avLst/>
+          </a:prstGeom>
+          <a:ln>
+            <a:solidFill>
+              <a:srgbClr val="FF0000"/>
+            </a:solidFill>
+          </a:ln>
+        </p:spPr>
+        <p:style>
+          <a:lnRef idx="1">
+            <a:schemeClr val="dk1"/>
+          </a:lnRef>
+          <a:fillRef idx="0">
+            <a:schemeClr val="dk1"/>
+          </a:fillRef>
+          <a:effectRef idx="0">
+            <a:schemeClr val="dk1"/>
+          </a:effectRef>
+          <a:fontRef idx="minor">
+            <a:schemeClr val="tx1"/>
+          </a:fontRef>
+        </p:style>
+      </p:cxnSp>
+      <p:cxnSp>
+        <p:nvCxnSpPr>
+          <p:cNvPr id="281" name="直接连接符 280">
+            <a:extLst>
+              <a:ext uri="{FF2B5EF4-FFF2-40B4-BE49-F238E27FC236}">
+                <a16:creationId xmlns:a16="http://schemas.microsoft.com/office/drawing/2014/main" id="{26FC52CD-98EB-2D3E-89FF-2229501303A6}"/>
+              </a:ext>
+            </a:extLst>
+          </p:cNvPr>
+          <p:cNvCxnSpPr>
+            <a:cxnSpLocks/>
+          </p:cNvCxnSpPr>
+          <p:nvPr/>
+        </p:nvCxnSpPr>
+        <p:spPr>
+          <a:xfrm flipH="1">
+            <a:off x="1849968" y="4002668"/>
+            <a:ext cx="2352783" cy="0"/>
+          </a:xfrm>
+          <a:prstGeom prst="line">
+            <a:avLst/>
+          </a:prstGeom>
+          <a:ln>
+            <a:solidFill>
+              <a:srgbClr val="FF0000"/>
+            </a:solidFill>
+          </a:ln>
+        </p:spPr>
+        <p:style>
+          <a:lnRef idx="1">
+            <a:schemeClr val="dk1"/>
+          </a:lnRef>
+          <a:fillRef idx="0">
+            <a:schemeClr val="dk1"/>
+          </a:fillRef>
+          <a:effectRef idx="0">
+            <a:schemeClr val="dk1"/>
+          </a:effectRef>
+          <a:fontRef idx="minor">
+            <a:schemeClr val="tx1"/>
+          </a:fontRef>
+        </p:style>
+      </p:cxnSp>
+      <p:cxnSp>
+        <p:nvCxnSpPr>
+          <p:cNvPr id="283" name="直接箭头连接符 282">
+            <a:extLst>
+              <a:ext uri="{FF2B5EF4-FFF2-40B4-BE49-F238E27FC236}">
+                <a16:creationId xmlns:a16="http://schemas.microsoft.com/office/drawing/2014/main" id="{69D1FB01-99D9-863E-63FD-C9AC5FD7CFD2}"/>
+              </a:ext>
+            </a:extLst>
+          </p:cNvPr>
+          <p:cNvCxnSpPr>
+            <a:cxnSpLocks/>
+          </p:cNvCxnSpPr>
+          <p:nvPr/>
+        </p:nvCxnSpPr>
+        <p:spPr>
+          <a:xfrm flipV="1">
+            <a:off x="2966452" y="3847362"/>
+            <a:ext cx="0" cy="157371"/>
+          </a:xfrm>
+          <a:prstGeom prst="straightConnector1">
+            <a:avLst/>
+          </a:prstGeom>
+          <a:ln>
+            <a:solidFill>
+              <a:srgbClr val="FF0000"/>
+            </a:solidFill>
+            <a:tailEnd type="triangle"/>
+          </a:ln>
+        </p:spPr>
+        <p:style>
+          <a:lnRef idx="1">
+            <a:schemeClr val="dk1"/>
+          </a:lnRef>
+          <a:fillRef idx="0">
+            <a:schemeClr val="dk1"/>
+          </a:fillRef>
+          <a:effectRef idx="0">
+            <a:schemeClr val="dk1"/>
+          </a:effectRef>
+          <a:fontRef idx="minor">
+            <a:schemeClr val="tx1"/>
+          </a:fontRef>
+        </p:style>
+      </p:cxnSp>
+      <p:cxnSp>
+        <p:nvCxnSpPr>
+          <p:cNvPr id="287" name="直接箭头连接符 286">
+            <a:extLst>
+              <a:ext uri="{FF2B5EF4-FFF2-40B4-BE49-F238E27FC236}">
+                <a16:creationId xmlns:a16="http://schemas.microsoft.com/office/drawing/2014/main" id="{2572F749-6F62-1775-21B1-7313668CDF6C}"/>
+              </a:ext>
+            </a:extLst>
+          </p:cNvPr>
+          <p:cNvCxnSpPr>
+            <a:cxnSpLocks/>
+          </p:cNvCxnSpPr>
+          <p:nvPr/>
+        </p:nvCxnSpPr>
+        <p:spPr>
+          <a:xfrm flipV="1">
+            <a:off x="3606964" y="3847362"/>
+            <a:ext cx="0" cy="157371"/>
+          </a:xfrm>
+          <a:prstGeom prst="straightConnector1">
+            <a:avLst/>
+          </a:prstGeom>
+          <a:ln>
+            <a:solidFill>
+              <a:srgbClr val="FF0000"/>
+            </a:solidFill>
+            <a:tailEnd type="triangle"/>
+          </a:ln>
+        </p:spPr>
+        <p:style>
+          <a:lnRef idx="1">
+            <a:schemeClr val="dk1"/>
+          </a:lnRef>
+          <a:fillRef idx="0">
+            <a:schemeClr val="dk1"/>
+          </a:fillRef>
+          <a:effectRef idx="0">
+            <a:schemeClr val="dk1"/>
+          </a:effectRef>
+          <a:fontRef idx="minor">
+            <a:schemeClr val="tx1"/>
+          </a:fontRef>
+        </p:style>
+      </p:cxnSp>
+      <p:cxnSp>
+        <p:nvCxnSpPr>
+          <p:cNvPr id="290" name="直接箭头连接符 289">
+            <a:extLst>
+              <a:ext uri="{FF2B5EF4-FFF2-40B4-BE49-F238E27FC236}">
+                <a16:creationId xmlns:a16="http://schemas.microsoft.com/office/drawing/2014/main" id="{1AC4645E-E9A0-7E4A-B107-BA5285B22D0B}"/>
+              </a:ext>
+            </a:extLst>
+          </p:cNvPr>
+          <p:cNvCxnSpPr>
+            <a:cxnSpLocks/>
+          </p:cNvCxnSpPr>
+          <p:nvPr/>
+        </p:nvCxnSpPr>
+        <p:spPr>
+          <a:xfrm flipV="1">
+            <a:off x="4201637" y="3847360"/>
+            <a:ext cx="0" cy="157371"/>
+          </a:xfrm>
+          <a:prstGeom prst="straightConnector1">
+            <a:avLst/>
+          </a:prstGeom>
+          <a:ln>
+            <a:solidFill>
+              <a:srgbClr val="FF0000"/>
+            </a:solidFill>
+            <a:tailEnd type="triangle"/>
+          </a:ln>
+        </p:spPr>
+        <p:style>
+          <a:lnRef idx="1">
+            <a:schemeClr val="dk1"/>
+          </a:lnRef>
+          <a:fillRef idx="0">
+            <a:schemeClr val="dk1"/>
+          </a:fillRef>
+          <a:effectRef idx="0">
+            <a:schemeClr val="dk1"/>
+          </a:effectRef>
+          <a:fontRef idx="minor">
+            <a:schemeClr val="tx1"/>
+          </a:fontRef>
+        </p:style>
+      </p:cxnSp>
+      <p:sp>
+        <p:nvSpPr>
+          <p:cNvPr id="291" name="文本框 290">
+            <a:extLst>
+              <a:ext uri="{FF2B5EF4-FFF2-40B4-BE49-F238E27FC236}">
+                <a16:creationId xmlns:a16="http://schemas.microsoft.com/office/drawing/2014/main" id="{7F90723B-6EEE-7C69-58C2-49F8270D16FD}"/>
+              </a:ext>
+            </a:extLst>
+          </p:cNvPr>
+          <p:cNvSpPr txBox="1"/>
+          <p:nvPr/>
+        </p:nvSpPr>
+        <p:spPr>
+          <a:xfrm>
+            <a:off x="2604424" y="3873500"/>
+            <a:ext cx="1151803" cy="169277"/>
+          </a:xfrm>
+          <a:prstGeom prst="rect">
+            <a:avLst/>
+          </a:prstGeom>
+          <a:noFill/>
+        </p:spPr>
+        <p:txBody>
+          <a:bodyPr wrap="square" rtlCol="0">
+            <a:spAutoFit/>
+          </a:bodyPr>
+          <a:lstStyle/>
+          <a:p>
+            <a:r>
+              <a:rPr lang="en-US" altLang="zh-CN" sz="500" dirty="0" err="1">
+                <a:solidFill>
+                  <a:srgbClr val="FF0000"/>
+                </a:solidFill>
+              </a:rPr>
+              <a:t>inst</a:t>
+            </a:r>
+            <a:r>
+              <a:rPr lang="en-US" altLang="zh-CN" sz="500" dirty="0">
+                <a:solidFill>
+                  <a:srgbClr val="FF0000"/>
+                </a:solidFill>
+              </a:rPr>
+              <a:t>[6:0]</a:t>
+            </a:r>
+            <a:endParaRPr lang="zh-CN" altLang="en-US" sz="500" dirty="0">
+              <a:solidFill>
+                <a:srgbClr val="FF0000"/>
+              </a:solidFill>
+            </a:endParaRPr>
+          </a:p>
+        </p:txBody>
+      </p:sp>
+      <p:sp>
+        <p:nvSpPr>
+          <p:cNvPr id="292" name="文本框 291">
+            <a:extLst>
+              <a:ext uri="{FF2B5EF4-FFF2-40B4-BE49-F238E27FC236}">
+                <a16:creationId xmlns:a16="http://schemas.microsoft.com/office/drawing/2014/main" id="{D3631756-8E07-3015-C0D2-91351D087F1E}"/>
+              </a:ext>
+            </a:extLst>
+          </p:cNvPr>
+          <p:cNvSpPr txBox="1"/>
+          <p:nvPr/>
+        </p:nvSpPr>
+        <p:spPr>
+          <a:xfrm>
+            <a:off x="3194384" y="3872968"/>
+            <a:ext cx="1151803" cy="169277"/>
+          </a:xfrm>
+          <a:prstGeom prst="rect">
+            <a:avLst/>
+          </a:prstGeom>
+          <a:noFill/>
+        </p:spPr>
+        <p:txBody>
+          <a:bodyPr wrap="square" rtlCol="0">
+            <a:spAutoFit/>
+          </a:bodyPr>
+          <a:lstStyle/>
+          <a:p>
+            <a:r>
+              <a:rPr lang="en-US" altLang="zh-CN" sz="500">
+                <a:solidFill>
+                  <a:srgbClr val="FF0000"/>
+                </a:solidFill>
+              </a:rPr>
+              <a:t>inst</a:t>
+            </a:r>
+            <a:r>
+              <a:rPr lang="en-US" altLang="zh-CN" sz="500" dirty="0">
+                <a:solidFill>
+                  <a:srgbClr val="FF0000"/>
+                </a:solidFill>
+              </a:rPr>
+              <a:t>[14:12]</a:t>
+            </a:r>
+            <a:endParaRPr lang="zh-CN" altLang="en-US" sz="500" dirty="0">
+              <a:solidFill>
+                <a:srgbClr val="FF0000"/>
+              </a:solidFill>
+            </a:endParaRPr>
+          </a:p>
+        </p:txBody>
+      </p:sp>
+      <p:sp>
+        <p:nvSpPr>
+          <p:cNvPr id="293" name="文本框 292">
+            <a:extLst>
+              <a:ext uri="{FF2B5EF4-FFF2-40B4-BE49-F238E27FC236}">
+                <a16:creationId xmlns:a16="http://schemas.microsoft.com/office/drawing/2014/main" id="{0446DA78-571A-C0A5-D371-A989806D0AA4}"/>
+              </a:ext>
+            </a:extLst>
+          </p:cNvPr>
+          <p:cNvSpPr txBox="1"/>
+          <p:nvPr/>
+        </p:nvSpPr>
+        <p:spPr>
+          <a:xfrm>
+            <a:off x="3780641" y="3873500"/>
+            <a:ext cx="1151803" cy="169277"/>
+          </a:xfrm>
+          <a:prstGeom prst="rect">
+            <a:avLst/>
+          </a:prstGeom>
+          <a:noFill/>
+        </p:spPr>
+        <p:txBody>
+          <a:bodyPr wrap="square" rtlCol="0">
+            <a:spAutoFit/>
+          </a:bodyPr>
+          <a:lstStyle/>
+          <a:p>
+            <a:r>
+              <a:rPr lang="en-US" altLang="zh-CN" sz="500" dirty="0" err="1">
+                <a:solidFill>
+                  <a:srgbClr val="FF0000"/>
+                </a:solidFill>
+              </a:rPr>
+              <a:t>inst</a:t>
+            </a:r>
+            <a:r>
+              <a:rPr lang="en-US" altLang="zh-CN" sz="500" dirty="0">
+                <a:solidFill>
+                  <a:srgbClr val="FF0000"/>
+                </a:solidFill>
+              </a:rPr>
+              <a:t>[31:25]</a:t>
+            </a:r>
+            <a:endParaRPr lang="zh-CN" altLang="en-US" sz="500" dirty="0">
+              <a:solidFill>
+                <a:srgbClr val="FF0000"/>
+              </a:solidFill>
+            </a:endParaRPr>
+          </a:p>
+        </p:txBody>
+      </p:sp>
+      <p:cxnSp>
+        <p:nvCxnSpPr>
+          <p:cNvPr id="295" name="直接连接符 294">
+            <a:extLst>
+              <a:ext uri="{FF2B5EF4-FFF2-40B4-BE49-F238E27FC236}">
+                <a16:creationId xmlns:a16="http://schemas.microsoft.com/office/drawing/2014/main" id="{8B2D2F79-291C-939C-7D4B-1E6870386B11}"/>
+              </a:ext>
+            </a:extLst>
+          </p:cNvPr>
+          <p:cNvCxnSpPr/>
+          <p:nvPr/>
+        </p:nvCxnSpPr>
+        <p:spPr>
+          <a:xfrm flipH="1">
+            <a:off x="1468966" y="3302001"/>
+            <a:ext cx="177799" cy="118533"/>
+          </a:xfrm>
+          <a:prstGeom prst="line">
+            <a:avLst/>
+          </a:prstGeom>
+          <a:ln>
+            <a:solidFill>
+              <a:srgbClr val="FF0000"/>
+            </a:solidFill>
+          </a:ln>
+        </p:spPr>
+        <p:style>
+          <a:lnRef idx="1">
+            <a:schemeClr val="dk1"/>
+          </a:lnRef>
+          <a:fillRef idx="0">
+            <a:schemeClr val="dk1"/>
+          </a:fillRef>
+          <a:effectRef idx="0">
+            <a:schemeClr val="dk1"/>
+          </a:effectRef>
+          <a:fontRef idx="minor">
+            <a:schemeClr val="tx1"/>
+          </a:fontRef>
+        </p:style>
+      </p:cxnSp>
+      <p:cxnSp>
+        <p:nvCxnSpPr>
+          <p:cNvPr id="297" name="直接连接符 296">
+            <a:extLst>
+              <a:ext uri="{FF2B5EF4-FFF2-40B4-BE49-F238E27FC236}">
+                <a16:creationId xmlns:a16="http://schemas.microsoft.com/office/drawing/2014/main" id="{7732F161-53D3-AD6F-42E5-7AF0CF8475CE}"/>
+              </a:ext>
+            </a:extLst>
+          </p:cNvPr>
+          <p:cNvCxnSpPr/>
+          <p:nvPr/>
+        </p:nvCxnSpPr>
+        <p:spPr>
+          <a:xfrm flipH="1">
+            <a:off x="1473200" y="3502289"/>
+            <a:ext cx="177799" cy="118533"/>
+          </a:xfrm>
+          <a:prstGeom prst="line">
+            <a:avLst/>
+          </a:prstGeom>
+          <a:ln>
+            <a:solidFill>
+              <a:srgbClr val="FF0000"/>
+            </a:solidFill>
+          </a:ln>
+        </p:spPr>
+        <p:style>
+          <a:lnRef idx="1">
+            <a:schemeClr val="dk1"/>
+          </a:lnRef>
+          <a:fillRef idx="0">
+            <a:schemeClr val="dk1"/>
+          </a:fillRef>
+          <a:effectRef idx="0">
+            <a:schemeClr val="dk1"/>
+          </a:effectRef>
+          <a:fontRef idx="minor">
+            <a:schemeClr val="tx1"/>
+          </a:fontRef>
+        </p:style>
+      </p:cxnSp>
+      <p:cxnSp>
+        <p:nvCxnSpPr>
+          <p:cNvPr id="298" name="直接连接符 297">
+            <a:extLst>
+              <a:ext uri="{FF2B5EF4-FFF2-40B4-BE49-F238E27FC236}">
+                <a16:creationId xmlns:a16="http://schemas.microsoft.com/office/drawing/2014/main" id="{F1A07610-4C68-F602-073F-C52562654ED1}"/>
+              </a:ext>
+            </a:extLst>
+          </p:cNvPr>
+          <p:cNvCxnSpPr/>
+          <p:nvPr/>
+        </p:nvCxnSpPr>
+        <p:spPr>
+          <a:xfrm flipH="1">
+            <a:off x="2925561" y="2985509"/>
+            <a:ext cx="177799" cy="118533"/>
+          </a:xfrm>
+          <a:prstGeom prst="line">
+            <a:avLst/>
+          </a:prstGeom>
+          <a:ln>
+            <a:solidFill>
+              <a:srgbClr val="FF0000"/>
+            </a:solidFill>
+          </a:ln>
+        </p:spPr>
+        <p:style>
+          <a:lnRef idx="1">
+            <a:schemeClr val="dk1"/>
+          </a:lnRef>
+          <a:fillRef idx="0">
+            <a:schemeClr val="dk1"/>
+          </a:fillRef>
+          <a:effectRef idx="0">
+            <a:schemeClr val="dk1"/>
+          </a:effectRef>
+          <a:fontRef idx="minor">
+            <a:schemeClr val="tx1"/>
+          </a:fontRef>
+        </p:style>
+      </p:cxnSp>
+      <p:cxnSp>
+        <p:nvCxnSpPr>
+          <p:cNvPr id="299" name="直接连接符 298">
+            <a:extLst>
+              <a:ext uri="{FF2B5EF4-FFF2-40B4-BE49-F238E27FC236}">
+                <a16:creationId xmlns:a16="http://schemas.microsoft.com/office/drawing/2014/main" id="{20F37BED-756E-6CC5-11EE-59824B036108}"/>
+              </a:ext>
+            </a:extLst>
+          </p:cNvPr>
+          <p:cNvCxnSpPr/>
+          <p:nvPr/>
+        </p:nvCxnSpPr>
+        <p:spPr>
+          <a:xfrm flipH="1">
+            <a:off x="3510757" y="2978308"/>
+            <a:ext cx="177799" cy="118533"/>
+          </a:xfrm>
+          <a:prstGeom prst="line">
+            <a:avLst/>
+          </a:prstGeom>
+          <a:ln>
+            <a:solidFill>
+              <a:srgbClr val="FF0000"/>
+            </a:solidFill>
+          </a:ln>
+        </p:spPr>
+        <p:style>
+          <a:lnRef idx="1">
+            <a:schemeClr val="dk1"/>
+          </a:lnRef>
+          <a:fillRef idx="0">
+            <a:schemeClr val="dk1"/>
+          </a:fillRef>
+          <a:effectRef idx="0">
+            <a:schemeClr val="dk1"/>
+          </a:effectRef>
+          <a:fontRef idx="minor">
+            <a:schemeClr val="tx1"/>
+          </a:fontRef>
+        </p:style>
+      </p:cxnSp>
+      <p:cxnSp>
+        <p:nvCxnSpPr>
+          <p:cNvPr id="300" name="直接连接符 299">
+            <a:extLst>
+              <a:ext uri="{FF2B5EF4-FFF2-40B4-BE49-F238E27FC236}">
+                <a16:creationId xmlns:a16="http://schemas.microsoft.com/office/drawing/2014/main" id="{0E48941B-CCA5-9CB8-3780-C258A458EBEE}"/>
+              </a:ext>
+            </a:extLst>
+          </p:cNvPr>
+          <p:cNvCxnSpPr/>
+          <p:nvPr/>
+        </p:nvCxnSpPr>
+        <p:spPr>
+          <a:xfrm flipH="1">
+            <a:off x="4113850" y="2984346"/>
+            <a:ext cx="177799" cy="118533"/>
+          </a:xfrm>
+          <a:prstGeom prst="line">
+            <a:avLst/>
+          </a:prstGeom>
+          <a:ln>
+            <a:solidFill>
+              <a:srgbClr val="FF0000"/>
+            </a:solidFill>
+          </a:ln>
+        </p:spPr>
+        <p:style>
+          <a:lnRef idx="1">
+            <a:schemeClr val="dk1"/>
+          </a:lnRef>
+          <a:fillRef idx="0">
+            <a:schemeClr val="dk1"/>
+          </a:fillRef>
+          <a:effectRef idx="0">
+            <a:schemeClr val="dk1"/>
+          </a:effectRef>
+          <a:fontRef idx="minor">
+            <a:schemeClr val="tx1"/>
+          </a:fontRef>
+        </p:style>
+      </p:cxnSp>
+      <p:cxnSp>
+        <p:nvCxnSpPr>
+          <p:cNvPr id="301" name="直接连接符 300">
+            <a:extLst>
+              <a:ext uri="{FF2B5EF4-FFF2-40B4-BE49-F238E27FC236}">
+                <a16:creationId xmlns:a16="http://schemas.microsoft.com/office/drawing/2014/main" id="{B9D08657-4162-7D3C-01A5-6D25D094EC51}"/>
+              </a:ext>
+            </a:extLst>
+          </p:cNvPr>
+          <p:cNvCxnSpPr/>
+          <p:nvPr/>
+        </p:nvCxnSpPr>
+        <p:spPr>
+          <a:xfrm flipH="1">
+            <a:off x="4772052" y="2976032"/>
+            <a:ext cx="177799" cy="118533"/>
+          </a:xfrm>
+          <a:prstGeom prst="line">
+            <a:avLst/>
+          </a:prstGeom>
+          <a:ln>
+            <a:solidFill>
+              <a:srgbClr val="FF0000"/>
+            </a:solidFill>
+          </a:ln>
+        </p:spPr>
+        <p:style>
+          <a:lnRef idx="1">
+            <a:schemeClr val="dk1"/>
+          </a:lnRef>
+          <a:fillRef idx="0">
+            <a:schemeClr val="dk1"/>
+          </a:fillRef>
+          <a:effectRef idx="0">
+            <a:schemeClr val="dk1"/>
+          </a:effectRef>
+          <a:fontRef idx="minor">
+            <a:schemeClr val="tx1"/>
+          </a:fontRef>
+        </p:style>
+      </p:cxnSp>
+      <p:cxnSp>
+        <p:nvCxnSpPr>
+          <p:cNvPr id="302" name="直接连接符 301">
+            <a:extLst>
+              <a:ext uri="{FF2B5EF4-FFF2-40B4-BE49-F238E27FC236}">
+                <a16:creationId xmlns:a16="http://schemas.microsoft.com/office/drawing/2014/main" id="{4EA00862-9C42-2655-5C2A-B58C8AF44D33}"/>
+              </a:ext>
+            </a:extLst>
+          </p:cNvPr>
+          <p:cNvCxnSpPr/>
+          <p:nvPr/>
+        </p:nvCxnSpPr>
+        <p:spPr>
+          <a:xfrm flipH="1">
+            <a:off x="5541448" y="3506524"/>
+            <a:ext cx="177799" cy="118533"/>
+          </a:xfrm>
+          <a:prstGeom prst="line">
+            <a:avLst/>
+          </a:prstGeom>
+          <a:ln>
+            <a:solidFill>
+              <a:srgbClr val="FF0000"/>
+            </a:solidFill>
+          </a:ln>
+        </p:spPr>
+        <p:style>
+          <a:lnRef idx="1">
+            <a:schemeClr val="dk1"/>
+          </a:lnRef>
+          <a:fillRef idx="0">
+            <a:schemeClr val="dk1"/>
+          </a:fillRef>
+          <a:effectRef idx="0">
+            <a:schemeClr val="dk1"/>
+          </a:effectRef>
+          <a:fontRef idx="minor">
+            <a:schemeClr val="tx1"/>
+          </a:fontRef>
+        </p:style>
+      </p:cxnSp>
+      <p:cxnSp>
+        <p:nvCxnSpPr>
+          <p:cNvPr id="303" name="直接连接符 302">
+            <a:extLst>
+              <a:ext uri="{FF2B5EF4-FFF2-40B4-BE49-F238E27FC236}">
+                <a16:creationId xmlns:a16="http://schemas.microsoft.com/office/drawing/2014/main" id="{D69F6572-FC7A-17D0-E311-FC3D74473247}"/>
+              </a:ext>
+            </a:extLst>
+          </p:cNvPr>
+          <p:cNvCxnSpPr/>
+          <p:nvPr/>
+        </p:nvCxnSpPr>
+        <p:spPr>
+          <a:xfrm flipH="1">
+            <a:off x="5873153" y="3636433"/>
+            <a:ext cx="177799" cy="118533"/>
+          </a:xfrm>
+          <a:prstGeom prst="line">
+            <a:avLst/>
+          </a:prstGeom>
+          <a:ln>
+            <a:solidFill>
+              <a:srgbClr val="FF0000"/>
+            </a:solidFill>
+          </a:ln>
+        </p:spPr>
+        <p:style>
+          <a:lnRef idx="1">
+            <a:schemeClr val="dk1"/>
+          </a:lnRef>
+          <a:fillRef idx="0">
+            <a:schemeClr val="dk1"/>
+          </a:fillRef>
+          <a:effectRef idx="0">
+            <a:schemeClr val="dk1"/>
+          </a:effectRef>
+          <a:fontRef idx="minor">
+            <a:schemeClr val="tx1"/>
+          </a:fontRef>
+        </p:style>
+      </p:cxnSp>
+      <p:sp>
+        <p:nvSpPr>
+          <p:cNvPr id="304" name="文本框 303">
+            <a:extLst>
+              <a:ext uri="{FF2B5EF4-FFF2-40B4-BE49-F238E27FC236}">
+                <a16:creationId xmlns:a16="http://schemas.microsoft.com/office/drawing/2014/main" id="{15C8EAED-E96C-2612-B59B-67D80B5CB2CF}"/>
+              </a:ext>
+            </a:extLst>
+          </p:cNvPr>
+          <p:cNvSpPr txBox="1"/>
+          <p:nvPr/>
+        </p:nvSpPr>
+        <p:spPr>
+          <a:xfrm>
+            <a:off x="1367367" y="3208867"/>
+            <a:ext cx="423332" cy="169277"/>
+          </a:xfrm>
+          <a:prstGeom prst="rect">
+            <a:avLst/>
+          </a:prstGeom>
+          <a:noFill/>
+        </p:spPr>
+        <p:txBody>
+          <a:bodyPr wrap="square" rtlCol="0">
+            <a:spAutoFit/>
+          </a:bodyPr>
+          <a:lstStyle/>
+          <a:p>
+            <a:r>
+              <a:rPr lang="en-US" altLang="zh-CN" sz="500" dirty="0">
+                <a:solidFill>
+                  <a:srgbClr val="FF0000"/>
+                </a:solidFill>
+              </a:rPr>
+              <a:t>1bit</a:t>
+            </a:r>
+            <a:endParaRPr lang="zh-CN" altLang="en-US" sz="500" dirty="0">
+              <a:solidFill>
+                <a:srgbClr val="FF0000"/>
+              </a:solidFill>
+            </a:endParaRPr>
+          </a:p>
+        </p:txBody>
+      </p:sp>
+      <p:sp>
+        <p:nvSpPr>
+          <p:cNvPr id="305" name="文本框 304">
+            <a:extLst>
+              <a:ext uri="{FF2B5EF4-FFF2-40B4-BE49-F238E27FC236}">
+                <a16:creationId xmlns:a16="http://schemas.microsoft.com/office/drawing/2014/main" id="{4EED66E4-4C0A-40DA-E6F3-974C8CA6A912}"/>
+              </a:ext>
+            </a:extLst>
+          </p:cNvPr>
+          <p:cNvSpPr txBox="1"/>
+          <p:nvPr/>
+        </p:nvSpPr>
+        <p:spPr>
+          <a:xfrm>
+            <a:off x="3977737" y="2918832"/>
+            <a:ext cx="423332" cy="169277"/>
+          </a:xfrm>
+          <a:prstGeom prst="rect">
+            <a:avLst/>
+          </a:prstGeom>
+          <a:noFill/>
+        </p:spPr>
+        <p:txBody>
+          <a:bodyPr wrap="square" rtlCol="0">
+            <a:spAutoFit/>
+          </a:bodyPr>
+          <a:lstStyle/>
+          <a:p>
+            <a:r>
+              <a:rPr lang="en-US" altLang="zh-CN" sz="500" dirty="0">
+                <a:solidFill>
+                  <a:srgbClr val="FF0000"/>
+                </a:solidFill>
+              </a:rPr>
+              <a:t>1bit</a:t>
+            </a:r>
+            <a:endParaRPr lang="zh-CN" altLang="en-US" sz="500" dirty="0">
+              <a:solidFill>
+                <a:srgbClr val="FF0000"/>
+              </a:solidFill>
+            </a:endParaRPr>
+          </a:p>
+        </p:txBody>
+      </p:sp>
+      <p:sp>
+        <p:nvSpPr>
+          <p:cNvPr id="306" name="文本框 305">
+            <a:extLst>
+              <a:ext uri="{FF2B5EF4-FFF2-40B4-BE49-F238E27FC236}">
+                <a16:creationId xmlns:a16="http://schemas.microsoft.com/office/drawing/2014/main" id="{7C0CAEE7-19D9-73CD-6622-57E381B73A8E}"/>
+              </a:ext>
+            </a:extLst>
+          </p:cNvPr>
+          <p:cNvSpPr txBox="1"/>
+          <p:nvPr/>
+        </p:nvSpPr>
+        <p:spPr>
+          <a:xfrm>
+            <a:off x="4658136" y="2906324"/>
+            <a:ext cx="423332" cy="169277"/>
+          </a:xfrm>
+          <a:prstGeom prst="rect">
+            <a:avLst/>
+          </a:prstGeom>
+          <a:noFill/>
+        </p:spPr>
+        <p:txBody>
+          <a:bodyPr wrap="square" rtlCol="0">
+            <a:spAutoFit/>
+          </a:bodyPr>
+          <a:lstStyle/>
+          <a:p>
+            <a:r>
+              <a:rPr lang="en-US" altLang="zh-CN" sz="500" dirty="0">
+                <a:solidFill>
+                  <a:srgbClr val="FF0000"/>
+                </a:solidFill>
+              </a:rPr>
+              <a:t>1bit</a:t>
+            </a:r>
+            <a:endParaRPr lang="zh-CN" altLang="en-US" sz="500" dirty="0">
+              <a:solidFill>
+                <a:srgbClr val="FF0000"/>
+              </a:solidFill>
+            </a:endParaRPr>
+          </a:p>
+        </p:txBody>
+      </p:sp>
+      <p:sp>
+        <p:nvSpPr>
+          <p:cNvPr id="307" name="文本框 306">
+            <a:extLst>
+              <a:ext uri="{FF2B5EF4-FFF2-40B4-BE49-F238E27FC236}">
+                <a16:creationId xmlns:a16="http://schemas.microsoft.com/office/drawing/2014/main" id="{C2E34D0E-6F34-1B26-6925-B8A5BF985A51}"/>
+              </a:ext>
+            </a:extLst>
+          </p:cNvPr>
+          <p:cNvSpPr txBox="1"/>
+          <p:nvPr/>
+        </p:nvSpPr>
+        <p:spPr>
+          <a:xfrm>
+            <a:off x="5781612" y="3559176"/>
+            <a:ext cx="423332" cy="169277"/>
+          </a:xfrm>
+          <a:prstGeom prst="rect">
+            <a:avLst/>
+          </a:prstGeom>
+          <a:noFill/>
+        </p:spPr>
+        <p:txBody>
+          <a:bodyPr wrap="square" rtlCol="0">
+            <a:spAutoFit/>
+          </a:bodyPr>
+          <a:lstStyle/>
+          <a:p>
+            <a:r>
+              <a:rPr lang="en-US" altLang="zh-CN" sz="500" dirty="0">
+                <a:solidFill>
+                  <a:srgbClr val="FF0000"/>
+                </a:solidFill>
+              </a:rPr>
+              <a:t>1bit</a:t>
+            </a:r>
+            <a:endParaRPr lang="zh-CN" altLang="en-US" sz="500" dirty="0">
+              <a:solidFill>
+                <a:srgbClr val="FF0000"/>
+              </a:solidFill>
+            </a:endParaRPr>
+          </a:p>
+        </p:txBody>
+      </p:sp>
+      <p:sp>
+        <p:nvSpPr>
+          <p:cNvPr id="309" name="文本框 308">
+            <a:extLst>
+              <a:ext uri="{FF2B5EF4-FFF2-40B4-BE49-F238E27FC236}">
+                <a16:creationId xmlns:a16="http://schemas.microsoft.com/office/drawing/2014/main" id="{E0D92DC8-AEE3-426D-AF33-5FA710F6731D}"/>
+              </a:ext>
+            </a:extLst>
+          </p:cNvPr>
+          <p:cNvSpPr txBox="1"/>
+          <p:nvPr/>
+        </p:nvSpPr>
+        <p:spPr>
+          <a:xfrm>
+            <a:off x="1353633" y="3430380"/>
+            <a:ext cx="631800" cy="169277"/>
+          </a:xfrm>
+          <a:prstGeom prst="rect">
+            <a:avLst/>
+          </a:prstGeom>
+          <a:noFill/>
+        </p:spPr>
+        <p:txBody>
+          <a:bodyPr wrap="square" rtlCol="0">
+            <a:spAutoFit/>
+          </a:bodyPr>
+          <a:lstStyle/>
+          <a:p>
+            <a:r>
+              <a:rPr lang="en-US" altLang="zh-CN" sz="500" dirty="0">
+                <a:solidFill>
+                  <a:srgbClr val="FF0000"/>
+                </a:solidFill>
+              </a:rPr>
+              <a:t>2bits</a:t>
+            </a:r>
+            <a:endParaRPr lang="zh-CN" altLang="en-US" sz="500" dirty="0">
+              <a:solidFill>
+                <a:srgbClr val="FF0000"/>
+              </a:solidFill>
+            </a:endParaRPr>
+          </a:p>
+        </p:txBody>
+      </p:sp>
+      <p:sp>
+        <p:nvSpPr>
+          <p:cNvPr id="310" name="文本框 309">
+            <a:extLst>
+              <a:ext uri="{FF2B5EF4-FFF2-40B4-BE49-F238E27FC236}">
+                <a16:creationId xmlns:a16="http://schemas.microsoft.com/office/drawing/2014/main" id="{7255960A-35E3-648A-2694-84F6250F47A9}"/>
+              </a:ext>
+            </a:extLst>
+          </p:cNvPr>
+          <p:cNvSpPr txBox="1"/>
+          <p:nvPr/>
+        </p:nvSpPr>
+        <p:spPr>
+          <a:xfrm>
+            <a:off x="3355509" y="2923067"/>
+            <a:ext cx="631800" cy="169277"/>
+          </a:xfrm>
+          <a:prstGeom prst="rect">
+            <a:avLst/>
+          </a:prstGeom>
+          <a:noFill/>
+        </p:spPr>
+        <p:txBody>
+          <a:bodyPr wrap="square" rtlCol="0">
+            <a:spAutoFit/>
+          </a:bodyPr>
+          <a:lstStyle/>
+          <a:p>
+            <a:r>
+              <a:rPr lang="en-US" altLang="zh-CN" sz="500" dirty="0">
+                <a:solidFill>
+                  <a:srgbClr val="FF0000"/>
+                </a:solidFill>
+              </a:rPr>
+              <a:t>2bits</a:t>
+            </a:r>
+            <a:endParaRPr lang="zh-CN" altLang="en-US" sz="500" dirty="0">
+              <a:solidFill>
+                <a:srgbClr val="FF0000"/>
+              </a:solidFill>
+            </a:endParaRPr>
+          </a:p>
+        </p:txBody>
+      </p:sp>
+      <p:sp>
+        <p:nvSpPr>
+          <p:cNvPr id="311" name="文本框 310">
+            <a:extLst>
+              <a:ext uri="{FF2B5EF4-FFF2-40B4-BE49-F238E27FC236}">
+                <a16:creationId xmlns:a16="http://schemas.microsoft.com/office/drawing/2014/main" id="{5C854DD9-C2DA-EC91-E96F-22A72F036877}"/>
+              </a:ext>
+            </a:extLst>
+          </p:cNvPr>
+          <p:cNvSpPr txBox="1"/>
+          <p:nvPr/>
+        </p:nvSpPr>
+        <p:spPr>
+          <a:xfrm>
+            <a:off x="2785700" y="2923465"/>
+            <a:ext cx="631800" cy="169277"/>
+          </a:xfrm>
+          <a:prstGeom prst="rect">
+            <a:avLst/>
+          </a:prstGeom>
+          <a:noFill/>
+        </p:spPr>
+        <p:txBody>
+          <a:bodyPr wrap="square" rtlCol="0">
+            <a:spAutoFit/>
+          </a:bodyPr>
+          <a:lstStyle/>
+          <a:p>
+            <a:r>
+              <a:rPr lang="en-US" altLang="zh-CN" sz="500" dirty="0">
+                <a:solidFill>
+                  <a:srgbClr val="FF0000"/>
+                </a:solidFill>
+              </a:rPr>
+              <a:t>3bits</a:t>
+            </a:r>
+            <a:endParaRPr lang="zh-CN" altLang="en-US" sz="500" dirty="0">
+              <a:solidFill>
+                <a:srgbClr val="FF0000"/>
+              </a:solidFill>
+            </a:endParaRPr>
+          </a:p>
+        </p:txBody>
+      </p:sp>
+      <p:sp>
+        <p:nvSpPr>
+          <p:cNvPr id="312" name="文本框 311">
+            <a:extLst>
+              <a:ext uri="{FF2B5EF4-FFF2-40B4-BE49-F238E27FC236}">
+                <a16:creationId xmlns:a16="http://schemas.microsoft.com/office/drawing/2014/main" id="{DEAA66C7-521F-1514-8857-D82E0DA4B578}"/>
+              </a:ext>
+            </a:extLst>
+          </p:cNvPr>
+          <p:cNvSpPr txBox="1"/>
+          <p:nvPr/>
+        </p:nvSpPr>
+        <p:spPr>
+          <a:xfrm>
+            <a:off x="5411554" y="3430379"/>
+            <a:ext cx="631800" cy="169277"/>
+          </a:xfrm>
+          <a:prstGeom prst="rect">
+            <a:avLst/>
+          </a:prstGeom>
+          <a:noFill/>
+        </p:spPr>
+        <p:txBody>
+          <a:bodyPr wrap="square" rtlCol="0">
+            <a:spAutoFit/>
+          </a:bodyPr>
+          <a:lstStyle/>
+          <a:p>
+            <a:r>
+              <a:rPr lang="en-US" altLang="zh-CN" sz="500" dirty="0">
+                <a:solidFill>
+                  <a:srgbClr val="FF0000"/>
+                </a:solidFill>
+              </a:rPr>
+              <a:t>4bits</a:t>
+            </a:r>
+            <a:endParaRPr lang="zh-CN" altLang="en-US" sz="500" dirty="0">
+              <a:solidFill>
+                <a:srgbClr val="FF0000"/>
+              </a:solidFill>
+            </a:endParaRPr>
+          </a:p>
+        </p:txBody>
+      </p:sp>
+      <p:sp>
+        <p:nvSpPr>
+          <p:cNvPr id="315" name="椭圆 314">
+            <a:extLst>
+              <a:ext uri="{FF2B5EF4-FFF2-40B4-BE49-F238E27FC236}">
+                <a16:creationId xmlns:a16="http://schemas.microsoft.com/office/drawing/2014/main" id="{9018BD5A-410F-C588-1DEC-B8771F376086}"/>
+              </a:ext>
+            </a:extLst>
+          </p:cNvPr>
+          <p:cNvSpPr/>
+          <p:nvPr/>
+        </p:nvSpPr>
+        <p:spPr>
+          <a:xfrm flipH="1" flipV="1">
+            <a:off x="3262804" y="700191"/>
+            <a:ext cx="45719" cy="45719"/>
+          </a:xfrm>
+          <a:prstGeom prst="ellipse">
+            <a:avLst/>
+          </a:prstGeom>
+        </p:spPr>
+        <p:style>
+          <a:lnRef idx="2">
+            <a:schemeClr val="dk1">
+              <a:shade val="15000"/>
+            </a:schemeClr>
+          </a:lnRef>
+          <a:fillRef idx="1">
+            <a:schemeClr val="dk1"/>
+          </a:fillRef>
+          <a:effectRef idx="0">
+            <a:schemeClr val="dk1"/>
+          </a:effectRef>
+          <a:fontRef idx="minor">
+            <a:schemeClr val="lt1"/>
+          </a:fontRef>
+        </p:style>
+        <p:txBody>
+          <a:bodyPr rtlCol="0" anchor="ctr"/>
+          <a:lstStyle/>
+          <a:p>
+            <a:pPr algn="ctr"/>
+            <a:endParaRPr lang="zh-CN" altLang="en-US"/>
+          </a:p>
+        </p:txBody>
+      </p:sp>
+      <p:sp>
+        <p:nvSpPr>
+          <p:cNvPr id="316" name="椭圆 315">
+            <a:extLst>
+              <a:ext uri="{FF2B5EF4-FFF2-40B4-BE49-F238E27FC236}">
+                <a16:creationId xmlns:a16="http://schemas.microsoft.com/office/drawing/2014/main" id="{C6532C3E-674C-80D7-A01E-A4ED40583DD9}"/>
+              </a:ext>
+            </a:extLst>
+          </p:cNvPr>
+          <p:cNvSpPr/>
+          <p:nvPr/>
+        </p:nvSpPr>
+        <p:spPr>
+          <a:xfrm flipH="1" flipV="1">
+            <a:off x="1859417" y="2127757"/>
+            <a:ext cx="45719" cy="45719"/>
+          </a:xfrm>
+          <a:prstGeom prst="ellipse">
+            <a:avLst/>
+          </a:prstGeom>
+        </p:spPr>
+        <p:style>
+          <a:lnRef idx="2">
+            <a:schemeClr val="dk1">
+              <a:shade val="15000"/>
+            </a:schemeClr>
+          </a:lnRef>
+          <a:fillRef idx="1">
+            <a:schemeClr val="dk1"/>
+          </a:fillRef>
+          <a:effectRef idx="0">
+            <a:schemeClr val="dk1"/>
+          </a:effectRef>
+          <a:fontRef idx="minor">
+            <a:schemeClr val="lt1"/>
+          </a:fontRef>
+        </p:style>
+        <p:txBody>
+          <a:bodyPr rtlCol="0" anchor="ctr"/>
+          <a:lstStyle/>
+          <a:p>
+            <a:pPr algn="ctr"/>
+            <a:endParaRPr lang="zh-CN" altLang="en-US"/>
+          </a:p>
+        </p:txBody>
+      </p:sp>
+      <p:sp>
+        <p:nvSpPr>
+          <p:cNvPr id="317" name="椭圆 316">
+            <a:extLst>
+              <a:ext uri="{FF2B5EF4-FFF2-40B4-BE49-F238E27FC236}">
+                <a16:creationId xmlns:a16="http://schemas.microsoft.com/office/drawing/2014/main" id="{16B4705F-26FC-9842-D0F7-D30681AC5277}"/>
+              </a:ext>
+            </a:extLst>
+          </p:cNvPr>
+          <p:cNvSpPr/>
+          <p:nvPr/>
+        </p:nvSpPr>
+        <p:spPr>
+          <a:xfrm flipH="1" flipV="1">
+            <a:off x="2742401" y="2503773"/>
+            <a:ext cx="45719" cy="45719"/>
+          </a:xfrm>
+          <a:prstGeom prst="ellipse">
+            <a:avLst/>
+          </a:prstGeom>
+        </p:spPr>
+        <p:style>
+          <a:lnRef idx="2">
+            <a:schemeClr val="dk1">
+              <a:shade val="15000"/>
+            </a:schemeClr>
+          </a:lnRef>
+          <a:fillRef idx="1">
+            <a:schemeClr val="dk1"/>
+          </a:fillRef>
+          <a:effectRef idx="0">
+            <a:schemeClr val="dk1"/>
+          </a:effectRef>
+          <a:fontRef idx="minor">
+            <a:schemeClr val="lt1"/>
+          </a:fontRef>
+        </p:style>
+        <p:txBody>
+          <a:bodyPr rtlCol="0" anchor="ctr"/>
+          <a:lstStyle/>
+          <a:p>
+            <a:pPr algn="ctr"/>
+            <a:endParaRPr lang="zh-CN" altLang="en-US"/>
+          </a:p>
+        </p:txBody>
+      </p:sp>
+      <p:sp>
+        <p:nvSpPr>
+          <p:cNvPr id="318" name="椭圆 317">
+            <a:extLst>
+              <a:ext uri="{FF2B5EF4-FFF2-40B4-BE49-F238E27FC236}">
+                <a16:creationId xmlns:a16="http://schemas.microsoft.com/office/drawing/2014/main" id="{FCBA468D-0E4D-EECA-0205-6411BC558F92}"/>
+              </a:ext>
+            </a:extLst>
+          </p:cNvPr>
+          <p:cNvSpPr/>
+          <p:nvPr/>
+        </p:nvSpPr>
+        <p:spPr>
+          <a:xfrm flipH="1" flipV="1">
+            <a:off x="2998400" y="2507700"/>
+            <a:ext cx="45719" cy="45719"/>
+          </a:xfrm>
+          <a:prstGeom prst="ellipse">
+            <a:avLst/>
+          </a:prstGeom>
+        </p:spPr>
+        <p:style>
+          <a:lnRef idx="2">
+            <a:schemeClr val="dk1">
+              <a:shade val="15000"/>
+            </a:schemeClr>
+          </a:lnRef>
+          <a:fillRef idx="1">
+            <a:schemeClr val="dk1"/>
+          </a:fillRef>
+          <a:effectRef idx="0">
+            <a:schemeClr val="dk1"/>
+          </a:effectRef>
+          <a:fontRef idx="minor">
+            <a:schemeClr val="lt1"/>
+          </a:fontRef>
+        </p:style>
+        <p:txBody>
+          <a:bodyPr rtlCol="0" anchor="ctr"/>
+          <a:lstStyle/>
+          <a:p>
+            <a:pPr algn="ctr"/>
+            <a:endParaRPr lang="zh-CN" altLang="en-US"/>
+          </a:p>
+        </p:txBody>
+      </p:sp>
+      <p:sp>
+        <p:nvSpPr>
+          <p:cNvPr id="319" name="椭圆 318">
+            <a:extLst>
+              <a:ext uri="{FF2B5EF4-FFF2-40B4-BE49-F238E27FC236}">
+                <a16:creationId xmlns:a16="http://schemas.microsoft.com/office/drawing/2014/main" id="{811921FC-F674-5091-7AE8-2A3E2A3D7A85}"/>
+              </a:ext>
+            </a:extLst>
+          </p:cNvPr>
+          <p:cNvSpPr/>
+          <p:nvPr/>
+        </p:nvSpPr>
+        <p:spPr>
+          <a:xfrm flipH="1" flipV="1">
+            <a:off x="7135858" y="1655610"/>
+            <a:ext cx="45719" cy="45719"/>
+          </a:xfrm>
+          <a:prstGeom prst="ellipse">
+            <a:avLst/>
+          </a:prstGeom>
+        </p:spPr>
+        <p:style>
+          <a:lnRef idx="2">
+            <a:schemeClr val="dk1">
+              <a:shade val="15000"/>
+            </a:schemeClr>
+          </a:lnRef>
+          <a:fillRef idx="1">
+            <a:schemeClr val="dk1"/>
+          </a:fillRef>
+          <a:effectRef idx="0">
+            <a:schemeClr val="dk1"/>
+          </a:effectRef>
+          <a:fontRef idx="minor">
+            <a:schemeClr val="lt1"/>
+          </a:fontRef>
+        </p:style>
+        <p:txBody>
+          <a:bodyPr rtlCol="0" anchor="ctr"/>
+          <a:lstStyle/>
+          <a:p>
+            <a:pPr algn="ctr"/>
+            <a:endParaRPr lang="zh-CN" altLang="en-US"/>
+          </a:p>
+        </p:txBody>
+      </p:sp>
+      <p:sp>
+        <p:nvSpPr>
+          <p:cNvPr id="320" name="椭圆 319">
+            <a:extLst>
+              <a:ext uri="{FF2B5EF4-FFF2-40B4-BE49-F238E27FC236}">
+                <a16:creationId xmlns:a16="http://schemas.microsoft.com/office/drawing/2014/main" id="{BCFCB787-85F1-FBE6-EAE9-499D54D15046}"/>
+              </a:ext>
+            </a:extLst>
+          </p:cNvPr>
+          <p:cNvSpPr/>
+          <p:nvPr/>
+        </p:nvSpPr>
+        <p:spPr>
+          <a:xfrm flipH="1" flipV="1">
+            <a:off x="5281975" y="1701007"/>
+            <a:ext cx="45719" cy="45719"/>
+          </a:xfrm>
+          <a:prstGeom prst="ellipse">
+            <a:avLst/>
+          </a:prstGeom>
+        </p:spPr>
+        <p:style>
+          <a:lnRef idx="2">
+            <a:schemeClr val="dk1">
+              <a:shade val="15000"/>
+            </a:schemeClr>
+          </a:lnRef>
+          <a:fillRef idx="1">
+            <a:schemeClr val="dk1"/>
+          </a:fillRef>
+          <a:effectRef idx="0">
+            <a:schemeClr val="dk1"/>
+          </a:effectRef>
+          <a:fontRef idx="minor">
+            <a:schemeClr val="lt1"/>
+          </a:fontRef>
+        </p:style>
+        <p:txBody>
+          <a:bodyPr rtlCol="0" anchor="ctr"/>
+          <a:lstStyle/>
+          <a:p>
+            <a:pPr algn="ctr"/>
+            <a:endParaRPr lang="zh-CN" altLang="en-US"/>
+          </a:p>
+        </p:txBody>
+      </p:sp>
+      <p:sp>
+        <p:nvSpPr>
+          <p:cNvPr id="321" name="椭圆 320">
+            <a:extLst>
+              <a:ext uri="{FF2B5EF4-FFF2-40B4-BE49-F238E27FC236}">
+                <a16:creationId xmlns:a16="http://schemas.microsoft.com/office/drawing/2014/main" id="{FE2B82E0-9C0E-96DF-EAEB-8A9E6E7E50FF}"/>
+              </a:ext>
+            </a:extLst>
+          </p:cNvPr>
+          <p:cNvSpPr/>
+          <p:nvPr/>
+        </p:nvSpPr>
+        <p:spPr>
+          <a:xfrm flipH="1" flipV="1">
+            <a:off x="4118280" y="2259618"/>
+            <a:ext cx="45719" cy="45719"/>
+          </a:xfrm>
+          <a:prstGeom prst="ellipse">
+            <a:avLst/>
+          </a:prstGeom>
+        </p:spPr>
+        <p:style>
+          <a:lnRef idx="2">
+            <a:schemeClr val="dk1">
+              <a:shade val="15000"/>
+            </a:schemeClr>
+          </a:lnRef>
+          <a:fillRef idx="1">
+            <a:schemeClr val="dk1"/>
+          </a:fillRef>
+          <a:effectRef idx="0">
+            <a:schemeClr val="dk1"/>
+          </a:effectRef>
+          <a:fontRef idx="minor">
+            <a:schemeClr val="lt1"/>
+          </a:fontRef>
+        </p:style>
+        <p:txBody>
+          <a:bodyPr rtlCol="0" anchor="ctr"/>
+          <a:lstStyle/>
+          <a:p>
+            <a:pPr algn="ctr"/>
+            <a:endParaRPr lang="zh-CN" altLang="en-US"/>
+          </a:p>
+        </p:txBody>
+      </p:sp>
+      <p:cxnSp>
+        <p:nvCxnSpPr>
+          <p:cNvPr id="9" name="直接箭头连接符 8">
+            <a:extLst>
+              <a:ext uri="{FF2B5EF4-FFF2-40B4-BE49-F238E27FC236}">
+                <a16:creationId xmlns:a16="http://schemas.microsoft.com/office/drawing/2014/main" id="{CBED1552-44CA-49D0-3030-58F91E88AF88}"/>
+              </a:ext>
+            </a:extLst>
+          </p:cNvPr>
+          <p:cNvCxnSpPr>
+            <a:cxnSpLocks/>
+          </p:cNvCxnSpPr>
+          <p:nvPr/>
+        </p:nvCxnSpPr>
+        <p:spPr>
+          <a:xfrm>
+            <a:off x="1233487" y="2360772"/>
+            <a:ext cx="162751" cy="0"/>
+          </a:xfrm>
+          <a:prstGeom prst="straightConnector1">
+            <a:avLst/>
+          </a:prstGeom>
+          <a:ln>
+            <a:tailEnd type="triangle"/>
+          </a:ln>
+        </p:spPr>
+        <p:style>
+          <a:lnRef idx="1">
+            <a:schemeClr val="dk1"/>
+          </a:lnRef>
+          <a:fillRef idx="0">
+            <a:schemeClr val="dk1"/>
+          </a:fillRef>
+          <a:effectRef idx="0">
+            <a:schemeClr val="dk1"/>
+          </a:effectRef>
+          <a:fontRef idx="minor">
+            <a:schemeClr val="tx1"/>
+          </a:fontRef>
+        </p:style>
+      </p:cxnSp>
+      <p:cxnSp>
+        <p:nvCxnSpPr>
+          <p:cNvPr id="12" name="直接连接符 11">
+            <a:extLst>
+              <a:ext uri="{FF2B5EF4-FFF2-40B4-BE49-F238E27FC236}">
+                <a16:creationId xmlns:a16="http://schemas.microsoft.com/office/drawing/2014/main" id="{6EF173D9-9AF8-2653-D429-F932F7846701}"/>
+              </a:ext>
+            </a:extLst>
+          </p:cNvPr>
+          <p:cNvCxnSpPr>
+            <a:cxnSpLocks/>
+          </p:cNvCxnSpPr>
+          <p:nvPr/>
+        </p:nvCxnSpPr>
+        <p:spPr>
+          <a:xfrm>
+            <a:off x="1231613" y="2363277"/>
+            <a:ext cx="0" cy="329140"/>
+          </a:xfrm>
+          <a:prstGeom prst="line">
+            <a:avLst/>
+          </a:prstGeom>
+        </p:spPr>
+        <p:style>
+          <a:lnRef idx="1">
+            <a:schemeClr val="dk1"/>
+          </a:lnRef>
+          <a:fillRef idx="0">
+            <a:schemeClr val="dk1"/>
+          </a:fillRef>
+          <a:effectRef idx="0">
+            <a:schemeClr val="dk1"/>
+          </a:effectRef>
+          <a:fontRef idx="minor">
+            <a:schemeClr val="tx1"/>
+          </a:fontRef>
+        </p:style>
+      </p:cxnSp>
+    </p:spTree>
+    <p:extLst>
+      <p:ext uri="{BB962C8B-B14F-4D97-AF65-F5344CB8AC3E}">
+        <p14:creationId xmlns:p14="http://schemas.microsoft.com/office/powerpoint/2010/main" val="34915461"/>
       </p:ext>
     </p:extLst>
   </p:cSld>
